--- a/statistics_01_probability.pptx
+++ b/statistics_01_probability.pptx
@@ -5,7 +5,7 @@
     <p:sldMasterId id="2147483659" r:id="rId1"/>
   </p:sldMasterIdLst>
   <p:notesMasterIdLst>
-    <p:notesMasterId r:id="rId10"/>
+    <p:notesMasterId r:id="rId11"/>
   </p:notesMasterIdLst>
   <p:sldIdLst>
     <p:sldId id="262" r:id="rId2"/>
@@ -15,7 +15,8 @@
     <p:sldId id="274" r:id="rId6"/>
     <p:sldId id="292" r:id="rId7"/>
     <p:sldId id="290" r:id="rId8"/>
-    <p:sldId id="265" r:id="rId9"/>
+    <p:sldId id="293" r:id="rId9"/>
+    <p:sldId id="265" r:id="rId10"/>
   </p:sldIdLst>
   <p:sldSz cx="12192000" cy="6858000"/>
   <p:notesSz cx="6858000" cy="9144000"/>
@@ -18212,6 +18213,522 @@
           <p:cNvPr id="4" name="TextBox 3">
             <a:extLst>
               <a:ext uri="{FF2B5EF4-FFF2-40B4-BE49-F238E27FC236}">
+                <a16:creationId xmlns:a16="http://schemas.microsoft.com/office/drawing/2014/main" id="{929F7588-E09F-B248-9AF8-0614D59D3E5A}"/>
+              </a:ext>
+            </a:extLst>
+          </p:cNvPr>
+          <p:cNvSpPr txBox="1"/>
+          <p:nvPr/>
+        </p:nvSpPr>
+        <p:spPr>
+          <a:xfrm>
+            <a:off x="0" y="0"/>
+            <a:ext cx="7010400" cy="738664"/>
+          </a:xfrm>
+          <a:prstGeom prst="rect">
+            <a:avLst/>
+          </a:prstGeom>
+          <a:noFill/>
+        </p:spPr>
+        <p:txBody>
+          <a:bodyPr wrap="square" rtlCol="0">
+            <a:spAutoFit/>
+          </a:bodyPr>
+          <a:lstStyle/>
+          <a:p>
+            <a:r>
+              <a:rPr lang="en-US" sz="2800" b="1" dirty="0"/>
+              <a:t>Boy or Girl Paradox</a:t>
+            </a:r>
+          </a:p>
+          <a:p>
+            <a:r>
+              <a:rPr lang="en-US" b="1" dirty="0"/>
+              <a:t>(a.k.a. "The Two Child Problem", "Mr. Smith's Children", "Mrs. Smith Problem").</a:t>
+            </a:r>
+          </a:p>
+        </p:txBody>
+      </p:sp>
+      <p:sp>
+        <p:nvSpPr>
+          <p:cNvPr id="5" name="TextBox 4">
+            <a:extLst>
+              <a:ext uri="{FF2B5EF4-FFF2-40B4-BE49-F238E27FC236}">
+                <a16:creationId xmlns:a16="http://schemas.microsoft.com/office/drawing/2014/main" id="{6C2F706E-77C7-AF44-9FCC-6397C644CBC6}"/>
+              </a:ext>
+            </a:extLst>
+          </p:cNvPr>
+          <p:cNvSpPr txBox="1"/>
+          <p:nvPr/>
+        </p:nvSpPr>
+        <p:spPr>
+          <a:xfrm>
+            <a:off x="0" y="1341119"/>
+            <a:ext cx="5413248" cy="5047536"/>
+          </a:xfrm>
+          <a:prstGeom prst="rect">
+            <a:avLst/>
+          </a:prstGeom>
+          <a:noFill/>
+        </p:spPr>
+        <p:txBody>
+          <a:bodyPr wrap="square" rtlCol="0">
+            <a:spAutoFit/>
+          </a:bodyPr>
+          <a:lstStyle/>
+          <a:p>
+            <a:r>
+              <a:rPr lang="en-US" dirty="0"/>
+              <a:t>Initially formulated at 1959, when Martin Gardner featured it in his October 1959 "Mathematical Games column" in Scientific American. He titled it The Two Children Problem, and phrased the paradox as follows:</a:t>
+            </a:r>
+          </a:p>
+          <a:p>
+            <a:endParaRPr lang="en-US" dirty="0"/>
+          </a:p>
+          <a:p>
+            <a:r>
+              <a:rPr lang="en-US" dirty="0"/>
+              <a:t>Question 1: Mr. Jones has two children. The older child is a girl. What is the probability that both children are girls?</a:t>
+            </a:r>
+          </a:p>
+          <a:p>
+            <a:endParaRPr lang="en-US" dirty="0"/>
+          </a:p>
+          <a:p>
+            <a:endParaRPr lang="en-US" dirty="0"/>
+          </a:p>
+          <a:p>
+            <a:endParaRPr lang="en-US" dirty="0"/>
+          </a:p>
+          <a:p>
+            <a:r>
+              <a:rPr lang="en-US" dirty="0"/>
+              <a:t>Question 2: Mr. Smith has two children. At least one of them is a boy. What is the probability that both children are boys?</a:t>
+            </a:r>
+          </a:p>
+          <a:p>
+            <a:endParaRPr lang="en-US" dirty="0"/>
+          </a:p>
+          <a:p>
+            <a:endParaRPr lang="en-US" dirty="0"/>
+          </a:p>
+          <a:p>
+            <a:r>
+              <a:rPr lang="en-US" dirty="0"/>
+              <a:t> - </a:t>
+            </a:r>
+            <a:r>
+              <a:rPr lang="en-US" dirty="0">
+                <a:hlinkClick r:id="rId2"/>
+              </a:rPr>
+              <a:t>https://en.wikipedia.org/wiki/Boy_or_Girl_paradox</a:t>
+            </a:r>
+            <a:r>
+              <a:rPr lang="en-US" dirty="0"/>
+              <a:t> </a:t>
+            </a:r>
+          </a:p>
+          <a:p>
+            <a:endParaRPr lang="en-US" dirty="0"/>
+          </a:p>
+          <a:p>
+            <a:endParaRPr lang="en-US" dirty="0"/>
+          </a:p>
+          <a:p>
+            <a:r>
+              <a:rPr lang="en-US" dirty="0"/>
+              <a:t>video - This May Be The Most Counterintuitive Probability Paradox I've Ever Seen | Can you spot the error?</a:t>
+            </a:r>
+          </a:p>
+          <a:p>
+            <a:r>
+              <a:rPr lang="en-US" dirty="0"/>
+              <a:t>- </a:t>
+            </a:r>
+            <a:r>
+              <a:rPr lang="en-US" dirty="0">
+                <a:hlinkClick r:id="rId3"/>
+              </a:rPr>
+              <a:t>https://www.youtube.com/watch?v=bDZieLmya_I</a:t>
+            </a:r>
+            <a:endParaRPr lang="en-US" dirty="0"/>
+          </a:p>
+          <a:p>
+            <a:endParaRPr lang="en-US" dirty="0"/>
+          </a:p>
+          <a:p>
+            <a:r>
+              <a:rPr lang="en-US" dirty="0"/>
+              <a:t>video - The Boy or Girl Probability Paradox Resolved</a:t>
+            </a:r>
+          </a:p>
+          <a:p>
+            <a:r>
+              <a:rPr lang="en-US" dirty="0"/>
+              <a:t>- </a:t>
+            </a:r>
+            <a:r>
+              <a:rPr lang="en-US" dirty="0">
+                <a:hlinkClick r:id="rId4"/>
+              </a:rPr>
+              <a:t>https://www.youtube.com/watch?v=ElB350w8iJo</a:t>
+            </a:r>
+            <a:r>
+              <a:rPr lang="en-US" dirty="0"/>
+              <a:t> </a:t>
+            </a:r>
+          </a:p>
+        </p:txBody>
+      </p:sp>
+      <p:pic>
+        <p:nvPicPr>
+          <p:cNvPr id="6" name="Picture 5">
+            <a:extLst>
+              <a:ext uri="{FF2B5EF4-FFF2-40B4-BE49-F238E27FC236}">
+                <a16:creationId xmlns:a16="http://schemas.microsoft.com/office/drawing/2014/main" id="{CE8981C4-01EB-C345-AB38-EA6A36D18AD5}"/>
+              </a:ext>
+            </a:extLst>
+          </p:cNvPr>
+          <p:cNvPicPr>
+            <a:picLocks noChangeAspect="1"/>
+          </p:cNvPicPr>
+          <p:nvPr/>
+        </p:nvPicPr>
+        <p:blipFill>
+          <a:blip r:embed="rId5" cstate="email">
+            <a:extLst>
+              <a:ext uri="{28A0092B-C50C-407E-A947-70E740481C1C}">
+                <a14:useLocalDpi xmlns:a14="http://schemas.microsoft.com/office/drawing/2010/main"/>
+              </a:ext>
+            </a:extLst>
+          </a:blip>
+          <a:stretch>
+            <a:fillRect/>
+          </a:stretch>
+        </p:blipFill>
+        <p:spPr>
+          <a:xfrm>
+            <a:off x="8618118" y="1019080"/>
+            <a:ext cx="1896973" cy="1431512"/>
+          </a:xfrm>
+          <a:prstGeom prst="rect">
+            <a:avLst/>
+          </a:prstGeom>
+        </p:spPr>
+      </p:pic>
+      <p:pic>
+        <p:nvPicPr>
+          <p:cNvPr id="7" name="Picture 6">
+            <a:extLst>
+              <a:ext uri="{FF2B5EF4-FFF2-40B4-BE49-F238E27FC236}">
+                <a16:creationId xmlns:a16="http://schemas.microsoft.com/office/drawing/2014/main" id="{CA566D42-48FC-5349-A28F-E08379F94264}"/>
+              </a:ext>
+            </a:extLst>
+          </p:cNvPr>
+          <p:cNvPicPr>
+            <a:picLocks noChangeAspect="1"/>
+          </p:cNvPicPr>
+          <p:nvPr/>
+        </p:nvPicPr>
+        <p:blipFill>
+          <a:blip r:embed="rId6" cstate="email">
+            <a:extLst>
+              <a:ext uri="{28A0092B-C50C-407E-A947-70E740481C1C}">
+                <a14:useLocalDpi xmlns:a14="http://schemas.microsoft.com/office/drawing/2010/main"/>
+              </a:ext>
+            </a:extLst>
+          </a:blip>
+          <a:stretch>
+            <a:fillRect/>
+          </a:stretch>
+        </p:blipFill>
+        <p:spPr>
+          <a:xfrm>
+            <a:off x="8618118" y="3154862"/>
+            <a:ext cx="1659816" cy="1252547"/>
+          </a:xfrm>
+          <a:prstGeom prst="rect">
+            <a:avLst/>
+          </a:prstGeom>
+        </p:spPr>
+      </p:pic>
+      <p:pic>
+        <p:nvPicPr>
+          <p:cNvPr id="8" name="Picture 7">
+            <a:extLst>
+              <a:ext uri="{FF2B5EF4-FFF2-40B4-BE49-F238E27FC236}">
+                <a16:creationId xmlns:a16="http://schemas.microsoft.com/office/drawing/2014/main" id="{F6EBFE19-F7F6-8D45-95F9-7186733F377F}"/>
+              </a:ext>
+            </a:extLst>
+          </p:cNvPr>
+          <p:cNvPicPr>
+            <a:picLocks noChangeAspect="1"/>
+          </p:cNvPicPr>
+          <p:nvPr/>
+        </p:nvPicPr>
+        <p:blipFill>
+          <a:blip r:embed="rId7" cstate="email">
+            <a:extLst>
+              <a:ext uri="{28A0092B-C50C-407E-A947-70E740481C1C}">
+                <a14:useLocalDpi xmlns:a14="http://schemas.microsoft.com/office/drawing/2010/main"/>
+              </a:ext>
+            </a:extLst>
+          </a:blip>
+          <a:stretch>
+            <a:fillRect/>
+          </a:stretch>
+        </p:blipFill>
+        <p:spPr>
+          <a:xfrm>
+            <a:off x="6888073" y="4407409"/>
+            <a:ext cx="5219700" cy="1662181"/>
+          </a:xfrm>
+          <a:prstGeom prst="rect">
+            <a:avLst/>
+          </a:prstGeom>
+        </p:spPr>
+      </p:pic>
+      <p:pic>
+        <p:nvPicPr>
+          <p:cNvPr id="9" name="Picture 8">
+            <a:extLst>
+              <a:ext uri="{FF2B5EF4-FFF2-40B4-BE49-F238E27FC236}">
+                <a16:creationId xmlns:a16="http://schemas.microsoft.com/office/drawing/2014/main" id="{7F216E6E-201A-AE49-8004-C7E4DB60139B}"/>
+              </a:ext>
+            </a:extLst>
+          </p:cNvPr>
+          <p:cNvPicPr>
+            <a:picLocks noChangeAspect="1"/>
+          </p:cNvPicPr>
+          <p:nvPr/>
+        </p:nvPicPr>
+        <p:blipFill>
+          <a:blip r:embed="rId8" cstate="email">
+            <a:extLst>
+              <a:ext uri="{28A0092B-C50C-407E-A947-70E740481C1C}">
+                <a14:useLocalDpi xmlns:a14="http://schemas.microsoft.com/office/drawing/2010/main"/>
+              </a:ext>
+            </a:extLst>
+          </a:blip>
+          <a:stretch>
+            <a:fillRect/>
+          </a:stretch>
+        </p:blipFill>
+        <p:spPr>
+          <a:xfrm>
+            <a:off x="6982533" y="6233057"/>
+            <a:ext cx="3076149" cy="590550"/>
+          </a:xfrm>
+          <a:prstGeom prst="rect">
+            <a:avLst/>
+          </a:prstGeom>
+        </p:spPr>
+      </p:pic>
+      <p:sp>
+        <p:nvSpPr>
+          <p:cNvPr id="10" name="TextBox 9">
+            <a:extLst>
+              <a:ext uri="{FF2B5EF4-FFF2-40B4-BE49-F238E27FC236}">
+                <a16:creationId xmlns:a16="http://schemas.microsoft.com/office/drawing/2014/main" id="{6515EADD-2F8D-4D47-B4FB-237457FCE401}"/>
+              </a:ext>
+            </a:extLst>
+          </p:cNvPr>
+          <p:cNvSpPr txBox="1"/>
+          <p:nvPr/>
+        </p:nvSpPr>
+        <p:spPr>
+          <a:xfrm>
+            <a:off x="7378700" y="1492681"/>
+            <a:ext cx="838200" cy="307777"/>
+          </a:xfrm>
+          <a:prstGeom prst="rect">
+            <a:avLst/>
+          </a:prstGeom>
+          <a:noFill/>
+        </p:spPr>
+        <p:txBody>
+          <a:bodyPr wrap="square" rtlCol="0">
+            <a:spAutoFit/>
+          </a:bodyPr>
+          <a:lstStyle/>
+          <a:p>
+            <a:r>
+              <a:rPr lang="en-US" b="1" dirty="0">
+                <a:solidFill>
+                  <a:srgbClr val="FF0000"/>
+                </a:solidFill>
+              </a:rPr>
+              <a:t>P = 1/2</a:t>
+            </a:r>
+          </a:p>
+        </p:txBody>
+      </p:sp>
+      <p:sp>
+        <p:nvSpPr>
+          <p:cNvPr id="11" name="TextBox 10">
+            <a:extLst>
+              <a:ext uri="{FF2B5EF4-FFF2-40B4-BE49-F238E27FC236}">
+                <a16:creationId xmlns:a16="http://schemas.microsoft.com/office/drawing/2014/main" id="{7FE20994-BE99-4142-BFCB-6E614279346F}"/>
+              </a:ext>
+            </a:extLst>
+          </p:cNvPr>
+          <p:cNvSpPr txBox="1"/>
+          <p:nvPr/>
+        </p:nvSpPr>
+        <p:spPr>
+          <a:xfrm>
+            <a:off x="7378700" y="3603386"/>
+            <a:ext cx="838200" cy="307777"/>
+          </a:xfrm>
+          <a:prstGeom prst="rect">
+            <a:avLst/>
+          </a:prstGeom>
+          <a:noFill/>
+        </p:spPr>
+        <p:txBody>
+          <a:bodyPr wrap="square" rtlCol="0">
+            <a:spAutoFit/>
+          </a:bodyPr>
+          <a:lstStyle/>
+          <a:p>
+            <a:r>
+              <a:rPr lang="en-US" b="1" dirty="0">
+                <a:solidFill>
+                  <a:srgbClr val="FF0000"/>
+                </a:solidFill>
+              </a:rPr>
+              <a:t>P = 1/3</a:t>
+            </a:r>
+          </a:p>
+        </p:txBody>
+      </p:sp>
+      <p:sp>
+        <p:nvSpPr>
+          <p:cNvPr id="14" name="Right Arrow 13">
+            <a:extLst>
+              <a:ext uri="{FF2B5EF4-FFF2-40B4-BE49-F238E27FC236}">
+                <a16:creationId xmlns:a16="http://schemas.microsoft.com/office/drawing/2014/main" id="{FD13A09C-709B-8A40-A89E-21595B6F32E2}"/>
+              </a:ext>
+            </a:extLst>
+          </p:cNvPr>
+          <p:cNvSpPr/>
+          <p:nvPr/>
+        </p:nvSpPr>
+        <p:spPr>
+          <a:xfrm rot="966397">
+            <a:off x="5705856" y="3835034"/>
+            <a:ext cx="914400" cy="307777"/>
+          </a:xfrm>
+          <a:prstGeom prst="rightArrow">
+            <a:avLst/>
+          </a:prstGeom>
+        </p:spPr>
+        <p:style>
+          <a:lnRef idx="2">
+            <a:schemeClr val="accent1">
+              <a:shade val="50000"/>
+            </a:schemeClr>
+          </a:lnRef>
+          <a:fillRef idx="1">
+            <a:schemeClr val="accent1"/>
+          </a:fillRef>
+          <a:effectRef idx="0">
+            <a:schemeClr val="accent1"/>
+          </a:effectRef>
+          <a:fontRef idx="minor">
+            <a:schemeClr val="lt1"/>
+          </a:fontRef>
+        </p:style>
+        <p:txBody>
+          <a:bodyPr rtlCol="0" anchor="ctr"/>
+          <a:lstStyle/>
+          <a:p>
+            <a:pPr algn="ctr"/>
+            <a:endParaRPr lang="en-US"/>
+          </a:p>
+        </p:txBody>
+      </p:sp>
+      <p:sp>
+        <p:nvSpPr>
+          <p:cNvPr id="15" name="Right Arrow 14">
+            <a:extLst>
+              <a:ext uri="{FF2B5EF4-FFF2-40B4-BE49-F238E27FC236}">
+                <a16:creationId xmlns:a16="http://schemas.microsoft.com/office/drawing/2014/main" id="{A5361324-BBC4-5342-9E8F-153114277AB2}"/>
+              </a:ext>
+            </a:extLst>
+          </p:cNvPr>
+          <p:cNvSpPr/>
+          <p:nvPr/>
+        </p:nvSpPr>
+        <p:spPr>
+          <a:xfrm rot="20081528">
+            <a:off x="5758979" y="2104279"/>
+            <a:ext cx="914400" cy="307777"/>
+          </a:xfrm>
+          <a:prstGeom prst="rightArrow">
+            <a:avLst/>
+          </a:prstGeom>
+        </p:spPr>
+        <p:style>
+          <a:lnRef idx="2">
+            <a:schemeClr val="accent1">
+              <a:shade val="50000"/>
+            </a:schemeClr>
+          </a:lnRef>
+          <a:fillRef idx="1">
+            <a:schemeClr val="accent1"/>
+          </a:fillRef>
+          <a:effectRef idx="0">
+            <a:schemeClr val="accent1"/>
+          </a:effectRef>
+          <a:fontRef idx="minor">
+            <a:schemeClr val="lt1"/>
+          </a:fontRef>
+        </p:style>
+        <p:txBody>
+          <a:bodyPr rtlCol="0" anchor="ctr"/>
+          <a:lstStyle/>
+          <a:p>
+            <a:pPr algn="ctr"/>
+            <a:endParaRPr lang="en-US"/>
+          </a:p>
+        </p:txBody>
+      </p:sp>
+    </p:spTree>
+    <p:extLst>
+      <p:ext uri="{BB962C8B-B14F-4D97-AF65-F5344CB8AC3E}">
+        <p14:creationId xmlns:p14="http://schemas.microsoft.com/office/powerpoint/2010/main" val="3145259505"/>
+      </p:ext>
+    </p:extLst>
+  </p:cSld>
+  <p:clrMapOvr>
+    <a:masterClrMapping/>
+  </p:clrMapOvr>
+</p:sld>
+</file>
+
+<file path=ppt/slides/slide9.xml><?xml version="1.0" encoding="utf-8"?>
+<p:sld xmlns:a="http://schemas.openxmlformats.org/drawingml/2006/main" xmlns:r="http://schemas.openxmlformats.org/officeDocument/2006/relationships" xmlns:p="http://schemas.openxmlformats.org/presentationml/2006/main">
+  <p:cSld>
+    <p:spTree>
+      <p:nvGrpSpPr>
+        <p:cNvPr id="1" name=""/>
+        <p:cNvGrpSpPr/>
+        <p:nvPr/>
+      </p:nvGrpSpPr>
+      <p:grpSpPr>
+        <a:xfrm>
+          <a:off x="0" y="0"/>
+          <a:ext cx="0" cy="0"/>
+          <a:chOff x="0" y="0"/>
+          <a:chExt cx="0" cy="0"/>
+        </a:xfrm>
+      </p:grpSpPr>
+      <p:sp>
+        <p:nvSpPr>
+          <p:cNvPr id="4" name="TextBox 3">
+            <a:extLst>
+              <a:ext uri="{FF2B5EF4-FFF2-40B4-BE49-F238E27FC236}">
                 <a16:creationId xmlns:a16="http://schemas.microsoft.com/office/drawing/2014/main" id="{1EB5F268-965F-C142-A102-83C02389B555}"/>
               </a:ext>
             </a:extLst>

--- a/statistics_01_probability.pptx
+++ b/statistics_01_probability.pptx
@@ -5,18 +5,19 @@
     <p:sldMasterId id="2147483659" r:id="rId1"/>
   </p:sldMasterIdLst>
   <p:notesMasterIdLst>
-    <p:notesMasterId r:id="rId11"/>
+    <p:notesMasterId r:id="rId12"/>
   </p:notesMasterIdLst>
   <p:sldIdLst>
     <p:sldId id="262" r:id="rId2"/>
     <p:sldId id="263" r:id="rId3"/>
     <p:sldId id="264" r:id="rId4"/>
-    <p:sldId id="273" r:id="rId5"/>
+    <p:sldId id="294" r:id="rId5"/>
     <p:sldId id="274" r:id="rId6"/>
-    <p:sldId id="292" r:id="rId7"/>
-    <p:sldId id="290" r:id="rId8"/>
-    <p:sldId id="293" r:id="rId9"/>
-    <p:sldId id="265" r:id="rId10"/>
+    <p:sldId id="273" r:id="rId7"/>
+    <p:sldId id="292" r:id="rId8"/>
+    <p:sldId id="290" r:id="rId9"/>
+    <p:sldId id="293" r:id="rId10"/>
+    <p:sldId id="265" r:id="rId11"/>
   </p:sldIdLst>
   <p:sldSz cx="12192000" cy="6858000"/>
   <p:notesSz cx="6858000" cy="9144000"/>
@@ -14806,6 +14807,464 @@
 </p:sld>
 </file>
 
+<file path=ppt/slides/slide10.xml><?xml version="1.0" encoding="utf-8"?>
+<p:sld xmlns:a="http://schemas.openxmlformats.org/drawingml/2006/main" xmlns:r="http://schemas.openxmlformats.org/officeDocument/2006/relationships" xmlns:p="http://schemas.openxmlformats.org/presentationml/2006/main">
+  <p:cSld>
+    <p:spTree>
+      <p:nvGrpSpPr>
+        <p:cNvPr id="1" name=""/>
+        <p:cNvGrpSpPr/>
+        <p:nvPr/>
+      </p:nvGrpSpPr>
+      <p:grpSpPr>
+        <a:xfrm>
+          <a:off x="0" y="0"/>
+          <a:ext cx="0" cy="0"/>
+          <a:chOff x="0" y="0"/>
+          <a:chExt cx="0" cy="0"/>
+        </a:xfrm>
+      </p:grpSpPr>
+      <p:sp>
+        <p:nvSpPr>
+          <p:cNvPr id="4" name="TextBox 3">
+            <a:extLst>
+              <a:ext uri="{FF2B5EF4-FFF2-40B4-BE49-F238E27FC236}">
+                <a16:creationId xmlns:a16="http://schemas.microsoft.com/office/drawing/2014/main" id="{1EB5F268-965F-C142-A102-83C02389B555}"/>
+              </a:ext>
+            </a:extLst>
+          </p:cNvPr>
+          <p:cNvSpPr txBox="1"/>
+          <p:nvPr/>
+        </p:nvSpPr>
+        <p:spPr>
+          <a:xfrm>
+            <a:off x="84912" y="85118"/>
+            <a:ext cx="5906814" cy="6771084"/>
+          </a:xfrm>
+          <a:prstGeom prst="rect">
+            <a:avLst/>
+          </a:prstGeom>
+          <a:noFill/>
+        </p:spPr>
+        <p:txBody>
+          <a:bodyPr wrap="square" rtlCol="0">
+            <a:spAutoFit/>
+          </a:bodyPr>
+          <a:lstStyle/>
+          <a:p>
+            <a:r>
+              <a:rPr lang="en-US" sz="1800" b="1" dirty="0"/>
+              <a:t>Random Variable. Probability Distribution</a:t>
+            </a:r>
+          </a:p>
+          <a:p>
+            <a:br>
+              <a:rPr lang="en-US" dirty="0"/>
+            </a:br>
+            <a:r>
+              <a:rPr lang="en-US" b="1" dirty="0">
+                <a:solidFill>
+                  <a:srgbClr val="0070C0"/>
+                </a:solidFill>
+              </a:rPr>
+              <a:t>Random variable </a:t>
+            </a:r>
+            <a:r>
+              <a:rPr lang="en-US" dirty="0"/>
+              <a:t>is a numerical variable taking different values.</a:t>
+            </a:r>
+          </a:p>
+          <a:p>
+            <a:r>
+              <a:rPr lang="en-US" dirty="0"/>
+              <a:t>Values may be </a:t>
+            </a:r>
+            <a:r>
+              <a:rPr lang="en-US" b="1" dirty="0">
+                <a:solidFill>
+                  <a:srgbClr val="0070C0"/>
+                </a:solidFill>
+              </a:rPr>
+              <a:t>discrete or continuous</a:t>
+            </a:r>
+            <a:r>
+              <a:rPr lang="en-US" dirty="0"/>
+              <a:t>.</a:t>
+            </a:r>
+          </a:p>
+          <a:p>
+            <a:endParaRPr lang="en-US" dirty="0"/>
+          </a:p>
+          <a:p>
+            <a:r>
+              <a:rPr lang="en-US" dirty="0"/>
+              <a:t>For example, think of variable “x” which may have any real value between -10 and +10.</a:t>
+            </a:r>
+          </a:p>
+          <a:p>
+            <a:endParaRPr lang="en-US" dirty="0"/>
+          </a:p>
+          <a:p>
+            <a:r>
+              <a:rPr lang="en-US" dirty="0"/>
+              <a:t>Or think of a variable “z” which can have discrete values 0,0.1,0.2, … 0.9, 1.0</a:t>
+            </a:r>
+          </a:p>
+          <a:p>
+            <a:endParaRPr lang="en-US" dirty="0"/>
+          </a:p>
+          <a:p>
+            <a:r>
+              <a:rPr lang="en-US" sz="2400" b="1" dirty="0">
+                <a:solidFill>
+                  <a:srgbClr val="FF0000"/>
+                </a:solidFill>
+              </a:rPr>
+              <a:t>Discrete Case</a:t>
+            </a:r>
+          </a:p>
+          <a:p>
+            <a:r>
+              <a:rPr lang="en-US" b="1" dirty="0">
+                <a:solidFill>
+                  <a:srgbClr val="0070C0"/>
+                </a:solidFill>
+              </a:rPr>
+              <a:t>Probability function </a:t>
+            </a:r>
+            <a:r>
+              <a:rPr lang="en-US" dirty="0"/>
+              <a:t>P(x) of a discrete random variable “x” </a:t>
+            </a:r>
+          </a:p>
+          <a:p>
+            <a:r>
+              <a:rPr lang="en-US" dirty="0"/>
+              <a:t>is simply a function which gives probability of discrete values.</a:t>
+            </a:r>
+          </a:p>
+          <a:p>
+            <a:endParaRPr lang="en-US" dirty="0"/>
+          </a:p>
+          <a:p>
+            <a:r>
+              <a:rPr lang="en-US" dirty="0"/>
+              <a:t>For example, if the random variable “x” may have two values: ( 0 or 1 ),</a:t>
+            </a:r>
+          </a:p>
+          <a:p>
+            <a:r>
+              <a:rPr lang="en-US" dirty="0"/>
+              <a:t>and if probabilities of those values are equal, then</a:t>
+            </a:r>
+          </a:p>
+          <a:p>
+            <a:endParaRPr lang="en-US" dirty="0"/>
+          </a:p>
+          <a:p>
+            <a:r>
+              <a:rPr lang="en-US" dirty="0"/>
+              <a:t>P(0) = 0.5, f(1) = 0.5.</a:t>
+            </a:r>
+          </a:p>
+          <a:p>
+            <a:endParaRPr lang="en-US" dirty="0"/>
+          </a:p>
+          <a:p>
+            <a:r>
+              <a:rPr lang="en-US" dirty="0"/>
+              <a:t>The sum of individual probabilities for all possible values should be 1.</a:t>
+            </a:r>
+          </a:p>
+          <a:p>
+            <a:endParaRPr lang="en-US" dirty="0"/>
+          </a:p>
+          <a:p>
+            <a:r>
+              <a:rPr lang="en-US" b="1" dirty="0">
+                <a:solidFill>
+                  <a:srgbClr val="0070C0"/>
+                </a:solidFill>
+              </a:rPr>
+              <a:t>Expected value </a:t>
+            </a:r>
+            <a:r>
+              <a:rPr lang="en-US" dirty="0"/>
+              <a:t>is an weighted average of all values.</a:t>
+            </a:r>
+          </a:p>
+          <a:p>
+            <a:endParaRPr lang="en-US" dirty="0"/>
+          </a:p>
+          <a:p>
+            <a:r>
+              <a:rPr lang="en-US" dirty="0"/>
+              <a:t>E(x) = sum(Xi*P(Xi)), where Xi goes through all allowed values of X.</a:t>
+            </a:r>
+          </a:p>
+          <a:p>
+            <a:endParaRPr lang="en-US" dirty="0"/>
+          </a:p>
+          <a:p>
+            <a:r>
+              <a:rPr lang="en-US" b="1" dirty="0">
+                <a:solidFill>
+                  <a:srgbClr val="0070C0"/>
+                </a:solidFill>
+              </a:rPr>
+              <a:t>Variance = sigma squared </a:t>
+            </a:r>
+            <a:r>
+              <a:rPr lang="en-US" dirty="0"/>
+              <a:t>= sum( (Xi-E(x))**2 * P(Xi) )</a:t>
+            </a:r>
+          </a:p>
+          <a:p>
+            <a:endParaRPr lang="en-US" dirty="0"/>
+          </a:p>
+          <a:p>
+            <a:r>
+              <a:rPr lang="en-US" b="1" dirty="0">
+                <a:solidFill>
+                  <a:srgbClr val="0070C0"/>
+                </a:solidFill>
+              </a:rPr>
+              <a:t>Standard Deviation </a:t>
+            </a:r>
+            <a:r>
+              <a:rPr lang="en-US" dirty="0"/>
+              <a:t>= sqrt(sigma squared)</a:t>
+            </a:r>
+          </a:p>
+        </p:txBody>
+      </p:sp>
+      <p:sp>
+        <p:nvSpPr>
+          <p:cNvPr id="5" name="TextBox 4">
+            <a:extLst>
+              <a:ext uri="{FF2B5EF4-FFF2-40B4-BE49-F238E27FC236}">
+                <a16:creationId xmlns:a16="http://schemas.microsoft.com/office/drawing/2014/main" id="{E72EEA3B-9D50-A145-B8FE-B6686486D979}"/>
+              </a:ext>
+            </a:extLst>
+          </p:cNvPr>
+          <p:cNvSpPr txBox="1"/>
+          <p:nvPr/>
+        </p:nvSpPr>
+        <p:spPr>
+          <a:xfrm>
+            <a:off x="5991726" y="178676"/>
+            <a:ext cx="6200274" cy="6494085"/>
+          </a:xfrm>
+          <a:prstGeom prst="rect">
+            <a:avLst/>
+          </a:prstGeom>
+          <a:noFill/>
+        </p:spPr>
+        <p:txBody>
+          <a:bodyPr wrap="square" rtlCol="0">
+            <a:spAutoFit/>
+          </a:bodyPr>
+          <a:lstStyle/>
+          <a:p>
+            <a:r>
+              <a:rPr lang="en-US" dirty="0"/>
+              <a:t>Probability Density Function (PDF)  </a:t>
+            </a:r>
+          </a:p>
+          <a:p>
+            <a:r>
+              <a:rPr lang="en-US" dirty="0"/>
+              <a:t>vs.  Cumulative Probability Function ( CPF)</a:t>
+            </a:r>
+          </a:p>
+          <a:p>
+            <a:endParaRPr lang="en-US" dirty="0"/>
+          </a:p>
+          <a:p>
+            <a:r>
+              <a:rPr lang="en-US" sz="2400" b="1" dirty="0">
+                <a:solidFill>
+                  <a:srgbClr val="FF0000"/>
+                </a:solidFill>
+              </a:rPr>
+              <a:t>Continuous Case</a:t>
+            </a:r>
+          </a:p>
+          <a:p>
+            <a:endParaRPr lang="en-US" dirty="0"/>
+          </a:p>
+          <a:p>
+            <a:r>
+              <a:rPr lang="en-US" b="1" dirty="0">
+                <a:solidFill>
+                  <a:srgbClr val="0070C0"/>
+                </a:solidFill>
+              </a:rPr>
+              <a:t>Probability Density Function (PDF)</a:t>
+            </a:r>
+            <a:r>
+              <a:rPr lang="en-US" dirty="0"/>
+              <a:t> f(x) is a continuous function.</a:t>
+            </a:r>
+          </a:p>
+          <a:p>
+            <a:endParaRPr lang="en-US" dirty="0"/>
+          </a:p>
+          <a:p>
+            <a:r>
+              <a:rPr lang="en-US" dirty="0"/>
+              <a:t>f(x)*dx gives probability that value is between x and </a:t>
+            </a:r>
+            <a:r>
+              <a:rPr lang="en-US" dirty="0" err="1"/>
+              <a:t>x+dx</a:t>
+            </a:r>
+            <a:r>
+              <a:rPr lang="en-US" dirty="0"/>
+              <a:t>.</a:t>
+            </a:r>
+          </a:p>
+          <a:p>
+            <a:endParaRPr lang="en-US" dirty="0"/>
+          </a:p>
+          <a:p>
+            <a:r>
+              <a:rPr lang="en-US" dirty="0"/>
+              <a:t>The total integral of f(x)*dx should be equal to 1.</a:t>
+            </a:r>
+          </a:p>
+          <a:p>
+            <a:endParaRPr lang="en-US" dirty="0"/>
+          </a:p>
+          <a:p>
+            <a:r>
+              <a:rPr lang="en-US" b="1" dirty="0">
+                <a:solidFill>
+                  <a:srgbClr val="0070C0"/>
+                </a:solidFill>
+              </a:rPr>
+              <a:t>Cumulative Probability Function (CPF)</a:t>
+            </a:r>
+          </a:p>
+          <a:p>
+            <a:r>
+              <a:rPr lang="en-US" dirty="0"/>
+              <a:t>This is simply a function F(x) which gives probability that value is less than x.</a:t>
+            </a:r>
+          </a:p>
+          <a:p>
+            <a:r>
+              <a:rPr lang="en-US" dirty="0"/>
+              <a:t>It monotonously grows from 0 to 1 as x grows (from small to large values).</a:t>
+            </a:r>
+          </a:p>
+          <a:p>
+            <a:endParaRPr lang="en-US" dirty="0"/>
+          </a:p>
+          <a:p>
+            <a:endParaRPr lang="en-US" dirty="0"/>
+          </a:p>
+          <a:p>
+            <a:r>
+              <a:rPr lang="en-US" b="1" dirty="0">
+                <a:solidFill>
+                  <a:srgbClr val="0070C0"/>
+                </a:solidFill>
+              </a:rPr>
+              <a:t>The PDF is a first derivative of CPF.</a:t>
+            </a:r>
+          </a:p>
+          <a:p>
+            <a:endParaRPr lang="en-US" dirty="0"/>
+          </a:p>
+          <a:p>
+            <a:r>
+              <a:rPr lang="en-US" dirty="0"/>
+              <a:t>CPF(</a:t>
+            </a:r>
+            <a:r>
+              <a:rPr lang="en-US" dirty="0" err="1"/>
+              <a:t>x+dx</a:t>
+            </a:r>
+            <a:r>
+              <a:rPr lang="en-US" dirty="0"/>
+              <a:t>) – CPF(x) = = [Prob. of value &lt; (</a:t>
+            </a:r>
+            <a:r>
+              <a:rPr lang="en-US" dirty="0" err="1"/>
+              <a:t>x+dx</a:t>
+            </a:r>
+            <a:r>
+              <a:rPr lang="en-US" dirty="0"/>
+              <a:t>)] – [Prob. of value &lt; x] = f(x)*dx</a:t>
+            </a:r>
+          </a:p>
+          <a:p>
+            <a:endParaRPr lang="en-US" dirty="0"/>
+          </a:p>
+          <a:p>
+            <a:r>
+              <a:rPr lang="en-US" b="1" dirty="0">
+                <a:solidFill>
+                  <a:srgbClr val="0070C0"/>
+                </a:solidFill>
+              </a:rPr>
+              <a:t>Mean value = Expected value</a:t>
+            </a:r>
+          </a:p>
+          <a:p>
+            <a:endParaRPr lang="en-US" dirty="0"/>
+          </a:p>
+          <a:p>
+            <a:r>
+              <a:rPr lang="en-US" dirty="0"/>
+              <a:t>For discrete case we had:</a:t>
+            </a:r>
+          </a:p>
+          <a:p>
+            <a:r>
+              <a:rPr lang="en-US" dirty="0"/>
+              <a:t>E(x) = sum(Xi*P(Xi))</a:t>
+            </a:r>
+          </a:p>
+          <a:p>
+            <a:endParaRPr lang="en-US" dirty="0"/>
+          </a:p>
+          <a:p>
+            <a:r>
+              <a:rPr lang="en-US" dirty="0"/>
+              <a:t>For continuous case this translates into</a:t>
+            </a:r>
+          </a:p>
+          <a:p>
+            <a:r>
+              <a:rPr lang="en-US" dirty="0"/>
+              <a:t>E(x) = Integral(</a:t>
+            </a:r>
+            <a:r>
+              <a:rPr lang="en-US" dirty="0" err="1"/>
+              <a:t>xF</a:t>
+            </a:r>
+            <a:r>
+              <a:rPr lang="en-US" dirty="0"/>
+              <a:t>(x)dx)</a:t>
+            </a:r>
+          </a:p>
+        </p:txBody>
+      </p:sp>
+    </p:spTree>
+    <p:extLst>
+      <p:ext uri="{BB962C8B-B14F-4D97-AF65-F5344CB8AC3E}">
+        <p14:creationId xmlns:p14="http://schemas.microsoft.com/office/powerpoint/2010/main" val="2249432796"/>
+      </p:ext>
+    </p:extLst>
+  </p:cSld>
+  <p:clrMapOvr>
+    <a:masterClrMapping/>
+  </p:clrMapOvr>
+</p:sld>
+</file>
+
 <file path=ppt/slides/slide2.xml><?xml version="1.0" encoding="utf-8"?>
 <p:sld xmlns:a="http://schemas.openxmlformats.org/drawingml/2006/main" xmlns:r="http://schemas.openxmlformats.org/officeDocument/2006/relationships" xmlns:p="http://schemas.openxmlformats.org/presentationml/2006/main">
   <p:cSld>
@@ -15439,10 +15898,10 @@
       </p:grpSpPr>
       <p:sp>
         <p:nvSpPr>
-          <p:cNvPr id="4" name="TextBox 3">
+          <p:cNvPr id="5" name="TextBox 4">
             <a:extLst>
               <a:ext uri="{FF2B5EF4-FFF2-40B4-BE49-F238E27FC236}">
-                <a16:creationId xmlns:a16="http://schemas.microsoft.com/office/drawing/2014/main" id="{BA133424-AF22-CA4F-9D1C-1219C4769656}"/>
+                <a16:creationId xmlns:a16="http://schemas.microsoft.com/office/drawing/2014/main" id="{6B80BCCA-2C61-AF4F-A60F-52F5007A8787}"/>
               </a:ext>
             </a:extLst>
           </p:cNvPr>
@@ -15451,8 +15910,43 @@
         </p:nvSpPr>
         <p:spPr>
           <a:xfrm>
-            <a:off x="6505765" y="4242179"/>
-            <a:ext cx="5517931" cy="2462213"/>
+            <a:off x="100084" y="2987997"/>
+            <a:ext cx="3938899" cy="523220"/>
+          </a:xfrm>
+          <a:prstGeom prst="rect">
+            <a:avLst/>
+          </a:prstGeom>
+          <a:noFill/>
+        </p:spPr>
+        <p:txBody>
+          <a:bodyPr wrap="none" rtlCol="0">
+            <a:spAutoFit/>
+          </a:bodyPr>
+          <a:lstStyle/>
+          <a:p>
+            <a:r>
+              <a:rPr lang="en-US" sz="2800" b="1" dirty="0"/>
+              <a:t>Bonferroni Correction</a:t>
+            </a:r>
+          </a:p>
+        </p:txBody>
+      </p:sp>
+      <p:sp>
+        <p:nvSpPr>
+          <p:cNvPr id="39" name="TextBox 38">
+            <a:extLst>
+              <a:ext uri="{FF2B5EF4-FFF2-40B4-BE49-F238E27FC236}">
+                <a16:creationId xmlns:a16="http://schemas.microsoft.com/office/drawing/2014/main" id="{27A304D2-6800-2B40-9474-4647EA280910}"/>
+              </a:ext>
+            </a:extLst>
+          </p:cNvPr>
+          <p:cNvSpPr txBox="1"/>
+          <p:nvPr/>
+        </p:nvSpPr>
+        <p:spPr>
+          <a:xfrm>
+            <a:off x="90466" y="3530593"/>
+            <a:ext cx="8639198" cy="3323987"/>
           </a:xfrm>
           <a:prstGeom prst="rect">
             <a:avLst/>
@@ -15467,25 +15961,13 @@
           <a:p>
             <a:r>
               <a:rPr lang="en-US" dirty="0"/>
-              <a:t>For proposition A and evidence B,</a:t>
-            </a:r>
-          </a:p>
-          <a:p>
-            <a:r>
-              <a:rPr lang="en-US" dirty="0"/>
-              <a:t>P(A), the prior, is the initial degree of belief in A.</a:t>
-            </a:r>
-          </a:p>
-          <a:p>
-            <a:r>
-              <a:rPr lang="en-US" dirty="0"/>
-              <a:t>P(A|B), the posterior, is the degree of belief having accounted for B.</a:t>
-            </a:r>
-          </a:p>
-          <a:p>
-            <a:r>
-              <a:rPr lang="en-US" dirty="0"/>
-              <a:t>P(B|A)/P(B) – represents the support B provides for A.</a:t>
+              <a:t>When conducting multiple tests, the chance of getting a significant (type 1) error increases by pure chance. </a:t>
+            </a:r>
+          </a:p>
+          <a:p>
+            <a:r>
+              <a:rPr lang="en-US" dirty="0"/>
+              <a:t>To correct for this, we proportionally "decrease" the "alpha" value of each test.</a:t>
             </a:r>
           </a:p>
           <a:p>
@@ -15494,57 +15976,93 @@
           <a:p>
             <a:r>
               <a:rPr lang="en-US" dirty="0"/>
-              <a:t>See also Bayesian inference.</a:t>
-            </a:r>
-          </a:p>
-          <a:p>
-            <a:r>
-              <a:rPr lang="en-US" dirty="0"/>
-              <a:t>– https://</a:t>
+              <a:t>Example:</a:t>
+            </a:r>
+          </a:p>
+          <a:p>
+            <a:r>
+              <a:rPr lang="en-US" dirty="0"/>
+              <a:t>Suppose we have Ng = 5 treatment groups.</a:t>
+            </a:r>
+          </a:p>
+          <a:p>
+            <a:r>
+              <a:rPr lang="en-US" dirty="0"/>
+              <a:t>Hull hypothesis is that group members are "equal" in all groups.</a:t>
+            </a:r>
+          </a:p>
+          <a:p>
+            <a:r>
+              <a:rPr lang="en-US" dirty="0"/>
+              <a:t>Alpha = 0.05 ("family alpha rate") – chance of rejecting H0</a:t>
+            </a:r>
+          </a:p>
+          <a:p>
+            <a:endParaRPr lang="en-US" dirty="0"/>
+          </a:p>
+          <a:p>
+            <a:r>
+              <a:rPr lang="en-US" dirty="0"/>
+              <a:t>We decided to make 10 comparisons:</a:t>
+            </a:r>
+          </a:p>
+          <a:p>
+            <a:r>
+              <a:rPr lang="en-US" dirty="0"/>
+              <a:t>    1 to 2, 2 to 3, 3 to 4, 4 to 5, 1 to 3, 2 to 4, 3 to 5, 4 to 1,</a:t>
+            </a:r>
+          </a:p>
+          <a:p>
+            <a:r>
+              <a:rPr lang="en-US" dirty="0"/>
+              <a:t>    (1 &amp; 2) to (3 &amp; 4), (1 &amp; 2) to (4 &amp; 5)</a:t>
+            </a:r>
+          </a:p>
+          <a:p>
+            <a:endParaRPr lang="en-US" dirty="0"/>
+          </a:p>
+          <a:p>
+            <a:r>
+              <a:rPr lang="en-US" dirty="0"/>
+              <a:t>We will use new corrected alpha </a:t>
             </a:r>
             <a:r>
               <a:rPr lang="en-US" dirty="0" err="1"/>
-              <a:t>en.wikipedia.org</a:t>
-            </a:r>
-            <a:r>
-              <a:rPr lang="en-US" dirty="0"/>
-              <a:t>/wiki/</a:t>
+              <a:t>Alpha_new</a:t>
+            </a:r>
+            <a:r>
+              <a:rPr lang="en-US" dirty="0"/>
+              <a:t> = Alpha/10 = 0.005 for each of those 10 tests.</a:t>
+            </a:r>
+          </a:p>
+          <a:p>
+            <a:r>
+              <a:rPr lang="en-US" dirty="0"/>
+              <a:t>If any of the 10 tests rejects the H0 (using this small </a:t>
             </a:r>
             <a:r>
               <a:rPr lang="en-US" dirty="0" err="1"/>
-              <a:t>Bayesian_inference</a:t>
-            </a:r>
-            <a:endParaRPr lang="en-US" dirty="0"/>
-          </a:p>
-          <a:p>
-            <a:endParaRPr lang="en-US" dirty="0"/>
-          </a:p>
-          <a:p>
-            <a:r>
-              <a:rPr lang="en-US" dirty="0"/>
-              <a:t>Bayesian inference is a method of statistical inference in which</a:t>
-            </a:r>
-          </a:p>
-          <a:p>
-            <a:r>
-              <a:rPr lang="en-US" dirty="0"/>
-              <a:t>Bayes’ theorem is used to update the probability for a hypothesis</a:t>
-            </a:r>
-          </a:p>
-          <a:p>
-            <a:r>
-              <a:rPr lang="en-US" dirty="0"/>
-              <a:t>as more evidence or information becomes available.</a:t>
+              <a:t>Alpha_new</a:t>
+            </a:r>
+            <a:r>
+              <a:rPr lang="en-US" dirty="0"/>
+              <a:t> value of 0.005), </a:t>
+            </a:r>
+          </a:p>
+          <a:p>
+            <a:r>
+              <a:rPr lang="en-US" dirty="0"/>
+              <a:t>then we reject H0 for the whole "family".</a:t>
             </a:r>
           </a:p>
         </p:txBody>
       </p:sp>
       <p:sp>
         <p:nvSpPr>
-          <p:cNvPr id="5" name="TextBox 4">
+          <p:cNvPr id="8" name="TextBox 7">
             <a:extLst>
               <a:ext uri="{FF2B5EF4-FFF2-40B4-BE49-F238E27FC236}">
-                <a16:creationId xmlns:a16="http://schemas.microsoft.com/office/drawing/2014/main" id="{DB6CFF65-663B-CB43-B815-53184C5B9CE5}"/>
+                <a16:creationId xmlns:a16="http://schemas.microsoft.com/office/drawing/2014/main" id="{8040F7C3-0742-E84C-B6FF-4D1910EB83F6}"/>
               </a:ext>
             </a:extLst>
           </p:cNvPr>
@@ -15553,8 +16071,8 @@
         </p:nvSpPr>
         <p:spPr>
           <a:xfrm>
-            <a:off x="84083" y="86343"/>
-            <a:ext cx="6011917" cy="6771084"/>
+            <a:off x="100084" y="618534"/>
+            <a:ext cx="3956532" cy="307777"/>
           </a:xfrm>
           <a:prstGeom prst="rect">
             <a:avLst/>
@@ -15569,270 +16087,17 @@
           <a:p>
             <a:r>
               <a:rPr lang="en-US" dirty="0"/>
-              <a:t>Bayes’ Theorem (Law, Rule)</a:t>
-            </a:r>
-          </a:p>
-          <a:p>
-            <a:r>
-              <a:rPr lang="en-US" dirty="0"/>
-              <a:t>– </a:t>
-            </a:r>
-            <a:r>
-              <a:rPr lang="en-US" dirty="0">
-                <a:hlinkClick r:id="rId2"/>
-              </a:rPr>
-              <a:t>https://en.wikipedia.org/wiki/Thomas_Bayes</a:t>
-            </a:r>
-            <a:r>
-              <a:rPr lang="en-US" dirty="0"/>
-              <a:t> - </a:t>
-            </a:r>
-            <a:br>
-              <a:rPr lang="en-US" dirty="0"/>
-            </a:br>
-            <a:r>
-              <a:rPr lang="en-US" dirty="0"/>
-              <a:t>– </a:t>
-            </a:r>
-            <a:r>
-              <a:rPr lang="en-US" dirty="0">
-                <a:hlinkClick r:id="rId3"/>
-              </a:rPr>
-              <a:t>https://</a:t>
-            </a:r>
-            <a:r>
-              <a:rPr lang="en-US" dirty="0" err="1">
-                <a:hlinkClick r:id="rId3"/>
-              </a:rPr>
-              <a:t>en.wikipedia.org</a:t>
-            </a:r>
-            <a:r>
-              <a:rPr lang="en-US" dirty="0">
-                <a:hlinkClick r:id="rId3"/>
-              </a:rPr>
-              <a:t>/wiki/Bayes%27_theorem</a:t>
-            </a:r>
-            <a:r>
-              <a:rPr lang="en-US" dirty="0"/>
-              <a:t> –</a:t>
-            </a:r>
-          </a:p>
-          <a:p>
-            <a:r>
-              <a:rPr lang="en-US" dirty="0"/>
-              <a:t>– </a:t>
-            </a:r>
-            <a:r>
-              <a:rPr lang="en-US" dirty="0">
-                <a:hlinkClick r:id="rId4"/>
-              </a:rPr>
-              <a:t>https://</a:t>
-            </a:r>
-            <a:r>
-              <a:rPr lang="en-US" dirty="0" err="1">
-                <a:hlinkClick r:id="rId4"/>
-              </a:rPr>
-              <a:t>en.wikipedia.org</a:t>
-            </a:r>
-            <a:r>
-              <a:rPr lang="en-US" dirty="0">
-                <a:hlinkClick r:id="rId4"/>
-              </a:rPr>
-              <a:t>/wiki/</a:t>
-            </a:r>
-            <a:r>
-              <a:rPr lang="en-US" dirty="0" err="1">
-                <a:hlinkClick r:id="rId4"/>
-              </a:rPr>
-              <a:t>Bayesian_inference</a:t>
-            </a:r>
-            <a:r>
-              <a:rPr lang="en-US" dirty="0"/>
-              <a:t> –</a:t>
-            </a:r>
-          </a:p>
-          <a:p>
-            <a:endParaRPr lang="en-US" dirty="0"/>
-          </a:p>
-          <a:p>
-            <a:r>
-              <a:rPr lang="en-US" dirty="0"/>
-              <a:t>P(A|B) = P(B|A)*P(A)/P(B)</a:t>
-            </a:r>
-          </a:p>
-          <a:p>
-            <a:endParaRPr lang="en-US" dirty="0"/>
-          </a:p>
-          <a:p>
-            <a:r>
-              <a:rPr lang="en-US" dirty="0"/>
-              <a:t>where A and B are events and P(B) not equal 0.</a:t>
-            </a:r>
-          </a:p>
-          <a:p>
-            <a:endParaRPr lang="en-US" dirty="0"/>
-          </a:p>
-          <a:p>
-            <a:r>
-              <a:rPr lang="en-US" dirty="0"/>
-              <a:t>Frequentist interpretation of Bayes’ theorem.</a:t>
-            </a:r>
-          </a:p>
-          <a:p>
-            <a:r>
-              <a:rPr lang="en-US" dirty="0"/>
-              <a:t>Probability measures a proportion of outcomes.</a:t>
-            </a:r>
-          </a:p>
-          <a:p>
-            <a:r>
-              <a:rPr lang="en-US" dirty="0"/>
-              <a:t>Suppose an experiment is performed many times.</a:t>
-            </a:r>
-          </a:p>
-          <a:p>
-            <a:endParaRPr lang="en-US" dirty="0"/>
-          </a:p>
-          <a:p>
-            <a:r>
-              <a:rPr lang="en-US" dirty="0"/>
-              <a:t>P(A) is the proportion of outcomes with property A,</a:t>
-            </a:r>
-          </a:p>
-          <a:p>
-            <a:r>
-              <a:rPr lang="en-US" dirty="0"/>
-              <a:t>and P(B) that with property B.</a:t>
-            </a:r>
-          </a:p>
-          <a:p>
-            <a:endParaRPr lang="en-US" dirty="0"/>
-          </a:p>
-          <a:p>
-            <a:r>
-              <a:rPr lang="en-US" dirty="0"/>
-              <a:t>P(B|A) is the proportion of outcomes with property B </a:t>
-            </a:r>
-          </a:p>
-          <a:p>
-            <a:r>
-              <a:rPr lang="en-US" dirty="0"/>
-              <a:t>out of outcomes with property A,</a:t>
-            </a:r>
-          </a:p>
-          <a:p>
-            <a:endParaRPr lang="en-US" dirty="0"/>
-          </a:p>
-          <a:p>
-            <a:r>
-              <a:rPr lang="en-US" dirty="0"/>
-              <a:t>and P(A|B) the proportion of those with A out of those with B.</a:t>
-            </a:r>
-          </a:p>
-          <a:p>
-            <a:endParaRPr lang="en-US" dirty="0"/>
-          </a:p>
-          <a:p>
-            <a:r>
-              <a:rPr lang="en-US" dirty="0"/>
-              <a:t>Bayesian interpretation of Bayes’ theorem.</a:t>
-            </a:r>
-          </a:p>
-          <a:p>
-            <a:r>
-              <a:rPr lang="en-US" dirty="0"/>
-              <a:t>Probability measures a degree of belief.</a:t>
-            </a:r>
-          </a:p>
-          <a:p>
-            <a:r>
-              <a:rPr lang="en-US" dirty="0"/>
-              <a:t>Bayes’ theorem then links the degree of belief in a proposition before (A)</a:t>
-            </a:r>
-          </a:p>
-          <a:p>
-            <a:r>
-              <a:rPr lang="en-US" dirty="0"/>
-              <a:t>and after (B) accounting for evidence.</a:t>
-            </a:r>
-          </a:p>
-          <a:p>
-            <a:endParaRPr lang="en-US" dirty="0"/>
-          </a:p>
-          <a:p>
-            <a:r>
-              <a:rPr lang="en-US" dirty="0"/>
-              <a:t>For example, suppose it is believed with 50% certainty </a:t>
-            </a:r>
-          </a:p>
-          <a:p>
-            <a:r>
-              <a:rPr lang="en-US" dirty="0"/>
-              <a:t>that a coin is twice as likely to land heads than tails.</a:t>
-            </a:r>
-          </a:p>
-          <a:p>
-            <a:r>
-              <a:rPr lang="en-US" dirty="0"/>
-              <a:t>If the coin is flipped a number of times and the outcomes observed,</a:t>
-            </a:r>
-          </a:p>
-          <a:p>
-            <a:r>
-              <a:rPr lang="en-US" dirty="0"/>
-              <a:t>then that degree of belief may rise, fall or </a:t>
-            </a:r>
-          </a:p>
-          <a:p>
-            <a:r>
-              <a:rPr lang="en-US" dirty="0"/>
-              <a:t>remain the same depending on the results.</a:t>
+              <a:t>P(A∪B) = P(A) + P(B) − P(A∩B) ≤ P(A) + P(B)</a:t>
             </a:r>
           </a:p>
         </p:txBody>
       </p:sp>
-      <p:pic>
-        <p:nvPicPr>
-          <p:cNvPr id="3" name="Picture 2">
+      <p:sp>
+        <p:nvSpPr>
+          <p:cNvPr id="41" name="TextBox 40">
             <a:extLst>
               <a:ext uri="{FF2B5EF4-FFF2-40B4-BE49-F238E27FC236}">
-                <a16:creationId xmlns:a16="http://schemas.microsoft.com/office/drawing/2014/main" id="{5C70D884-EC0B-1A48-94E2-CD2923F3622A}"/>
-              </a:ext>
-            </a:extLst>
-          </p:cNvPr>
-          <p:cNvPicPr>
-            <a:picLocks noChangeAspect="1"/>
-          </p:cNvPicPr>
-          <p:nvPr/>
-        </p:nvPicPr>
-        <p:blipFill>
-          <a:blip r:embed="rId5" cstate="email">
-            <a:extLst>
-              <a:ext uri="{28A0092B-C50C-407E-A947-70E740481C1C}">
-                <a14:useLocalDpi xmlns:a14="http://schemas.microsoft.com/office/drawing/2010/main"/>
-              </a:ext>
-            </a:extLst>
-          </a:blip>
-          <a:stretch>
-            <a:fillRect/>
-          </a:stretch>
-        </p:blipFill>
-        <p:spPr>
-          <a:xfrm>
-            <a:off x="8070850" y="177588"/>
-            <a:ext cx="3822700" cy="2044700"/>
-          </a:xfrm>
-          <a:prstGeom prst="rect">
-            <a:avLst/>
-          </a:prstGeom>
-        </p:spPr>
-      </p:pic>
-      <p:sp>
-        <p:nvSpPr>
-          <p:cNvPr id="6" name="TextBox 5">
-            <a:extLst>
-              <a:ext uri="{FF2B5EF4-FFF2-40B4-BE49-F238E27FC236}">
-                <a16:creationId xmlns:a16="http://schemas.microsoft.com/office/drawing/2014/main" id="{6CB6F775-63F0-274F-A53D-9922B5035949}"/>
+                <a16:creationId xmlns:a16="http://schemas.microsoft.com/office/drawing/2014/main" id="{3D618927-60E0-1D44-9633-4AD4142072CB}"/>
               </a:ext>
             </a:extLst>
           </p:cNvPr>
@@ -15841,8 +16106,123 @@
         </p:nvSpPr>
         <p:spPr>
           <a:xfrm>
-            <a:off x="8404392" y="2322095"/>
-            <a:ext cx="3489158" cy="307777"/>
+            <a:off x="100084" y="153888"/>
+            <a:ext cx="3956532" cy="523220"/>
+          </a:xfrm>
+          <a:prstGeom prst="rect">
+            <a:avLst/>
+          </a:prstGeom>
+          <a:noFill/>
+        </p:spPr>
+        <p:txBody>
+          <a:bodyPr wrap="none" rtlCol="0">
+            <a:spAutoFit/>
+          </a:bodyPr>
+          <a:lstStyle/>
+          <a:p>
+            <a:r>
+              <a:rPr lang="en-US" sz="2800" b="1" dirty="0"/>
+              <a:t>Union Bound Formula</a:t>
+            </a:r>
+          </a:p>
+        </p:txBody>
+      </p:sp>
+      <p:pic>
+        <p:nvPicPr>
+          <p:cNvPr id="1058" name="Picture 34" descr="Intersection of Sets using Venn Diagram |Solved Examples of Intersection of  Sets">
+            <a:extLst>
+              <a:ext uri="{FF2B5EF4-FFF2-40B4-BE49-F238E27FC236}">
+                <a16:creationId xmlns:a16="http://schemas.microsoft.com/office/drawing/2014/main" id="{3C3A0D9E-139D-E348-86E2-F8A5072E6B1A}"/>
+              </a:ext>
+            </a:extLst>
+          </p:cNvPr>
+          <p:cNvPicPr>
+            <a:picLocks noChangeAspect="1" noChangeArrowheads="1"/>
+          </p:cNvPicPr>
+          <p:nvPr/>
+        </p:nvPicPr>
+        <p:blipFill rotWithShape="1">
+          <a:blip r:embed="rId2" cstate="email">
+            <a:extLst>
+              <a:ext uri="{28A0092B-C50C-407E-A947-70E740481C1C}">
+                <a14:useLocalDpi xmlns:a14="http://schemas.microsoft.com/office/drawing/2010/main"/>
+              </a:ext>
+            </a:extLst>
+          </a:blip>
+          <a:srcRect/>
+          <a:stretch/>
+        </p:blipFill>
+        <p:spPr bwMode="auto">
+          <a:xfrm>
+            <a:off x="4369196" y="64079"/>
+            <a:ext cx="1449909" cy="907574"/>
+          </a:xfrm>
+          <a:prstGeom prst="rect">
+            <a:avLst/>
+          </a:prstGeom>
+          <a:noFill/>
+          <a:extLst>
+            <a:ext uri="{909E8E84-426E-40DD-AFC4-6F175D3DCCD1}">
+              <a14:hiddenFill xmlns:a14="http://schemas.microsoft.com/office/drawing/2010/main">
+                <a:solidFill>
+                  <a:srgbClr val="FFFFFF"/>
+                </a:solidFill>
+              </a14:hiddenFill>
+            </a:ext>
+          </a:extLst>
+        </p:spPr>
+      </p:pic>
+      <p:sp>
+        <p:nvSpPr>
+          <p:cNvPr id="43" name="TextBox 42">
+            <a:extLst>
+              <a:ext uri="{FF2B5EF4-FFF2-40B4-BE49-F238E27FC236}">
+                <a16:creationId xmlns:a16="http://schemas.microsoft.com/office/drawing/2014/main" id="{6751AB79-B70C-CA4C-A7E6-0726676EC2C7}"/>
+              </a:ext>
+            </a:extLst>
+          </p:cNvPr>
+          <p:cNvSpPr txBox="1"/>
+          <p:nvPr/>
+        </p:nvSpPr>
+        <p:spPr>
+          <a:xfrm>
+            <a:off x="100084" y="1062374"/>
+            <a:ext cx="3799438" cy="523220"/>
+          </a:xfrm>
+          <a:prstGeom prst="rect">
+            <a:avLst/>
+          </a:prstGeom>
+          <a:noFill/>
+        </p:spPr>
+        <p:txBody>
+          <a:bodyPr wrap="none" rtlCol="0">
+            <a:spAutoFit/>
+          </a:bodyPr>
+          <a:lstStyle/>
+          <a:p>
+            <a:r>
+              <a:rPr lang="en-US" sz="2800" b="1" dirty="0"/>
+              <a:t>Bonferroni Inequality</a:t>
+            </a:r>
+          </a:p>
+        </p:txBody>
+      </p:sp>
+      <p:sp>
+        <p:nvSpPr>
+          <p:cNvPr id="44" name="TextBox 43">
+            <a:extLst>
+              <a:ext uri="{FF2B5EF4-FFF2-40B4-BE49-F238E27FC236}">
+                <a16:creationId xmlns:a16="http://schemas.microsoft.com/office/drawing/2014/main" id="{A5B86BFC-66BE-A646-8F44-B9B94AC94CEF}"/>
+              </a:ext>
+            </a:extLst>
+          </p:cNvPr>
+          <p:cNvSpPr txBox="1"/>
+          <p:nvPr/>
+        </p:nvSpPr>
+        <p:spPr>
+          <a:xfrm>
+            <a:off x="100084" y="1563204"/>
+            <a:ext cx="4581098" cy="1169551"/>
           </a:xfrm>
           <a:prstGeom prst="rect">
             <a:avLst/>
@@ -15856,20 +16236,444 @@
           <a:lstStyle/>
           <a:p>
             <a:r>
-              <a:rPr lang="en-US" dirty="0" err="1"/>
-              <a:t>Thomas_Bayes</a:t>
-            </a:r>
-            <a:r>
-              <a:rPr lang="en-US" dirty="0"/>
-              <a:t> – (/’</a:t>
-            </a:r>
-            <a:r>
-              <a:rPr lang="en-US" dirty="0" err="1"/>
-              <a:t>be?z</a:t>
-            </a:r>
-            <a:r>
-              <a:rPr lang="en-US" dirty="0"/>
-              <a:t>/; 1701–1761)</a:t>
+              <a:rPr lang="en-US" dirty="0"/>
+              <a:t>P(A∩B) = P(A) + P(B) −  P(A∪B)  &gt;= P(A) + P(B) – 1</a:t>
+            </a:r>
+          </a:p>
+          <a:p>
+            <a:endParaRPr lang="en-US" dirty="0"/>
+          </a:p>
+          <a:p>
+            <a:r>
+              <a:rPr lang="en-US" dirty="0"/>
+              <a:t>A = smart</a:t>
+            </a:r>
+          </a:p>
+          <a:p>
+            <a:r>
+              <a:rPr lang="en-US" dirty="0"/>
+              <a:t>B = beautiful</a:t>
+            </a:r>
+          </a:p>
+          <a:p>
+            <a:r>
+              <a:rPr lang="en-US" dirty="0"/>
+              <a:t>If P(A) ~ 0.9, and P(B) ~ 0.9, then P(A &amp; B) &gt;= 0.8</a:t>
+            </a:r>
+          </a:p>
+        </p:txBody>
+      </p:sp>
+      <p:sp>
+        <p:nvSpPr>
+          <p:cNvPr id="9" name="Rectangle 8">
+            <a:extLst>
+              <a:ext uri="{FF2B5EF4-FFF2-40B4-BE49-F238E27FC236}">
+                <a16:creationId xmlns:a16="http://schemas.microsoft.com/office/drawing/2014/main" id="{FF80AC0C-B7D3-1B4A-A993-97DFA15EE80E}"/>
+              </a:ext>
+            </a:extLst>
+          </p:cNvPr>
+          <p:cNvSpPr/>
+          <p:nvPr/>
+        </p:nvSpPr>
+        <p:spPr>
+          <a:xfrm>
+            <a:off x="4646258" y="1067784"/>
+            <a:ext cx="1746913" cy="1746913"/>
+          </a:xfrm>
+          <a:prstGeom prst="rect">
+            <a:avLst/>
+          </a:prstGeom>
+          <a:noFill/>
+          <a:ln w="50800"/>
+        </p:spPr>
+        <p:style>
+          <a:lnRef idx="2">
+            <a:schemeClr val="accent1">
+              <a:shade val="50000"/>
+            </a:schemeClr>
+          </a:lnRef>
+          <a:fillRef idx="1">
+            <a:schemeClr val="accent1"/>
+          </a:fillRef>
+          <a:effectRef idx="0">
+            <a:schemeClr val="accent1"/>
+          </a:effectRef>
+          <a:fontRef idx="minor">
+            <a:schemeClr val="lt1"/>
+          </a:fontRef>
+        </p:style>
+        <p:txBody>
+          <a:bodyPr rtlCol="0" anchor="ctr"/>
+          <a:lstStyle/>
+          <a:p>
+            <a:pPr algn="ctr"/>
+            <a:endParaRPr lang="en-US"/>
+          </a:p>
+        </p:txBody>
+      </p:sp>
+      <p:sp>
+        <p:nvSpPr>
+          <p:cNvPr id="46" name="Rectangle 45">
+            <a:extLst>
+              <a:ext uri="{FF2B5EF4-FFF2-40B4-BE49-F238E27FC236}">
+                <a16:creationId xmlns:a16="http://schemas.microsoft.com/office/drawing/2014/main" id="{EAC873BE-30F7-4047-A444-449806EBBA57}"/>
+              </a:ext>
+            </a:extLst>
+          </p:cNvPr>
+          <p:cNvSpPr/>
+          <p:nvPr/>
+        </p:nvSpPr>
+        <p:spPr>
+          <a:xfrm>
+            <a:off x="4649746" y="1077945"/>
+            <a:ext cx="1746913" cy="1102688"/>
+          </a:xfrm>
+          <a:prstGeom prst="rect">
+            <a:avLst/>
+          </a:prstGeom>
+          <a:pattFill prst="pct5">
+            <a:fgClr>
+              <a:schemeClr val="tx1"/>
+            </a:fgClr>
+            <a:bgClr>
+              <a:schemeClr val="bg1"/>
+            </a:bgClr>
+          </a:pattFill>
+          <a:ln w="50800"/>
+        </p:spPr>
+        <p:style>
+          <a:lnRef idx="2">
+            <a:schemeClr val="accent1">
+              <a:shade val="50000"/>
+            </a:schemeClr>
+          </a:lnRef>
+          <a:fillRef idx="1">
+            <a:schemeClr val="accent1"/>
+          </a:fillRef>
+          <a:effectRef idx="0">
+            <a:schemeClr val="accent1"/>
+          </a:effectRef>
+          <a:fontRef idx="minor">
+            <a:schemeClr val="lt1"/>
+          </a:fontRef>
+        </p:style>
+        <p:txBody>
+          <a:bodyPr rtlCol="0" anchor="ctr"/>
+          <a:lstStyle/>
+          <a:p>
+            <a:pPr algn="ctr"/>
+            <a:endParaRPr lang="en-US"/>
+          </a:p>
+        </p:txBody>
+      </p:sp>
+      <p:sp>
+        <p:nvSpPr>
+          <p:cNvPr id="47" name="Rectangle 46">
+            <a:extLst>
+              <a:ext uri="{FF2B5EF4-FFF2-40B4-BE49-F238E27FC236}">
+                <a16:creationId xmlns:a16="http://schemas.microsoft.com/office/drawing/2014/main" id="{4E4F4278-28D0-024F-95B3-5894BF9D24E0}"/>
+              </a:ext>
+            </a:extLst>
+          </p:cNvPr>
+          <p:cNvSpPr/>
+          <p:nvPr/>
+        </p:nvSpPr>
+        <p:spPr>
+          <a:xfrm>
+            <a:off x="5255198" y="1077944"/>
+            <a:ext cx="1127813" cy="1102689"/>
+          </a:xfrm>
+          <a:prstGeom prst="rect">
+            <a:avLst/>
+          </a:prstGeom>
+          <a:pattFill prst="pct70">
+            <a:fgClr>
+              <a:srgbClr val="00B0F0"/>
+            </a:fgClr>
+            <a:bgClr>
+              <a:schemeClr val="bg1"/>
+            </a:bgClr>
+          </a:pattFill>
+          <a:ln w="50800"/>
+        </p:spPr>
+        <p:style>
+          <a:lnRef idx="2">
+            <a:schemeClr val="accent1">
+              <a:shade val="50000"/>
+            </a:schemeClr>
+          </a:lnRef>
+          <a:fillRef idx="1">
+            <a:schemeClr val="accent1"/>
+          </a:fillRef>
+          <a:effectRef idx="0">
+            <a:schemeClr val="accent1"/>
+          </a:effectRef>
+          <a:fontRef idx="minor">
+            <a:schemeClr val="lt1"/>
+          </a:fontRef>
+        </p:style>
+        <p:txBody>
+          <a:bodyPr rtlCol="0" anchor="ctr"/>
+          <a:lstStyle/>
+          <a:p>
+            <a:pPr algn="ctr"/>
+            <a:endParaRPr lang="en-US"/>
+          </a:p>
+        </p:txBody>
+      </p:sp>
+      <p:sp>
+        <p:nvSpPr>
+          <p:cNvPr id="48" name="Rectangle 47">
+            <a:extLst>
+              <a:ext uri="{FF2B5EF4-FFF2-40B4-BE49-F238E27FC236}">
+                <a16:creationId xmlns:a16="http://schemas.microsoft.com/office/drawing/2014/main" id="{604B4D12-834C-1243-A921-7F98691EF521}"/>
+              </a:ext>
+            </a:extLst>
+          </p:cNvPr>
+          <p:cNvSpPr/>
+          <p:nvPr/>
+        </p:nvSpPr>
+        <p:spPr>
+          <a:xfrm>
+            <a:off x="5238270" y="2180633"/>
+            <a:ext cx="1144741" cy="644224"/>
+          </a:xfrm>
+          <a:prstGeom prst="rect">
+            <a:avLst/>
+          </a:prstGeom>
+          <a:pattFill prst="pct5">
+            <a:fgClr>
+              <a:schemeClr val="accent1"/>
+            </a:fgClr>
+            <a:bgClr>
+              <a:schemeClr val="bg1"/>
+            </a:bgClr>
+          </a:pattFill>
+          <a:ln w="50800"/>
+        </p:spPr>
+        <p:style>
+          <a:lnRef idx="2">
+            <a:schemeClr val="accent1">
+              <a:shade val="50000"/>
+            </a:schemeClr>
+          </a:lnRef>
+          <a:fillRef idx="1">
+            <a:schemeClr val="accent1"/>
+          </a:fillRef>
+          <a:effectRef idx="0">
+            <a:schemeClr val="accent1"/>
+          </a:effectRef>
+          <a:fontRef idx="minor">
+            <a:schemeClr val="lt1"/>
+          </a:fontRef>
+        </p:style>
+        <p:txBody>
+          <a:bodyPr rtlCol="0" anchor="ctr"/>
+          <a:lstStyle/>
+          <a:p>
+            <a:pPr algn="ctr"/>
+            <a:endParaRPr lang="en-US"/>
+          </a:p>
+        </p:txBody>
+      </p:sp>
+      <p:sp>
+        <p:nvSpPr>
+          <p:cNvPr id="10" name="TextBox 9">
+            <a:extLst>
+              <a:ext uri="{FF2B5EF4-FFF2-40B4-BE49-F238E27FC236}">
+                <a16:creationId xmlns:a16="http://schemas.microsoft.com/office/drawing/2014/main" id="{05331195-5B6A-864C-BA85-3B656CFE9B51}"/>
+              </a:ext>
+            </a:extLst>
+          </p:cNvPr>
+          <p:cNvSpPr txBox="1"/>
+          <p:nvPr/>
+        </p:nvSpPr>
+        <p:spPr>
+          <a:xfrm>
+            <a:off x="4735620" y="1479575"/>
+            <a:ext cx="340743" cy="461665"/>
+          </a:xfrm>
+          <a:prstGeom prst="rect">
+            <a:avLst/>
+          </a:prstGeom>
+          <a:noFill/>
+        </p:spPr>
+        <p:txBody>
+          <a:bodyPr wrap="square" rtlCol="0">
+            <a:spAutoFit/>
+          </a:bodyPr>
+          <a:lstStyle/>
+          <a:p>
+            <a:r>
+              <a:rPr lang="en-US" sz="2400" b="1" dirty="0"/>
+              <a:t>A</a:t>
+            </a:r>
+          </a:p>
+        </p:txBody>
+      </p:sp>
+      <p:sp>
+        <p:nvSpPr>
+          <p:cNvPr id="50" name="TextBox 49">
+            <a:extLst>
+              <a:ext uri="{FF2B5EF4-FFF2-40B4-BE49-F238E27FC236}">
+                <a16:creationId xmlns:a16="http://schemas.microsoft.com/office/drawing/2014/main" id="{55D5AC23-8A7E-9843-B11E-0320FA9ACB9E}"/>
+              </a:ext>
+            </a:extLst>
+          </p:cNvPr>
+          <p:cNvSpPr txBox="1"/>
+          <p:nvPr/>
+        </p:nvSpPr>
+        <p:spPr>
+          <a:xfrm>
+            <a:off x="5636320" y="2280347"/>
+            <a:ext cx="340743" cy="461665"/>
+          </a:xfrm>
+          <a:prstGeom prst="rect">
+            <a:avLst/>
+          </a:prstGeom>
+          <a:noFill/>
+        </p:spPr>
+        <p:txBody>
+          <a:bodyPr wrap="square" rtlCol="0">
+            <a:spAutoFit/>
+          </a:bodyPr>
+          <a:lstStyle/>
+          <a:p>
+            <a:r>
+              <a:rPr lang="en-US" sz="2400" b="1" dirty="0"/>
+              <a:t>B</a:t>
+            </a:r>
+          </a:p>
+        </p:txBody>
+      </p:sp>
+      <p:sp>
+        <p:nvSpPr>
+          <p:cNvPr id="51" name="TextBox 50">
+            <a:extLst>
+              <a:ext uri="{FF2B5EF4-FFF2-40B4-BE49-F238E27FC236}">
+                <a16:creationId xmlns:a16="http://schemas.microsoft.com/office/drawing/2014/main" id="{D1C432E0-6AA7-C840-AADC-2DAEB901164B}"/>
+              </a:ext>
+            </a:extLst>
+          </p:cNvPr>
+          <p:cNvSpPr txBox="1"/>
+          <p:nvPr/>
+        </p:nvSpPr>
+        <p:spPr>
+          <a:xfrm>
+            <a:off x="5364326" y="1416242"/>
+            <a:ext cx="891048" cy="461665"/>
+          </a:xfrm>
+          <a:prstGeom prst="rect">
+            <a:avLst/>
+          </a:prstGeom>
+          <a:noFill/>
+        </p:spPr>
+        <p:txBody>
+          <a:bodyPr wrap="square" rtlCol="0">
+            <a:spAutoFit/>
+          </a:bodyPr>
+          <a:lstStyle/>
+          <a:p>
+            <a:r>
+              <a:rPr lang="en-US" sz="2400" b="1" dirty="0"/>
+              <a:t>A∩B</a:t>
+            </a:r>
+          </a:p>
+        </p:txBody>
+      </p:sp>
+      <p:pic>
+        <p:nvPicPr>
+          <p:cNvPr id="1060" name="Picture 36">
+            <a:extLst>
+              <a:ext uri="{FF2B5EF4-FFF2-40B4-BE49-F238E27FC236}">
+                <a16:creationId xmlns:a16="http://schemas.microsoft.com/office/drawing/2014/main" id="{3C44B8D3-E273-5A46-9144-D6C869F87247}"/>
+              </a:ext>
+            </a:extLst>
+          </p:cNvPr>
+          <p:cNvPicPr>
+            <a:picLocks noChangeAspect="1" noChangeArrowheads="1"/>
+          </p:cNvPicPr>
+          <p:nvPr/>
+        </p:nvPicPr>
+        <p:blipFill>
+          <a:blip r:embed="rId3">
+            <a:extLst>
+              <a:ext uri="{28A0092B-C50C-407E-A947-70E740481C1C}">
+                <a14:useLocalDpi xmlns:a14="http://schemas.microsoft.com/office/drawing/2010/main"/>
+              </a:ext>
+            </a:extLst>
+          </a:blip>
+          <a:srcRect/>
+          <a:stretch>
+            <a:fillRect/>
+          </a:stretch>
+        </p:blipFill>
+        <p:spPr bwMode="auto">
+          <a:xfrm>
+            <a:off x="9310607" y="49778"/>
+            <a:ext cx="2032000" cy="3136900"/>
+          </a:xfrm>
+          <a:prstGeom prst="rect">
+            <a:avLst/>
+          </a:prstGeom>
+          <a:noFill/>
+          <a:extLst>
+            <a:ext uri="{909E8E84-426E-40DD-AFC4-6F175D3DCCD1}">
+              <a14:hiddenFill xmlns:a14="http://schemas.microsoft.com/office/drawing/2010/main">
+                <a:solidFill>
+                  <a:srgbClr val="FFFFFF"/>
+                </a:solidFill>
+              </a14:hiddenFill>
+            </a:ext>
+          </a:extLst>
+        </p:spPr>
+      </p:pic>
+      <p:sp>
+        <p:nvSpPr>
+          <p:cNvPr id="11" name="TextBox 10">
+            <a:extLst>
+              <a:ext uri="{FF2B5EF4-FFF2-40B4-BE49-F238E27FC236}">
+                <a16:creationId xmlns:a16="http://schemas.microsoft.com/office/drawing/2014/main" id="{147F983F-9CFE-A44E-A7B9-C3CFCB43D9EF}"/>
+              </a:ext>
+            </a:extLst>
+          </p:cNvPr>
+          <p:cNvSpPr txBox="1"/>
+          <p:nvPr/>
+        </p:nvSpPr>
+        <p:spPr>
+          <a:xfrm>
+            <a:off x="9136015" y="3212688"/>
+            <a:ext cx="2381184" cy="830997"/>
+          </a:xfrm>
+          <a:prstGeom prst="rect">
+            <a:avLst/>
+          </a:prstGeom>
+          <a:noFill/>
+        </p:spPr>
+        <p:txBody>
+          <a:bodyPr wrap="square" rtlCol="0">
+            <a:spAutoFit/>
+          </a:bodyPr>
+          <a:lstStyle/>
+          <a:p>
+            <a:pPr algn="ctr"/>
+            <a:r>
+              <a:rPr lang="en-US" sz="1600" dirty="0"/>
+              <a:t>Carlo Emilio Bonferroni</a:t>
+            </a:r>
+          </a:p>
+          <a:p>
+            <a:pPr algn="ctr"/>
+            <a:r>
+              <a:rPr lang="en-US" sz="1600" dirty="0"/>
+              <a:t>1892 – 1960</a:t>
+            </a:r>
+          </a:p>
+          <a:p>
+            <a:pPr algn="ctr"/>
+            <a:r>
+              <a:rPr lang="en-US" sz="1600" dirty="0"/>
+              <a:t>Florence, Italy</a:t>
             </a:r>
           </a:p>
         </p:txBody>
@@ -15877,7 +16681,7 @@
     </p:spTree>
     <p:extLst>
       <p:ext uri="{BB962C8B-B14F-4D97-AF65-F5344CB8AC3E}">
-        <p14:creationId xmlns:p14="http://schemas.microsoft.com/office/powerpoint/2010/main" val="822577207"/>
+        <p14:creationId xmlns:p14="http://schemas.microsoft.com/office/powerpoint/2010/main" val="2367941332"/>
       </p:ext>
     </p:extLst>
   </p:cSld>
@@ -17342,6 +18146,489 @@
           <p:cNvPr id="4" name="TextBox 3">
             <a:extLst>
               <a:ext uri="{FF2B5EF4-FFF2-40B4-BE49-F238E27FC236}">
+                <a16:creationId xmlns:a16="http://schemas.microsoft.com/office/drawing/2014/main" id="{BA133424-AF22-CA4F-9D1C-1219C4769656}"/>
+              </a:ext>
+            </a:extLst>
+          </p:cNvPr>
+          <p:cNvSpPr txBox="1"/>
+          <p:nvPr/>
+        </p:nvSpPr>
+        <p:spPr>
+          <a:xfrm>
+            <a:off x="6486525" y="4241445"/>
+            <a:ext cx="5705475" cy="2462213"/>
+          </a:xfrm>
+          <a:prstGeom prst="rect">
+            <a:avLst/>
+          </a:prstGeom>
+          <a:noFill/>
+        </p:spPr>
+        <p:txBody>
+          <a:bodyPr wrap="square" rtlCol="0">
+            <a:spAutoFit/>
+          </a:bodyPr>
+          <a:lstStyle/>
+          <a:p>
+            <a:r>
+              <a:rPr lang="en-US" dirty="0"/>
+              <a:t>For proposition A and evidence B,</a:t>
+            </a:r>
+          </a:p>
+          <a:p>
+            <a:r>
+              <a:rPr lang="en-US" dirty="0"/>
+              <a:t>    P(A), the prior, is the initial degree of belief in A.</a:t>
+            </a:r>
+          </a:p>
+          <a:p>
+            <a:r>
+              <a:rPr lang="en-US" dirty="0"/>
+              <a:t>    P(A|B), the posterior, is the degree of belief having accounted for B.</a:t>
+            </a:r>
+          </a:p>
+          <a:p>
+            <a:r>
+              <a:rPr lang="en-US" dirty="0"/>
+              <a:t>    P(B|A)/P(B) – represents the support B provides for A.</a:t>
+            </a:r>
+          </a:p>
+          <a:p>
+            <a:endParaRPr lang="en-US" dirty="0"/>
+          </a:p>
+          <a:p>
+            <a:r>
+              <a:rPr lang="en-US" dirty="0"/>
+              <a:t>See also Bayesian inference.</a:t>
+            </a:r>
+          </a:p>
+          <a:p>
+            <a:r>
+              <a:rPr lang="en-US" dirty="0"/>
+              <a:t>    – https://</a:t>
+            </a:r>
+            <a:r>
+              <a:rPr lang="en-US" dirty="0" err="1"/>
+              <a:t>en.wikipedia.org</a:t>
+            </a:r>
+            <a:r>
+              <a:rPr lang="en-US" dirty="0"/>
+              <a:t>/wiki/</a:t>
+            </a:r>
+            <a:r>
+              <a:rPr lang="en-US" dirty="0" err="1"/>
+              <a:t>Bayesian_inference</a:t>
+            </a:r>
+            <a:endParaRPr lang="en-US" dirty="0"/>
+          </a:p>
+          <a:p>
+            <a:endParaRPr lang="en-US" dirty="0"/>
+          </a:p>
+          <a:p>
+            <a:r>
+              <a:rPr lang="en-US" b="1" dirty="0">
+                <a:solidFill>
+                  <a:srgbClr val="FF0000"/>
+                </a:solidFill>
+              </a:rPr>
+              <a:t>Bayesian inference</a:t>
+            </a:r>
+            <a:r>
+              <a:rPr lang="en-US" dirty="0"/>
+              <a:t> is a method of statistical inference in which</a:t>
+            </a:r>
+          </a:p>
+          <a:p>
+            <a:r>
+              <a:rPr lang="en-US" dirty="0"/>
+              <a:t>Bayes’ theorem is used to update the probability for a hypothesis</a:t>
+            </a:r>
+          </a:p>
+          <a:p>
+            <a:r>
+              <a:rPr lang="en-US" dirty="0"/>
+              <a:t>as more evidence or information becomes available.</a:t>
+            </a:r>
+          </a:p>
+        </p:txBody>
+      </p:sp>
+      <p:sp>
+        <p:nvSpPr>
+          <p:cNvPr id="5" name="TextBox 4">
+            <a:extLst>
+              <a:ext uri="{FF2B5EF4-FFF2-40B4-BE49-F238E27FC236}">
+                <a16:creationId xmlns:a16="http://schemas.microsoft.com/office/drawing/2014/main" id="{DB6CFF65-663B-CB43-B815-53184C5B9CE5}"/>
+              </a:ext>
+            </a:extLst>
+          </p:cNvPr>
+          <p:cNvSpPr txBox="1"/>
+          <p:nvPr/>
+        </p:nvSpPr>
+        <p:spPr>
+          <a:xfrm>
+            <a:off x="84083" y="86343"/>
+            <a:ext cx="6011917" cy="6771084"/>
+          </a:xfrm>
+          <a:prstGeom prst="rect">
+            <a:avLst/>
+          </a:prstGeom>
+          <a:noFill/>
+        </p:spPr>
+        <p:txBody>
+          <a:bodyPr wrap="square" rtlCol="0">
+            <a:spAutoFit/>
+          </a:bodyPr>
+          <a:lstStyle/>
+          <a:p>
+            <a:r>
+              <a:rPr lang="en-US" dirty="0"/>
+              <a:t>Bayes’ Theorem (Law, Rule)</a:t>
+            </a:r>
+          </a:p>
+          <a:p>
+            <a:r>
+              <a:rPr lang="en-US" dirty="0"/>
+              <a:t>– </a:t>
+            </a:r>
+            <a:r>
+              <a:rPr lang="en-US" dirty="0">
+                <a:hlinkClick r:id="rId2"/>
+              </a:rPr>
+              <a:t>https://en.wikipedia.org/wiki/Thomas_Bayes</a:t>
+            </a:r>
+            <a:r>
+              <a:rPr lang="en-US" dirty="0"/>
+              <a:t> - </a:t>
+            </a:r>
+            <a:br>
+              <a:rPr lang="en-US" dirty="0"/>
+            </a:br>
+            <a:r>
+              <a:rPr lang="en-US" dirty="0"/>
+              <a:t>– </a:t>
+            </a:r>
+            <a:r>
+              <a:rPr lang="en-US" dirty="0">
+                <a:hlinkClick r:id="rId3"/>
+              </a:rPr>
+              <a:t>https://</a:t>
+            </a:r>
+            <a:r>
+              <a:rPr lang="en-US" dirty="0" err="1">
+                <a:hlinkClick r:id="rId3"/>
+              </a:rPr>
+              <a:t>en.wikipedia.org</a:t>
+            </a:r>
+            <a:r>
+              <a:rPr lang="en-US" dirty="0">
+                <a:hlinkClick r:id="rId3"/>
+              </a:rPr>
+              <a:t>/wiki/Bayes%27_theorem</a:t>
+            </a:r>
+            <a:r>
+              <a:rPr lang="en-US" dirty="0"/>
+              <a:t> –</a:t>
+            </a:r>
+          </a:p>
+          <a:p>
+            <a:r>
+              <a:rPr lang="en-US" dirty="0"/>
+              <a:t>– </a:t>
+            </a:r>
+            <a:r>
+              <a:rPr lang="en-US" dirty="0">
+                <a:hlinkClick r:id="rId4"/>
+              </a:rPr>
+              <a:t>https://</a:t>
+            </a:r>
+            <a:r>
+              <a:rPr lang="en-US" dirty="0" err="1">
+                <a:hlinkClick r:id="rId4"/>
+              </a:rPr>
+              <a:t>en.wikipedia.org</a:t>
+            </a:r>
+            <a:r>
+              <a:rPr lang="en-US" dirty="0">
+                <a:hlinkClick r:id="rId4"/>
+              </a:rPr>
+              <a:t>/wiki/</a:t>
+            </a:r>
+            <a:r>
+              <a:rPr lang="en-US" dirty="0" err="1">
+                <a:hlinkClick r:id="rId4"/>
+              </a:rPr>
+              <a:t>Bayesian_inference</a:t>
+            </a:r>
+            <a:r>
+              <a:rPr lang="en-US" dirty="0"/>
+              <a:t> –</a:t>
+            </a:r>
+          </a:p>
+          <a:p>
+            <a:endParaRPr lang="en-US" dirty="0"/>
+          </a:p>
+          <a:p>
+            <a:r>
+              <a:rPr lang="en-US" dirty="0"/>
+              <a:t>P(A|B) = P(B|A)*P(A)/P(B)</a:t>
+            </a:r>
+          </a:p>
+          <a:p>
+            <a:endParaRPr lang="en-US" dirty="0"/>
+          </a:p>
+          <a:p>
+            <a:r>
+              <a:rPr lang="en-US" dirty="0"/>
+              <a:t>where A and B are events and P(B) not equal 0.</a:t>
+            </a:r>
+          </a:p>
+          <a:p>
+            <a:endParaRPr lang="en-US" dirty="0"/>
+          </a:p>
+          <a:p>
+            <a:r>
+              <a:rPr lang="en-US" b="1" dirty="0">
+                <a:solidFill>
+                  <a:srgbClr val="FF0000"/>
+                </a:solidFill>
+              </a:rPr>
+              <a:t>Frequentist interpretation of Bayes’ theorem.</a:t>
+            </a:r>
+          </a:p>
+          <a:p>
+            <a:r>
+              <a:rPr lang="en-US" dirty="0"/>
+              <a:t>Probability measures a proportion of outcomes.</a:t>
+            </a:r>
+          </a:p>
+          <a:p>
+            <a:r>
+              <a:rPr lang="en-US" dirty="0"/>
+              <a:t>Suppose an experiment is performed many times.</a:t>
+            </a:r>
+          </a:p>
+          <a:p>
+            <a:endParaRPr lang="en-US" dirty="0"/>
+          </a:p>
+          <a:p>
+            <a:r>
+              <a:rPr lang="en-US" dirty="0"/>
+              <a:t>P(A) is the proportion of outcomes with property A,</a:t>
+            </a:r>
+          </a:p>
+          <a:p>
+            <a:r>
+              <a:rPr lang="en-US" dirty="0"/>
+              <a:t>and P(B) that with property B.</a:t>
+            </a:r>
+          </a:p>
+          <a:p>
+            <a:endParaRPr lang="en-US" dirty="0"/>
+          </a:p>
+          <a:p>
+            <a:r>
+              <a:rPr lang="en-US" dirty="0"/>
+              <a:t>P(B|A) is the proportion of outcomes with property B </a:t>
+            </a:r>
+          </a:p>
+          <a:p>
+            <a:r>
+              <a:rPr lang="en-US" dirty="0"/>
+              <a:t>out of outcomes with property A,</a:t>
+            </a:r>
+          </a:p>
+          <a:p>
+            <a:endParaRPr lang="en-US" dirty="0"/>
+          </a:p>
+          <a:p>
+            <a:r>
+              <a:rPr lang="en-US" dirty="0"/>
+              <a:t>and P(A|B) the proportion of those with A out of those with B.</a:t>
+            </a:r>
+          </a:p>
+          <a:p>
+            <a:endParaRPr lang="en-US" dirty="0"/>
+          </a:p>
+          <a:p>
+            <a:r>
+              <a:rPr lang="en-US" b="1" dirty="0">
+                <a:solidFill>
+                  <a:srgbClr val="FF0000"/>
+                </a:solidFill>
+              </a:rPr>
+              <a:t>Bayesian interpretation of Bayes’ theorem.</a:t>
+            </a:r>
+          </a:p>
+          <a:p>
+            <a:r>
+              <a:rPr lang="en-US" dirty="0"/>
+              <a:t>Probability measures a degree of belief.</a:t>
+            </a:r>
+          </a:p>
+          <a:p>
+            <a:r>
+              <a:rPr lang="en-US" dirty="0"/>
+              <a:t>Bayes’ theorem then links the degree of belief in a proposition before (A)</a:t>
+            </a:r>
+          </a:p>
+          <a:p>
+            <a:r>
+              <a:rPr lang="en-US" dirty="0"/>
+              <a:t>and after (B) accounting for evidence.</a:t>
+            </a:r>
+          </a:p>
+          <a:p>
+            <a:endParaRPr lang="en-US" dirty="0"/>
+          </a:p>
+          <a:p>
+            <a:r>
+              <a:rPr lang="en-US" dirty="0"/>
+              <a:t>For example, suppose it is believed with 50% certainty </a:t>
+            </a:r>
+          </a:p>
+          <a:p>
+            <a:r>
+              <a:rPr lang="en-US" dirty="0"/>
+              <a:t>that a coin is twice as likely to land heads than tails.</a:t>
+            </a:r>
+          </a:p>
+          <a:p>
+            <a:r>
+              <a:rPr lang="en-US" dirty="0"/>
+              <a:t>If the coin is flipped a number of times and the outcomes observed,</a:t>
+            </a:r>
+          </a:p>
+          <a:p>
+            <a:r>
+              <a:rPr lang="en-US" dirty="0"/>
+              <a:t>then that degree of belief may rise, fall or </a:t>
+            </a:r>
+          </a:p>
+          <a:p>
+            <a:r>
+              <a:rPr lang="en-US" dirty="0"/>
+              <a:t>remain the same depending on the results.</a:t>
+            </a:r>
+          </a:p>
+        </p:txBody>
+      </p:sp>
+      <p:pic>
+        <p:nvPicPr>
+          <p:cNvPr id="3" name="Picture 2">
+            <a:extLst>
+              <a:ext uri="{FF2B5EF4-FFF2-40B4-BE49-F238E27FC236}">
+                <a16:creationId xmlns:a16="http://schemas.microsoft.com/office/drawing/2014/main" id="{5C70D884-EC0B-1A48-94E2-CD2923F3622A}"/>
+              </a:ext>
+            </a:extLst>
+          </p:cNvPr>
+          <p:cNvPicPr>
+            <a:picLocks noChangeAspect="1"/>
+          </p:cNvPicPr>
+          <p:nvPr/>
+        </p:nvPicPr>
+        <p:blipFill>
+          <a:blip r:embed="rId5" cstate="email">
+            <a:extLst>
+              <a:ext uri="{28A0092B-C50C-407E-A947-70E740481C1C}">
+                <a14:useLocalDpi xmlns:a14="http://schemas.microsoft.com/office/drawing/2010/main"/>
+              </a:ext>
+            </a:extLst>
+          </a:blip>
+          <a:stretch>
+            <a:fillRect/>
+          </a:stretch>
+        </p:blipFill>
+        <p:spPr>
+          <a:xfrm>
+            <a:off x="8070850" y="177588"/>
+            <a:ext cx="3822700" cy="2044700"/>
+          </a:xfrm>
+          <a:prstGeom prst="rect">
+            <a:avLst/>
+          </a:prstGeom>
+        </p:spPr>
+      </p:pic>
+      <p:sp>
+        <p:nvSpPr>
+          <p:cNvPr id="6" name="TextBox 5">
+            <a:extLst>
+              <a:ext uri="{FF2B5EF4-FFF2-40B4-BE49-F238E27FC236}">
+                <a16:creationId xmlns:a16="http://schemas.microsoft.com/office/drawing/2014/main" id="{6CB6F775-63F0-274F-A53D-9922B5035949}"/>
+              </a:ext>
+            </a:extLst>
+          </p:cNvPr>
+          <p:cNvSpPr txBox="1"/>
+          <p:nvPr/>
+        </p:nvSpPr>
+        <p:spPr>
+          <a:xfrm>
+            <a:off x="8404392" y="2322095"/>
+            <a:ext cx="3489158" cy="307777"/>
+          </a:xfrm>
+          <a:prstGeom prst="rect">
+            <a:avLst/>
+          </a:prstGeom>
+          <a:noFill/>
+        </p:spPr>
+        <p:txBody>
+          <a:bodyPr wrap="square" rtlCol="0">
+            <a:spAutoFit/>
+          </a:bodyPr>
+          <a:lstStyle/>
+          <a:p>
+            <a:r>
+              <a:rPr lang="en-US" dirty="0" err="1"/>
+              <a:t>Thomas_Bayes</a:t>
+            </a:r>
+            <a:r>
+              <a:rPr lang="en-US" dirty="0"/>
+              <a:t> – (/’</a:t>
+            </a:r>
+            <a:r>
+              <a:rPr lang="en-US" dirty="0" err="1"/>
+              <a:t>be?z</a:t>
+            </a:r>
+            <a:r>
+              <a:rPr lang="en-US" dirty="0"/>
+              <a:t>/; 1701–1761)</a:t>
+            </a:r>
+          </a:p>
+        </p:txBody>
+      </p:sp>
+    </p:spTree>
+    <p:extLst>
+      <p:ext uri="{BB962C8B-B14F-4D97-AF65-F5344CB8AC3E}">
+        <p14:creationId xmlns:p14="http://schemas.microsoft.com/office/powerpoint/2010/main" val="822577207"/>
+      </p:ext>
+    </p:extLst>
+  </p:cSld>
+  <p:clrMapOvr>
+    <a:masterClrMapping/>
+  </p:clrMapOvr>
+</p:sld>
+</file>
+
+<file path=ppt/slides/slide7.xml><?xml version="1.0" encoding="utf-8"?>
+<p:sld xmlns:a="http://schemas.openxmlformats.org/drawingml/2006/main" xmlns:r="http://schemas.openxmlformats.org/officeDocument/2006/relationships" xmlns:p="http://schemas.openxmlformats.org/presentationml/2006/main">
+  <p:cSld>
+    <p:spTree>
+      <p:nvGrpSpPr>
+        <p:cNvPr id="1" name=""/>
+        <p:cNvGrpSpPr/>
+        <p:nvPr/>
+      </p:nvGrpSpPr>
+      <p:grpSpPr>
+        <a:xfrm>
+          <a:off x="0" y="0"/>
+          <a:ext cx="0" cy="0"/>
+          <a:chOff x="0" y="0"/>
+          <a:chExt cx="0" cy="0"/>
+        </a:xfrm>
+      </p:grpSpPr>
+      <p:sp>
+        <p:nvSpPr>
+          <p:cNvPr id="4" name="TextBox 3">
+            <a:extLst>
+              <a:ext uri="{FF2B5EF4-FFF2-40B4-BE49-F238E27FC236}">
                 <a16:creationId xmlns:a16="http://schemas.microsoft.com/office/drawing/2014/main" id="{8A0212EB-D5F5-7C42-9867-3F4106A76AC3}"/>
               </a:ext>
             </a:extLst>
@@ -17913,7 +19200,7 @@
 </p:sld>
 </file>
 
-<file path=ppt/slides/slide7.xml><?xml version="1.0" encoding="utf-8"?>
+<file path=ppt/slides/slide8.xml><?xml version="1.0" encoding="utf-8"?>
 <p:sld xmlns:a="http://schemas.openxmlformats.org/drawingml/2006/main" xmlns:r="http://schemas.openxmlformats.org/officeDocument/2006/relationships" xmlns:p="http://schemas.openxmlformats.org/presentationml/2006/main">
   <p:cSld>
     <p:spTree>
@@ -18191,7 +19478,7 @@
 </p:sld>
 </file>
 
-<file path=ppt/slides/slide8.xml><?xml version="1.0" encoding="utf-8"?>
+<file path=ppt/slides/slide9.xml><?xml version="1.0" encoding="utf-8"?>
 <p:sld xmlns:a="http://schemas.openxmlformats.org/drawingml/2006/main" xmlns:r="http://schemas.openxmlformats.org/officeDocument/2006/relationships" xmlns:p="http://schemas.openxmlformats.org/presentationml/2006/main">
   <p:cSld>
     <p:spTree>
@@ -18698,464 +19985,6 @@
     <p:extLst>
       <p:ext uri="{BB962C8B-B14F-4D97-AF65-F5344CB8AC3E}">
         <p14:creationId xmlns:p14="http://schemas.microsoft.com/office/powerpoint/2010/main" val="3145259505"/>
-      </p:ext>
-    </p:extLst>
-  </p:cSld>
-  <p:clrMapOvr>
-    <a:masterClrMapping/>
-  </p:clrMapOvr>
-</p:sld>
-</file>
-
-<file path=ppt/slides/slide9.xml><?xml version="1.0" encoding="utf-8"?>
-<p:sld xmlns:a="http://schemas.openxmlformats.org/drawingml/2006/main" xmlns:r="http://schemas.openxmlformats.org/officeDocument/2006/relationships" xmlns:p="http://schemas.openxmlformats.org/presentationml/2006/main">
-  <p:cSld>
-    <p:spTree>
-      <p:nvGrpSpPr>
-        <p:cNvPr id="1" name=""/>
-        <p:cNvGrpSpPr/>
-        <p:nvPr/>
-      </p:nvGrpSpPr>
-      <p:grpSpPr>
-        <a:xfrm>
-          <a:off x="0" y="0"/>
-          <a:ext cx="0" cy="0"/>
-          <a:chOff x="0" y="0"/>
-          <a:chExt cx="0" cy="0"/>
-        </a:xfrm>
-      </p:grpSpPr>
-      <p:sp>
-        <p:nvSpPr>
-          <p:cNvPr id="4" name="TextBox 3">
-            <a:extLst>
-              <a:ext uri="{FF2B5EF4-FFF2-40B4-BE49-F238E27FC236}">
-                <a16:creationId xmlns:a16="http://schemas.microsoft.com/office/drawing/2014/main" id="{1EB5F268-965F-C142-A102-83C02389B555}"/>
-              </a:ext>
-            </a:extLst>
-          </p:cNvPr>
-          <p:cNvSpPr txBox="1"/>
-          <p:nvPr/>
-        </p:nvSpPr>
-        <p:spPr>
-          <a:xfrm>
-            <a:off x="84912" y="85118"/>
-            <a:ext cx="5906814" cy="6771084"/>
-          </a:xfrm>
-          <a:prstGeom prst="rect">
-            <a:avLst/>
-          </a:prstGeom>
-          <a:noFill/>
-        </p:spPr>
-        <p:txBody>
-          <a:bodyPr wrap="square" rtlCol="0">
-            <a:spAutoFit/>
-          </a:bodyPr>
-          <a:lstStyle/>
-          <a:p>
-            <a:r>
-              <a:rPr lang="en-US" sz="1800" b="1" dirty="0"/>
-              <a:t>Random Variable. Probability Distribution</a:t>
-            </a:r>
-          </a:p>
-          <a:p>
-            <a:br>
-              <a:rPr lang="en-US" dirty="0"/>
-            </a:br>
-            <a:r>
-              <a:rPr lang="en-US" b="1" dirty="0">
-                <a:solidFill>
-                  <a:srgbClr val="0070C0"/>
-                </a:solidFill>
-              </a:rPr>
-              <a:t>Random variable </a:t>
-            </a:r>
-            <a:r>
-              <a:rPr lang="en-US" dirty="0"/>
-              <a:t>is a numerical variable taking different values.</a:t>
-            </a:r>
-          </a:p>
-          <a:p>
-            <a:r>
-              <a:rPr lang="en-US" dirty="0"/>
-              <a:t>Values may be </a:t>
-            </a:r>
-            <a:r>
-              <a:rPr lang="en-US" b="1" dirty="0">
-                <a:solidFill>
-                  <a:srgbClr val="0070C0"/>
-                </a:solidFill>
-              </a:rPr>
-              <a:t>discrete or continuous</a:t>
-            </a:r>
-            <a:r>
-              <a:rPr lang="en-US" dirty="0"/>
-              <a:t>.</a:t>
-            </a:r>
-          </a:p>
-          <a:p>
-            <a:endParaRPr lang="en-US" dirty="0"/>
-          </a:p>
-          <a:p>
-            <a:r>
-              <a:rPr lang="en-US" dirty="0"/>
-              <a:t>For example, think of variable “x” which may have any real value between -10 and +10.</a:t>
-            </a:r>
-          </a:p>
-          <a:p>
-            <a:endParaRPr lang="en-US" dirty="0"/>
-          </a:p>
-          <a:p>
-            <a:r>
-              <a:rPr lang="en-US" dirty="0"/>
-              <a:t>Or think of a variable “z” which can have discrete values 0,0.1,0.2, … 0.9, 1.0</a:t>
-            </a:r>
-          </a:p>
-          <a:p>
-            <a:endParaRPr lang="en-US" dirty="0"/>
-          </a:p>
-          <a:p>
-            <a:r>
-              <a:rPr lang="en-US" sz="2400" b="1" dirty="0">
-                <a:solidFill>
-                  <a:srgbClr val="FF0000"/>
-                </a:solidFill>
-              </a:rPr>
-              <a:t>Discrete Case</a:t>
-            </a:r>
-          </a:p>
-          <a:p>
-            <a:r>
-              <a:rPr lang="en-US" b="1" dirty="0">
-                <a:solidFill>
-                  <a:srgbClr val="0070C0"/>
-                </a:solidFill>
-              </a:rPr>
-              <a:t>Probability function </a:t>
-            </a:r>
-            <a:r>
-              <a:rPr lang="en-US" dirty="0"/>
-              <a:t>P(x) of a discrete random variable “x” </a:t>
-            </a:r>
-          </a:p>
-          <a:p>
-            <a:r>
-              <a:rPr lang="en-US" dirty="0"/>
-              <a:t>is simply a function which gives probability of discrete values.</a:t>
-            </a:r>
-          </a:p>
-          <a:p>
-            <a:endParaRPr lang="en-US" dirty="0"/>
-          </a:p>
-          <a:p>
-            <a:r>
-              <a:rPr lang="en-US" dirty="0"/>
-              <a:t>For example, if the random variable “x” may have two values: ( 0 or 1 ),</a:t>
-            </a:r>
-          </a:p>
-          <a:p>
-            <a:r>
-              <a:rPr lang="en-US" dirty="0"/>
-              <a:t>and if probabilities of those values are equal, then</a:t>
-            </a:r>
-          </a:p>
-          <a:p>
-            <a:endParaRPr lang="en-US" dirty="0"/>
-          </a:p>
-          <a:p>
-            <a:r>
-              <a:rPr lang="en-US" dirty="0"/>
-              <a:t>P(0) = 0.5, f(1) = 0.5.</a:t>
-            </a:r>
-          </a:p>
-          <a:p>
-            <a:endParaRPr lang="en-US" dirty="0"/>
-          </a:p>
-          <a:p>
-            <a:r>
-              <a:rPr lang="en-US" dirty="0"/>
-              <a:t>The sum of individual probabilities for all possible values should be 1.</a:t>
-            </a:r>
-          </a:p>
-          <a:p>
-            <a:endParaRPr lang="en-US" dirty="0"/>
-          </a:p>
-          <a:p>
-            <a:r>
-              <a:rPr lang="en-US" b="1" dirty="0">
-                <a:solidFill>
-                  <a:srgbClr val="0070C0"/>
-                </a:solidFill>
-              </a:rPr>
-              <a:t>Expected value </a:t>
-            </a:r>
-            <a:r>
-              <a:rPr lang="en-US" dirty="0"/>
-              <a:t>is an weighted average of all values.</a:t>
-            </a:r>
-          </a:p>
-          <a:p>
-            <a:endParaRPr lang="en-US" dirty="0"/>
-          </a:p>
-          <a:p>
-            <a:r>
-              <a:rPr lang="en-US" dirty="0"/>
-              <a:t>E(x) = sum(Xi*P(Xi)), where Xi goes through all allowed values of X.</a:t>
-            </a:r>
-          </a:p>
-          <a:p>
-            <a:endParaRPr lang="en-US" dirty="0"/>
-          </a:p>
-          <a:p>
-            <a:r>
-              <a:rPr lang="en-US" b="1" dirty="0">
-                <a:solidFill>
-                  <a:srgbClr val="0070C0"/>
-                </a:solidFill>
-              </a:rPr>
-              <a:t>Variance = sigma squared </a:t>
-            </a:r>
-            <a:r>
-              <a:rPr lang="en-US" dirty="0"/>
-              <a:t>= sum( (Xi-E(x))**2 * P(Xi) )</a:t>
-            </a:r>
-          </a:p>
-          <a:p>
-            <a:endParaRPr lang="en-US" dirty="0"/>
-          </a:p>
-          <a:p>
-            <a:r>
-              <a:rPr lang="en-US" b="1" dirty="0">
-                <a:solidFill>
-                  <a:srgbClr val="0070C0"/>
-                </a:solidFill>
-              </a:rPr>
-              <a:t>Standard Deviation </a:t>
-            </a:r>
-            <a:r>
-              <a:rPr lang="en-US" dirty="0"/>
-              <a:t>= sqrt(sigma squared)</a:t>
-            </a:r>
-          </a:p>
-        </p:txBody>
-      </p:sp>
-      <p:sp>
-        <p:nvSpPr>
-          <p:cNvPr id="5" name="TextBox 4">
-            <a:extLst>
-              <a:ext uri="{FF2B5EF4-FFF2-40B4-BE49-F238E27FC236}">
-                <a16:creationId xmlns:a16="http://schemas.microsoft.com/office/drawing/2014/main" id="{E72EEA3B-9D50-A145-B8FE-B6686486D979}"/>
-              </a:ext>
-            </a:extLst>
-          </p:cNvPr>
-          <p:cNvSpPr txBox="1"/>
-          <p:nvPr/>
-        </p:nvSpPr>
-        <p:spPr>
-          <a:xfrm>
-            <a:off x="5991726" y="178676"/>
-            <a:ext cx="6200274" cy="6494085"/>
-          </a:xfrm>
-          <a:prstGeom prst="rect">
-            <a:avLst/>
-          </a:prstGeom>
-          <a:noFill/>
-        </p:spPr>
-        <p:txBody>
-          <a:bodyPr wrap="square" rtlCol="0">
-            <a:spAutoFit/>
-          </a:bodyPr>
-          <a:lstStyle/>
-          <a:p>
-            <a:r>
-              <a:rPr lang="en-US" dirty="0"/>
-              <a:t>Probability Density Function (PDF)  </a:t>
-            </a:r>
-          </a:p>
-          <a:p>
-            <a:r>
-              <a:rPr lang="en-US" dirty="0"/>
-              <a:t>vs.  Cumulative Probability Function ( CPF)</a:t>
-            </a:r>
-          </a:p>
-          <a:p>
-            <a:endParaRPr lang="en-US" dirty="0"/>
-          </a:p>
-          <a:p>
-            <a:r>
-              <a:rPr lang="en-US" sz="2400" b="1" dirty="0">
-                <a:solidFill>
-                  <a:srgbClr val="FF0000"/>
-                </a:solidFill>
-              </a:rPr>
-              <a:t>Continuous Case</a:t>
-            </a:r>
-          </a:p>
-          <a:p>
-            <a:endParaRPr lang="en-US" dirty="0"/>
-          </a:p>
-          <a:p>
-            <a:r>
-              <a:rPr lang="en-US" b="1" dirty="0">
-                <a:solidFill>
-                  <a:srgbClr val="0070C0"/>
-                </a:solidFill>
-              </a:rPr>
-              <a:t>Probability Density Function (PDF)</a:t>
-            </a:r>
-            <a:r>
-              <a:rPr lang="en-US" dirty="0"/>
-              <a:t> f(x) is a continuous function.</a:t>
-            </a:r>
-          </a:p>
-          <a:p>
-            <a:endParaRPr lang="en-US" dirty="0"/>
-          </a:p>
-          <a:p>
-            <a:r>
-              <a:rPr lang="en-US" dirty="0"/>
-              <a:t>f(x)*dx gives probability that value is between x and </a:t>
-            </a:r>
-            <a:r>
-              <a:rPr lang="en-US" dirty="0" err="1"/>
-              <a:t>x+dx</a:t>
-            </a:r>
-            <a:r>
-              <a:rPr lang="en-US" dirty="0"/>
-              <a:t>.</a:t>
-            </a:r>
-          </a:p>
-          <a:p>
-            <a:endParaRPr lang="en-US" dirty="0"/>
-          </a:p>
-          <a:p>
-            <a:r>
-              <a:rPr lang="en-US" dirty="0"/>
-              <a:t>The total integral of f(x)*dx should be equal to 1.</a:t>
-            </a:r>
-          </a:p>
-          <a:p>
-            <a:endParaRPr lang="en-US" dirty="0"/>
-          </a:p>
-          <a:p>
-            <a:r>
-              <a:rPr lang="en-US" b="1" dirty="0">
-                <a:solidFill>
-                  <a:srgbClr val="0070C0"/>
-                </a:solidFill>
-              </a:rPr>
-              <a:t>Cumulative Probability Function (CPF)</a:t>
-            </a:r>
-          </a:p>
-          <a:p>
-            <a:r>
-              <a:rPr lang="en-US" dirty="0"/>
-              <a:t>This is simply a function F(x) which gives probability that value is less than x.</a:t>
-            </a:r>
-          </a:p>
-          <a:p>
-            <a:r>
-              <a:rPr lang="en-US" dirty="0"/>
-              <a:t>It monotonously grows from 0 to 1 as x grows (from small to large values).</a:t>
-            </a:r>
-          </a:p>
-          <a:p>
-            <a:endParaRPr lang="en-US" dirty="0"/>
-          </a:p>
-          <a:p>
-            <a:endParaRPr lang="en-US" dirty="0"/>
-          </a:p>
-          <a:p>
-            <a:r>
-              <a:rPr lang="en-US" b="1" dirty="0">
-                <a:solidFill>
-                  <a:srgbClr val="0070C0"/>
-                </a:solidFill>
-              </a:rPr>
-              <a:t>The PDF is a first derivative of CPF.</a:t>
-            </a:r>
-          </a:p>
-          <a:p>
-            <a:endParaRPr lang="en-US" dirty="0"/>
-          </a:p>
-          <a:p>
-            <a:r>
-              <a:rPr lang="en-US" dirty="0"/>
-              <a:t>CPF(</a:t>
-            </a:r>
-            <a:r>
-              <a:rPr lang="en-US" dirty="0" err="1"/>
-              <a:t>x+dx</a:t>
-            </a:r>
-            <a:r>
-              <a:rPr lang="en-US" dirty="0"/>
-              <a:t>) – CPF(x) = = [Prob. of value &lt; (</a:t>
-            </a:r>
-            <a:r>
-              <a:rPr lang="en-US" dirty="0" err="1"/>
-              <a:t>x+dx</a:t>
-            </a:r>
-            <a:r>
-              <a:rPr lang="en-US" dirty="0"/>
-              <a:t>)] – [Prob. of value &lt; x] = f(x)*dx</a:t>
-            </a:r>
-          </a:p>
-          <a:p>
-            <a:endParaRPr lang="en-US" dirty="0"/>
-          </a:p>
-          <a:p>
-            <a:r>
-              <a:rPr lang="en-US" b="1" dirty="0">
-                <a:solidFill>
-                  <a:srgbClr val="0070C0"/>
-                </a:solidFill>
-              </a:rPr>
-              <a:t>Mean value = Expected value</a:t>
-            </a:r>
-          </a:p>
-          <a:p>
-            <a:endParaRPr lang="en-US" dirty="0"/>
-          </a:p>
-          <a:p>
-            <a:r>
-              <a:rPr lang="en-US" dirty="0"/>
-              <a:t>For discrete case we had:</a:t>
-            </a:r>
-          </a:p>
-          <a:p>
-            <a:r>
-              <a:rPr lang="en-US" dirty="0"/>
-              <a:t>E(x) = sum(Xi*P(Xi))</a:t>
-            </a:r>
-          </a:p>
-          <a:p>
-            <a:endParaRPr lang="en-US" dirty="0"/>
-          </a:p>
-          <a:p>
-            <a:r>
-              <a:rPr lang="en-US" dirty="0"/>
-              <a:t>For continuous case this translates into</a:t>
-            </a:r>
-          </a:p>
-          <a:p>
-            <a:r>
-              <a:rPr lang="en-US" dirty="0"/>
-              <a:t>E(x) = Integral(</a:t>
-            </a:r>
-            <a:r>
-              <a:rPr lang="en-US" dirty="0" err="1"/>
-              <a:t>xF</a:t>
-            </a:r>
-            <a:r>
-              <a:rPr lang="en-US" dirty="0"/>
-              <a:t>(x)dx)</a:t>
-            </a:r>
-          </a:p>
-        </p:txBody>
-      </p:sp>
-    </p:spTree>
-    <p:extLst>
-      <p:ext uri="{BB962C8B-B14F-4D97-AF65-F5344CB8AC3E}">
-        <p14:creationId xmlns:p14="http://schemas.microsoft.com/office/powerpoint/2010/main" val="2249432796"/>
       </p:ext>
     </p:extLst>
   </p:cSld>

--- a/statistics_01_probability.pptx
+++ b/statistics_01_probability.pptx
@@ -16222,7 +16222,7 @@
         <p:spPr>
           <a:xfrm>
             <a:off x="100084" y="1563204"/>
-            <a:ext cx="4581098" cy="1169551"/>
+            <a:ext cx="4392492" cy="1169551"/>
           </a:xfrm>
           <a:prstGeom prst="rect">
             <a:avLst/>
@@ -16246,13 +16246,7 @@
           <a:p>
             <a:r>
               <a:rPr lang="en-US" dirty="0"/>
-              <a:t>A = smart</a:t>
-            </a:r>
-          </a:p>
-          <a:p>
-            <a:r>
-              <a:rPr lang="en-US" dirty="0"/>
-              <a:t>B = beautiful</a:t>
+              <a:t>A = smart, B = beautiful</a:t>
             </a:r>
           </a:p>
           <a:p>
@@ -16261,322 +16255,10 @@
               <a:t>If P(A) ~ 0.9, and P(B) ~ 0.9, then P(A &amp; B) &gt;= 0.8</a:t>
             </a:r>
           </a:p>
-        </p:txBody>
-      </p:sp>
-      <p:sp>
-        <p:nvSpPr>
-          <p:cNvPr id="9" name="Rectangle 8">
-            <a:extLst>
-              <a:ext uri="{FF2B5EF4-FFF2-40B4-BE49-F238E27FC236}">
-                <a16:creationId xmlns:a16="http://schemas.microsoft.com/office/drawing/2014/main" id="{FF80AC0C-B7D3-1B4A-A993-97DFA15EE80E}"/>
-              </a:ext>
-            </a:extLst>
-          </p:cNvPr>
-          <p:cNvSpPr/>
-          <p:nvPr/>
-        </p:nvSpPr>
-        <p:spPr>
-          <a:xfrm>
-            <a:off x="4646258" y="1067784"/>
-            <a:ext cx="1746913" cy="1746913"/>
-          </a:xfrm>
-          <a:prstGeom prst="rect">
-            <a:avLst/>
-          </a:prstGeom>
-          <a:noFill/>
-          <a:ln w="50800"/>
-        </p:spPr>
-        <p:style>
-          <a:lnRef idx="2">
-            <a:schemeClr val="accent1">
-              <a:shade val="50000"/>
-            </a:schemeClr>
-          </a:lnRef>
-          <a:fillRef idx="1">
-            <a:schemeClr val="accent1"/>
-          </a:fillRef>
-          <a:effectRef idx="0">
-            <a:schemeClr val="accent1"/>
-          </a:effectRef>
-          <a:fontRef idx="minor">
-            <a:schemeClr val="lt1"/>
-          </a:fontRef>
-        </p:style>
-        <p:txBody>
-          <a:bodyPr rtlCol="0" anchor="ctr"/>
-          <a:lstStyle/>
-          <a:p>
-            <a:pPr algn="ctr"/>
-            <a:endParaRPr lang="en-US"/>
-          </a:p>
-        </p:txBody>
-      </p:sp>
-      <p:sp>
-        <p:nvSpPr>
-          <p:cNvPr id="46" name="Rectangle 45">
-            <a:extLst>
-              <a:ext uri="{FF2B5EF4-FFF2-40B4-BE49-F238E27FC236}">
-                <a16:creationId xmlns:a16="http://schemas.microsoft.com/office/drawing/2014/main" id="{EAC873BE-30F7-4047-A444-449806EBBA57}"/>
-              </a:ext>
-            </a:extLst>
-          </p:cNvPr>
-          <p:cNvSpPr/>
-          <p:nvPr/>
-        </p:nvSpPr>
-        <p:spPr>
-          <a:xfrm>
-            <a:off x="4649746" y="1077945"/>
-            <a:ext cx="1746913" cy="1102688"/>
-          </a:xfrm>
-          <a:prstGeom prst="rect">
-            <a:avLst/>
-          </a:prstGeom>
-          <a:pattFill prst="pct5">
-            <a:fgClr>
-              <a:schemeClr val="tx1"/>
-            </a:fgClr>
-            <a:bgClr>
-              <a:schemeClr val="bg1"/>
-            </a:bgClr>
-          </a:pattFill>
-          <a:ln w="50800"/>
-        </p:spPr>
-        <p:style>
-          <a:lnRef idx="2">
-            <a:schemeClr val="accent1">
-              <a:shade val="50000"/>
-            </a:schemeClr>
-          </a:lnRef>
-          <a:fillRef idx="1">
-            <a:schemeClr val="accent1"/>
-          </a:fillRef>
-          <a:effectRef idx="0">
-            <a:schemeClr val="accent1"/>
-          </a:effectRef>
-          <a:fontRef idx="minor">
-            <a:schemeClr val="lt1"/>
-          </a:fontRef>
-        </p:style>
-        <p:txBody>
-          <a:bodyPr rtlCol="0" anchor="ctr"/>
-          <a:lstStyle/>
-          <a:p>
-            <a:pPr algn="ctr"/>
-            <a:endParaRPr lang="en-US"/>
-          </a:p>
-        </p:txBody>
-      </p:sp>
-      <p:sp>
-        <p:nvSpPr>
-          <p:cNvPr id="47" name="Rectangle 46">
-            <a:extLst>
-              <a:ext uri="{FF2B5EF4-FFF2-40B4-BE49-F238E27FC236}">
-                <a16:creationId xmlns:a16="http://schemas.microsoft.com/office/drawing/2014/main" id="{4E4F4278-28D0-024F-95B3-5894BF9D24E0}"/>
-              </a:ext>
-            </a:extLst>
-          </p:cNvPr>
-          <p:cNvSpPr/>
-          <p:nvPr/>
-        </p:nvSpPr>
-        <p:spPr>
-          <a:xfrm>
-            <a:off x="5255198" y="1077944"/>
-            <a:ext cx="1127813" cy="1102689"/>
-          </a:xfrm>
-          <a:prstGeom prst="rect">
-            <a:avLst/>
-          </a:prstGeom>
-          <a:pattFill prst="pct70">
-            <a:fgClr>
-              <a:srgbClr val="00B0F0"/>
-            </a:fgClr>
-            <a:bgClr>
-              <a:schemeClr val="bg1"/>
-            </a:bgClr>
-          </a:pattFill>
-          <a:ln w="50800"/>
-        </p:spPr>
-        <p:style>
-          <a:lnRef idx="2">
-            <a:schemeClr val="accent1">
-              <a:shade val="50000"/>
-            </a:schemeClr>
-          </a:lnRef>
-          <a:fillRef idx="1">
-            <a:schemeClr val="accent1"/>
-          </a:fillRef>
-          <a:effectRef idx="0">
-            <a:schemeClr val="accent1"/>
-          </a:effectRef>
-          <a:fontRef idx="minor">
-            <a:schemeClr val="lt1"/>
-          </a:fontRef>
-        </p:style>
-        <p:txBody>
-          <a:bodyPr rtlCol="0" anchor="ctr"/>
-          <a:lstStyle/>
-          <a:p>
-            <a:pPr algn="ctr"/>
-            <a:endParaRPr lang="en-US"/>
-          </a:p>
-        </p:txBody>
-      </p:sp>
-      <p:sp>
-        <p:nvSpPr>
-          <p:cNvPr id="48" name="Rectangle 47">
-            <a:extLst>
-              <a:ext uri="{FF2B5EF4-FFF2-40B4-BE49-F238E27FC236}">
-                <a16:creationId xmlns:a16="http://schemas.microsoft.com/office/drawing/2014/main" id="{604B4D12-834C-1243-A921-7F98691EF521}"/>
-              </a:ext>
-            </a:extLst>
-          </p:cNvPr>
-          <p:cNvSpPr/>
-          <p:nvPr/>
-        </p:nvSpPr>
-        <p:spPr>
-          <a:xfrm>
-            <a:off x="5238270" y="2180633"/>
-            <a:ext cx="1144741" cy="644224"/>
-          </a:xfrm>
-          <a:prstGeom prst="rect">
-            <a:avLst/>
-          </a:prstGeom>
-          <a:pattFill prst="pct5">
-            <a:fgClr>
-              <a:schemeClr val="accent1"/>
-            </a:fgClr>
-            <a:bgClr>
-              <a:schemeClr val="bg1"/>
-            </a:bgClr>
-          </a:pattFill>
-          <a:ln w="50800"/>
-        </p:spPr>
-        <p:style>
-          <a:lnRef idx="2">
-            <a:schemeClr val="accent1">
-              <a:shade val="50000"/>
-            </a:schemeClr>
-          </a:lnRef>
-          <a:fillRef idx="1">
-            <a:schemeClr val="accent1"/>
-          </a:fillRef>
-          <a:effectRef idx="0">
-            <a:schemeClr val="accent1"/>
-          </a:effectRef>
-          <a:fontRef idx="minor">
-            <a:schemeClr val="lt1"/>
-          </a:fontRef>
-        </p:style>
-        <p:txBody>
-          <a:bodyPr rtlCol="0" anchor="ctr"/>
-          <a:lstStyle/>
-          <a:p>
-            <a:pPr algn="ctr"/>
-            <a:endParaRPr lang="en-US"/>
-          </a:p>
-        </p:txBody>
-      </p:sp>
-      <p:sp>
-        <p:nvSpPr>
-          <p:cNvPr id="10" name="TextBox 9">
-            <a:extLst>
-              <a:ext uri="{FF2B5EF4-FFF2-40B4-BE49-F238E27FC236}">
-                <a16:creationId xmlns:a16="http://schemas.microsoft.com/office/drawing/2014/main" id="{05331195-5B6A-864C-BA85-3B656CFE9B51}"/>
-              </a:ext>
-            </a:extLst>
-          </p:cNvPr>
-          <p:cNvSpPr txBox="1"/>
-          <p:nvPr/>
-        </p:nvSpPr>
-        <p:spPr>
-          <a:xfrm>
-            <a:off x="4735620" y="1479575"/>
-            <a:ext cx="340743" cy="461665"/>
-          </a:xfrm>
-          <a:prstGeom prst="rect">
-            <a:avLst/>
-          </a:prstGeom>
-          <a:noFill/>
-        </p:spPr>
-        <p:txBody>
-          <a:bodyPr wrap="square" rtlCol="0">
-            <a:spAutoFit/>
-          </a:bodyPr>
-          <a:lstStyle/>
-          <a:p>
-            <a:r>
-              <a:rPr lang="en-US" sz="2400" b="1" dirty="0"/>
-              <a:t>A</a:t>
-            </a:r>
-          </a:p>
-        </p:txBody>
-      </p:sp>
-      <p:sp>
-        <p:nvSpPr>
-          <p:cNvPr id="50" name="TextBox 49">
-            <a:extLst>
-              <a:ext uri="{FF2B5EF4-FFF2-40B4-BE49-F238E27FC236}">
-                <a16:creationId xmlns:a16="http://schemas.microsoft.com/office/drawing/2014/main" id="{55D5AC23-8A7E-9843-B11E-0320FA9ACB9E}"/>
-              </a:ext>
-            </a:extLst>
-          </p:cNvPr>
-          <p:cNvSpPr txBox="1"/>
-          <p:nvPr/>
-        </p:nvSpPr>
-        <p:spPr>
-          <a:xfrm>
-            <a:off x="5636320" y="2280347"/>
-            <a:ext cx="340743" cy="461665"/>
-          </a:xfrm>
-          <a:prstGeom prst="rect">
-            <a:avLst/>
-          </a:prstGeom>
-          <a:noFill/>
-        </p:spPr>
-        <p:txBody>
-          <a:bodyPr wrap="square" rtlCol="0">
-            <a:spAutoFit/>
-          </a:bodyPr>
-          <a:lstStyle/>
-          <a:p>
-            <a:r>
-              <a:rPr lang="en-US" sz="2400" b="1" dirty="0"/>
-              <a:t>B</a:t>
-            </a:r>
-          </a:p>
-        </p:txBody>
-      </p:sp>
-      <p:sp>
-        <p:nvSpPr>
-          <p:cNvPr id="51" name="TextBox 50">
-            <a:extLst>
-              <a:ext uri="{FF2B5EF4-FFF2-40B4-BE49-F238E27FC236}">
-                <a16:creationId xmlns:a16="http://schemas.microsoft.com/office/drawing/2014/main" id="{D1C432E0-6AA7-C840-AADC-2DAEB901164B}"/>
-              </a:ext>
-            </a:extLst>
-          </p:cNvPr>
-          <p:cNvSpPr txBox="1"/>
-          <p:nvPr/>
-        </p:nvSpPr>
-        <p:spPr>
-          <a:xfrm>
-            <a:off x="5364326" y="1416242"/>
-            <a:ext cx="891048" cy="461665"/>
-          </a:xfrm>
-          <a:prstGeom prst="rect">
-            <a:avLst/>
-          </a:prstGeom>
-          <a:noFill/>
-        </p:spPr>
-        <p:txBody>
-          <a:bodyPr wrap="square" rtlCol="0">
-            <a:spAutoFit/>
-          </a:bodyPr>
-          <a:lstStyle/>
-          <a:p>
-            <a:r>
-              <a:rPr lang="en-US" sz="2400" b="1" dirty="0"/>
-              <a:t>A∩B</a:t>
+          <a:p>
+            <a:r>
+              <a:rPr lang="en-US" dirty="0"/>
+              <a:t>If P(A) ~ 0.5, and P(B) ~ 0.5, then P(A &amp; B) &gt;= 0.0</a:t>
             </a:r>
           </a:p>
         </p:txBody>
@@ -16675,6 +16357,624 @@
               <a:rPr lang="en-US" sz="1600" dirty="0"/>
               <a:t>Florence, Italy</a:t>
             </a:r>
+          </a:p>
+        </p:txBody>
+      </p:sp>
+      <p:sp>
+        <p:nvSpPr>
+          <p:cNvPr id="19" name="Rectangle 18">
+            <a:extLst>
+              <a:ext uri="{FF2B5EF4-FFF2-40B4-BE49-F238E27FC236}">
+                <a16:creationId xmlns:a16="http://schemas.microsoft.com/office/drawing/2014/main" id="{6119EA38-394B-1149-A5D7-5874CD2165C4}"/>
+              </a:ext>
+            </a:extLst>
+          </p:cNvPr>
+          <p:cNvSpPr/>
+          <p:nvPr/>
+        </p:nvSpPr>
+        <p:spPr>
+          <a:xfrm>
+            <a:off x="6631776" y="1311966"/>
+            <a:ext cx="1111216" cy="1235588"/>
+          </a:xfrm>
+          <a:prstGeom prst="rect">
+            <a:avLst/>
+          </a:prstGeom>
+          <a:pattFill prst="pct70">
+            <a:fgClr>
+              <a:srgbClr val="00B0F0"/>
+            </a:fgClr>
+            <a:bgClr>
+              <a:schemeClr val="bg1"/>
+            </a:bgClr>
+          </a:pattFill>
+          <a:ln w="50800"/>
+        </p:spPr>
+        <p:style>
+          <a:lnRef idx="2">
+            <a:schemeClr val="accent1">
+              <a:shade val="50000"/>
+            </a:schemeClr>
+          </a:lnRef>
+          <a:fillRef idx="1">
+            <a:schemeClr val="accent1"/>
+          </a:fillRef>
+          <a:effectRef idx="0">
+            <a:schemeClr val="accent1"/>
+          </a:effectRef>
+          <a:fontRef idx="minor">
+            <a:schemeClr val="lt1"/>
+          </a:fontRef>
+        </p:style>
+        <p:txBody>
+          <a:bodyPr rtlCol="0" anchor="ctr"/>
+          <a:lstStyle/>
+          <a:p>
+            <a:pPr algn="ctr"/>
+            <a:endParaRPr lang="en-US"/>
+          </a:p>
+        </p:txBody>
+      </p:sp>
+      <p:sp>
+        <p:nvSpPr>
+          <p:cNvPr id="21" name="Rectangle 20">
+            <a:extLst>
+              <a:ext uri="{FF2B5EF4-FFF2-40B4-BE49-F238E27FC236}">
+                <a16:creationId xmlns:a16="http://schemas.microsoft.com/office/drawing/2014/main" id="{BCD1C1BF-D884-184D-AAB1-7C488C7A3375}"/>
+              </a:ext>
+            </a:extLst>
+          </p:cNvPr>
+          <p:cNvSpPr/>
+          <p:nvPr/>
+        </p:nvSpPr>
+        <p:spPr>
+          <a:xfrm>
+            <a:off x="6630240" y="1056304"/>
+            <a:ext cx="1111216" cy="255662"/>
+          </a:xfrm>
+          <a:prstGeom prst="rect">
+            <a:avLst/>
+          </a:prstGeom>
+          <a:pattFill prst="pct5">
+            <a:fgClr>
+              <a:schemeClr val="accent1"/>
+            </a:fgClr>
+            <a:bgClr>
+              <a:schemeClr val="bg1"/>
+            </a:bgClr>
+          </a:pattFill>
+          <a:ln w="50800">
+            <a:solidFill>
+              <a:schemeClr val="accent1">
+                <a:shade val="50000"/>
+              </a:schemeClr>
+            </a:solidFill>
+          </a:ln>
+        </p:spPr>
+        <p:style>
+          <a:lnRef idx="2">
+            <a:schemeClr val="accent1">
+              <a:shade val="50000"/>
+            </a:schemeClr>
+          </a:lnRef>
+          <a:fillRef idx="1">
+            <a:schemeClr val="accent1"/>
+          </a:fillRef>
+          <a:effectRef idx="0">
+            <a:schemeClr val="accent1"/>
+          </a:effectRef>
+          <a:fontRef idx="minor">
+            <a:schemeClr val="lt1"/>
+          </a:fontRef>
+        </p:style>
+        <p:txBody>
+          <a:bodyPr rtlCol="0" anchor="ctr"/>
+          <a:lstStyle/>
+          <a:p>
+            <a:pPr algn="ctr"/>
+            <a:endParaRPr lang="en-US"/>
+          </a:p>
+        </p:txBody>
+      </p:sp>
+      <p:sp>
+        <p:nvSpPr>
+          <p:cNvPr id="22" name="Rectangle 21">
+            <a:extLst>
+              <a:ext uri="{FF2B5EF4-FFF2-40B4-BE49-F238E27FC236}">
+                <a16:creationId xmlns:a16="http://schemas.microsoft.com/office/drawing/2014/main" id="{70794473-3895-2444-8768-069DF41B1E0F}"/>
+              </a:ext>
+            </a:extLst>
+          </p:cNvPr>
+          <p:cNvSpPr/>
+          <p:nvPr/>
+        </p:nvSpPr>
+        <p:spPr>
+          <a:xfrm>
+            <a:off x="6632060" y="2547554"/>
+            <a:ext cx="1111216" cy="255662"/>
+          </a:xfrm>
+          <a:prstGeom prst="rect">
+            <a:avLst/>
+          </a:prstGeom>
+          <a:pattFill prst="pct5">
+            <a:fgClr>
+              <a:schemeClr val="accent1"/>
+            </a:fgClr>
+            <a:bgClr>
+              <a:schemeClr val="bg1"/>
+            </a:bgClr>
+          </a:pattFill>
+          <a:ln w="50800">
+            <a:solidFill>
+              <a:schemeClr val="accent1">
+                <a:shade val="50000"/>
+              </a:schemeClr>
+            </a:solidFill>
+          </a:ln>
+        </p:spPr>
+        <p:style>
+          <a:lnRef idx="2">
+            <a:schemeClr val="accent1">
+              <a:shade val="50000"/>
+            </a:schemeClr>
+          </a:lnRef>
+          <a:fillRef idx="1">
+            <a:schemeClr val="accent1"/>
+          </a:fillRef>
+          <a:effectRef idx="0">
+            <a:schemeClr val="accent1"/>
+          </a:effectRef>
+          <a:fontRef idx="minor">
+            <a:schemeClr val="lt1"/>
+          </a:fontRef>
+        </p:style>
+        <p:txBody>
+          <a:bodyPr rtlCol="0" anchor="ctr"/>
+          <a:lstStyle/>
+          <a:p>
+            <a:pPr algn="ctr"/>
+            <a:endParaRPr lang="en-US"/>
+          </a:p>
+        </p:txBody>
+      </p:sp>
+      <p:sp>
+        <p:nvSpPr>
+          <p:cNvPr id="23" name="TextBox 22">
+            <a:extLst>
+              <a:ext uri="{FF2B5EF4-FFF2-40B4-BE49-F238E27FC236}">
+                <a16:creationId xmlns:a16="http://schemas.microsoft.com/office/drawing/2014/main" id="{6993AD7B-BEF4-2545-935A-69018E7C08C7}"/>
+              </a:ext>
+            </a:extLst>
+          </p:cNvPr>
+          <p:cNvSpPr txBox="1"/>
+          <p:nvPr/>
+        </p:nvSpPr>
+        <p:spPr>
+          <a:xfrm>
+            <a:off x="6755917" y="1648679"/>
+            <a:ext cx="891048" cy="461665"/>
+          </a:xfrm>
+          <a:prstGeom prst="rect">
+            <a:avLst/>
+          </a:prstGeom>
+          <a:noFill/>
+        </p:spPr>
+        <p:txBody>
+          <a:bodyPr wrap="square" rtlCol="0">
+            <a:spAutoFit/>
+          </a:bodyPr>
+          <a:lstStyle/>
+          <a:p>
+            <a:r>
+              <a:rPr lang="en-US" sz="2400" b="1" dirty="0"/>
+              <a:t>A∩B</a:t>
+            </a:r>
+          </a:p>
+        </p:txBody>
+      </p:sp>
+      <p:sp>
+        <p:nvSpPr>
+          <p:cNvPr id="24" name="TextBox 23">
+            <a:extLst>
+              <a:ext uri="{FF2B5EF4-FFF2-40B4-BE49-F238E27FC236}">
+                <a16:creationId xmlns:a16="http://schemas.microsoft.com/office/drawing/2014/main" id="{CB6CAA4B-826F-844E-B3B2-51D85197766B}"/>
+              </a:ext>
+            </a:extLst>
+          </p:cNvPr>
+          <p:cNvSpPr txBox="1"/>
+          <p:nvPr/>
+        </p:nvSpPr>
+        <p:spPr>
+          <a:xfrm>
+            <a:off x="7026486" y="2446517"/>
+            <a:ext cx="340743" cy="461665"/>
+          </a:xfrm>
+          <a:prstGeom prst="rect">
+            <a:avLst/>
+          </a:prstGeom>
+          <a:noFill/>
+        </p:spPr>
+        <p:txBody>
+          <a:bodyPr wrap="square" rtlCol="0">
+            <a:spAutoFit/>
+          </a:bodyPr>
+          <a:lstStyle/>
+          <a:p>
+            <a:r>
+              <a:rPr lang="en-US" sz="2400" b="1" dirty="0"/>
+              <a:t>B</a:t>
+            </a:r>
+          </a:p>
+        </p:txBody>
+      </p:sp>
+      <p:sp>
+        <p:nvSpPr>
+          <p:cNvPr id="25" name="TextBox 24">
+            <a:extLst>
+              <a:ext uri="{FF2B5EF4-FFF2-40B4-BE49-F238E27FC236}">
+                <a16:creationId xmlns:a16="http://schemas.microsoft.com/office/drawing/2014/main" id="{F59478F9-AB32-0445-AD45-45D8902525F5}"/>
+              </a:ext>
+            </a:extLst>
+          </p:cNvPr>
+          <p:cNvSpPr txBox="1"/>
+          <p:nvPr/>
+        </p:nvSpPr>
+        <p:spPr>
+          <a:xfrm>
+            <a:off x="7016326" y="954577"/>
+            <a:ext cx="340743" cy="461665"/>
+          </a:xfrm>
+          <a:prstGeom prst="rect">
+            <a:avLst/>
+          </a:prstGeom>
+          <a:noFill/>
+        </p:spPr>
+        <p:txBody>
+          <a:bodyPr wrap="square" rtlCol="0">
+            <a:spAutoFit/>
+          </a:bodyPr>
+          <a:lstStyle/>
+          <a:p>
+            <a:r>
+              <a:rPr lang="en-US" sz="2400" b="1" dirty="0"/>
+              <a:t>A</a:t>
+            </a:r>
+          </a:p>
+        </p:txBody>
+      </p:sp>
+      <p:sp>
+        <p:nvSpPr>
+          <p:cNvPr id="26" name="Rectangle 25">
+            <a:extLst>
+              <a:ext uri="{FF2B5EF4-FFF2-40B4-BE49-F238E27FC236}">
+                <a16:creationId xmlns:a16="http://schemas.microsoft.com/office/drawing/2014/main" id="{6EAE7B57-E2D0-3140-9D83-18EB2EBD24F5}"/>
+              </a:ext>
+            </a:extLst>
+          </p:cNvPr>
+          <p:cNvSpPr/>
+          <p:nvPr/>
+        </p:nvSpPr>
+        <p:spPr>
+          <a:xfrm>
+            <a:off x="4588603" y="1308617"/>
+            <a:ext cx="1744290" cy="1235588"/>
+          </a:xfrm>
+          <a:prstGeom prst="rect">
+            <a:avLst/>
+          </a:prstGeom>
+          <a:pattFill prst="pct70">
+            <a:fgClr>
+              <a:srgbClr val="00B0F0"/>
+            </a:fgClr>
+            <a:bgClr>
+              <a:schemeClr val="bg1"/>
+            </a:bgClr>
+          </a:pattFill>
+          <a:ln w="50800"/>
+        </p:spPr>
+        <p:style>
+          <a:lnRef idx="2">
+            <a:schemeClr val="accent1">
+              <a:shade val="50000"/>
+            </a:schemeClr>
+          </a:lnRef>
+          <a:fillRef idx="1">
+            <a:schemeClr val="accent1"/>
+          </a:fillRef>
+          <a:effectRef idx="0">
+            <a:schemeClr val="accent1"/>
+          </a:effectRef>
+          <a:fontRef idx="minor">
+            <a:schemeClr val="lt1"/>
+          </a:fontRef>
+        </p:style>
+        <p:txBody>
+          <a:bodyPr rtlCol="0" anchor="ctr"/>
+          <a:lstStyle/>
+          <a:p>
+            <a:pPr algn="ctr"/>
+            <a:endParaRPr lang="en-US"/>
+          </a:p>
+        </p:txBody>
+      </p:sp>
+      <p:sp>
+        <p:nvSpPr>
+          <p:cNvPr id="27" name="Rectangle 26">
+            <a:extLst>
+              <a:ext uri="{FF2B5EF4-FFF2-40B4-BE49-F238E27FC236}">
+                <a16:creationId xmlns:a16="http://schemas.microsoft.com/office/drawing/2014/main" id="{21054823-EB2E-0842-8E00-3AD88F5A1450}"/>
+              </a:ext>
+            </a:extLst>
+          </p:cNvPr>
+          <p:cNvSpPr/>
+          <p:nvPr/>
+        </p:nvSpPr>
+        <p:spPr>
+          <a:xfrm>
+            <a:off x="4587067" y="1052955"/>
+            <a:ext cx="1744290" cy="255662"/>
+          </a:xfrm>
+          <a:prstGeom prst="rect">
+            <a:avLst/>
+          </a:prstGeom>
+          <a:pattFill prst="pct5">
+            <a:fgClr>
+              <a:schemeClr val="accent1"/>
+            </a:fgClr>
+            <a:bgClr>
+              <a:schemeClr val="bg1"/>
+            </a:bgClr>
+          </a:pattFill>
+          <a:ln w="50800">
+            <a:solidFill>
+              <a:schemeClr val="accent1">
+                <a:shade val="50000"/>
+              </a:schemeClr>
+            </a:solidFill>
+          </a:ln>
+        </p:spPr>
+        <p:style>
+          <a:lnRef idx="2">
+            <a:schemeClr val="accent1">
+              <a:shade val="50000"/>
+            </a:schemeClr>
+          </a:lnRef>
+          <a:fillRef idx="1">
+            <a:schemeClr val="accent1"/>
+          </a:fillRef>
+          <a:effectRef idx="0">
+            <a:schemeClr val="accent1"/>
+          </a:effectRef>
+          <a:fontRef idx="minor">
+            <a:schemeClr val="lt1"/>
+          </a:fontRef>
+        </p:style>
+        <p:txBody>
+          <a:bodyPr rtlCol="0" anchor="ctr"/>
+          <a:lstStyle/>
+          <a:p>
+            <a:pPr algn="ctr"/>
+            <a:endParaRPr lang="en-US"/>
+          </a:p>
+        </p:txBody>
+      </p:sp>
+      <p:sp>
+        <p:nvSpPr>
+          <p:cNvPr id="28" name="Rectangle 27">
+            <a:extLst>
+              <a:ext uri="{FF2B5EF4-FFF2-40B4-BE49-F238E27FC236}">
+                <a16:creationId xmlns:a16="http://schemas.microsoft.com/office/drawing/2014/main" id="{E9B47906-0491-E848-AB4F-B39CED1F7B2C}"/>
+              </a:ext>
+            </a:extLst>
+          </p:cNvPr>
+          <p:cNvSpPr/>
+          <p:nvPr/>
+        </p:nvSpPr>
+        <p:spPr>
+          <a:xfrm>
+            <a:off x="4588887" y="2544205"/>
+            <a:ext cx="1744290" cy="255662"/>
+          </a:xfrm>
+          <a:prstGeom prst="rect">
+            <a:avLst/>
+          </a:prstGeom>
+          <a:pattFill prst="pct5">
+            <a:fgClr>
+              <a:schemeClr val="accent1"/>
+            </a:fgClr>
+            <a:bgClr>
+              <a:schemeClr val="bg1"/>
+            </a:bgClr>
+          </a:pattFill>
+          <a:ln w="50800">
+            <a:solidFill>
+              <a:schemeClr val="accent1">
+                <a:shade val="50000"/>
+              </a:schemeClr>
+            </a:solidFill>
+          </a:ln>
+        </p:spPr>
+        <p:style>
+          <a:lnRef idx="2">
+            <a:schemeClr val="accent1">
+              <a:shade val="50000"/>
+            </a:schemeClr>
+          </a:lnRef>
+          <a:fillRef idx="1">
+            <a:schemeClr val="accent1"/>
+          </a:fillRef>
+          <a:effectRef idx="0">
+            <a:schemeClr val="accent1"/>
+          </a:effectRef>
+          <a:fontRef idx="minor">
+            <a:schemeClr val="lt1"/>
+          </a:fontRef>
+        </p:style>
+        <p:txBody>
+          <a:bodyPr rtlCol="0" anchor="ctr"/>
+          <a:lstStyle/>
+          <a:p>
+            <a:pPr algn="ctr"/>
+            <a:endParaRPr lang="en-US"/>
+          </a:p>
+        </p:txBody>
+      </p:sp>
+      <p:sp>
+        <p:nvSpPr>
+          <p:cNvPr id="29" name="TextBox 28">
+            <a:extLst>
+              <a:ext uri="{FF2B5EF4-FFF2-40B4-BE49-F238E27FC236}">
+                <a16:creationId xmlns:a16="http://schemas.microsoft.com/office/drawing/2014/main" id="{B06F8336-A5A2-6543-B55F-745D62CE5E83}"/>
+              </a:ext>
+            </a:extLst>
+          </p:cNvPr>
+          <p:cNvSpPr txBox="1"/>
+          <p:nvPr/>
+        </p:nvSpPr>
+        <p:spPr>
+          <a:xfrm>
+            <a:off x="5013688" y="1645330"/>
+            <a:ext cx="891048" cy="461665"/>
+          </a:xfrm>
+          <a:prstGeom prst="rect">
+            <a:avLst/>
+          </a:prstGeom>
+          <a:noFill/>
+        </p:spPr>
+        <p:txBody>
+          <a:bodyPr wrap="square" rtlCol="0">
+            <a:spAutoFit/>
+          </a:bodyPr>
+          <a:lstStyle/>
+          <a:p>
+            <a:r>
+              <a:rPr lang="en-US" sz="2400" b="1" dirty="0"/>
+              <a:t>A∩B</a:t>
+            </a:r>
+          </a:p>
+        </p:txBody>
+      </p:sp>
+      <p:sp>
+        <p:nvSpPr>
+          <p:cNvPr id="30" name="TextBox 29">
+            <a:extLst>
+              <a:ext uri="{FF2B5EF4-FFF2-40B4-BE49-F238E27FC236}">
+                <a16:creationId xmlns:a16="http://schemas.microsoft.com/office/drawing/2014/main" id="{B6B312BC-AA97-A949-B869-DE72630F5310}"/>
+              </a:ext>
+            </a:extLst>
+          </p:cNvPr>
+          <p:cNvSpPr txBox="1"/>
+          <p:nvPr/>
+        </p:nvSpPr>
+        <p:spPr>
+          <a:xfrm>
+            <a:off x="5284257" y="2443168"/>
+            <a:ext cx="340743" cy="461665"/>
+          </a:xfrm>
+          <a:prstGeom prst="rect">
+            <a:avLst/>
+          </a:prstGeom>
+          <a:noFill/>
+        </p:spPr>
+        <p:txBody>
+          <a:bodyPr wrap="square" rtlCol="0">
+            <a:spAutoFit/>
+          </a:bodyPr>
+          <a:lstStyle/>
+          <a:p>
+            <a:r>
+              <a:rPr lang="en-US" sz="2400" b="1" dirty="0"/>
+              <a:t>B</a:t>
+            </a:r>
+          </a:p>
+        </p:txBody>
+      </p:sp>
+      <p:sp>
+        <p:nvSpPr>
+          <p:cNvPr id="31" name="TextBox 30">
+            <a:extLst>
+              <a:ext uri="{FF2B5EF4-FFF2-40B4-BE49-F238E27FC236}">
+                <a16:creationId xmlns:a16="http://schemas.microsoft.com/office/drawing/2014/main" id="{6B667B8B-30DD-9444-BFC2-9A8B64F907CF}"/>
+              </a:ext>
+            </a:extLst>
+          </p:cNvPr>
+          <p:cNvSpPr txBox="1"/>
+          <p:nvPr/>
+        </p:nvSpPr>
+        <p:spPr>
+          <a:xfrm>
+            <a:off x="5274097" y="951228"/>
+            <a:ext cx="340743" cy="461665"/>
+          </a:xfrm>
+          <a:prstGeom prst="rect">
+            <a:avLst/>
+          </a:prstGeom>
+          <a:noFill/>
+        </p:spPr>
+        <p:txBody>
+          <a:bodyPr wrap="square" rtlCol="0">
+            <a:spAutoFit/>
+          </a:bodyPr>
+          <a:lstStyle/>
+          <a:p>
+            <a:r>
+              <a:rPr lang="en-US" sz="2400" b="1" dirty="0"/>
+              <a:t>A</a:t>
+            </a:r>
+          </a:p>
+        </p:txBody>
+      </p:sp>
+      <p:sp>
+        <p:nvSpPr>
+          <p:cNvPr id="32" name="Rectangle 31">
+            <a:extLst>
+              <a:ext uri="{FF2B5EF4-FFF2-40B4-BE49-F238E27FC236}">
+                <a16:creationId xmlns:a16="http://schemas.microsoft.com/office/drawing/2014/main" id="{284D3EC6-34A6-1049-94C3-144A2434F4C3}"/>
+              </a:ext>
+            </a:extLst>
+          </p:cNvPr>
+          <p:cNvSpPr/>
+          <p:nvPr/>
+        </p:nvSpPr>
+        <p:spPr>
+          <a:xfrm>
+            <a:off x="7751496" y="1053026"/>
+            <a:ext cx="880188" cy="1746842"/>
+          </a:xfrm>
+          <a:prstGeom prst="rect">
+            <a:avLst/>
+          </a:prstGeom>
+          <a:noFill/>
+          <a:ln w="50800">
+            <a:solidFill>
+              <a:schemeClr val="accent1">
+                <a:shade val="50000"/>
+              </a:schemeClr>
+            </a:solidFill>
+          </a:ln>
+        </p:spPr>
+        <p:style>
+          <a:lnRef idx="2">
+            <a:schemeClr val="accent1">
+              <a:shade val="50000"/>
+            </a:schemeClr>
+          </a:lnRef>
+          <a:fillRef idx="1">
+            <a:schemeClr val="accent1"/>
+          </a:fillRef>
+          <a:effectRef idx="0">
+            <a:schemeClr val="accent1"/>
+          </a:effectRef>
+          <a:fontRef idx="minor">
+            <a:schemeClr val="lt1"/>
+          </a:fontRef>
+        </p:style>
+        <p:txBody>
+          <a:bodyPr rtlCol="0" anchor="ctr"/>
+          <a:lstStyle/>
+          <a:p>
+            <a:pPr algn="ctr"/>
+            <a:endParaRPr lang="en-US"/>
           </a:p>
         </p:txBody>
       </p:sp>

--- a/statistics_01_probability.pptx
+++ b/statistics_01_probability.pptx
@@ -5,19 +5,18 @@
     <p:sldMasterId id="2147483659" r:id="rId1"/>
   </p:sldMasterIdLst>
   <p:notesMasterIdLst>
-    <p:notesMasterId r:id="rId12"/>
+    <p:notesMasterId r:id="rId11"/>
   </p:notesMasterIdLst>
   <p:sldIdLst>
     <p:sldId id="262" r:id="rId2"/>
     <p:sldId id="263" r:id="rId3"/>
     <p:sldId id="264" r:id="rId4"/>
     <p:sldId id="294" r:id="rId5"/>
-    <p:sldId id="274" r:id="rId6"/>
-    <p:sldId id="273" r:id="rId7"/>
-    <p:sldId id="292" r:id="rId8"/>
-    <p:sldId id="290" r:id="rId9"/>
-    <p:sldId id="293" r:id="rId10"/>
-    <p:sldId id="265" r:id="rId11"/>
+    <p:sldId id="256" r:id="rId6"/>
+    <p:sldId id="295" r:id="rId7"/>
+    <p:sldId id="296" r:id="rId8"/>
+    <p:sldId id="297" r:id="rId9"/>
+    <p:sldId id="265" r:id="rId10"/>
   </p:sldIdLst>
   <p:sldSz cx="12192000" cy="6858000"/>
   <p:notesSz cx="6858000" cy="9144000"/>
@@ -1550,7 +1549,7 @@
     </p:spTree>
     <p:extLst>
       <p:ext uri="{BB962C8B-B14F-4D97-AF65-F5344CB8AC3E}">
-        <p14:creationId xmlns:p14="http://schemas.microsoft.com/office/powerpoint/2010/main" val="3712630475"/>
+        <p14:creationId xmlns:p14="http://schemas.microsoft.com/office/powerpoint/2010/main" val="1751070861"/>
       </p:ext>
     </p:extLst>
   </p:cSld>
@@ -14807,464 +14806,6 @@
 </p:sld>
 </file>
 
-<file path=ppt/slides/slide10.xml><?xml version="1.0" encoding="utf-8"?>
-<p:sld xmlns:a="http://schemas.openxmlformats.org/drawingml/2006/main" xmlns:r="http://schemas.openxmlformats.org/officeDocument/2006/relationships" xmlns:p="http://schemas.openxmlformats.org/presentationml/2006/main">
-  <p:cSld>
-    <p:spTree>
-      <p:nvGrpSpPr>
-        <p:cNvPr id="1" name=""/>
-        <p:cNvGrpSpPr/>
-        <p:nvPr/>
-      </p:nvGrpSpPr>
-      <p:grpSpPr>
-        <a:xfrm>
-          <a:off x="0" y="0"/>
-          <a:ext cx="0" cy="0"/>
-          <a:chOff x="0" y="0"/>
-          <a:chExt cx="0" cy="0"/>
-        </a:xfrm>
-      </p:grpSpPr>
-      <p:sp>
-        <p:nvSpPr>
-          <p:cNvPr id="4" name="TextBox 3">
-            <a:extLst>
-              <a:ext uri="{FF2B5EF4-FFF2-40B4-BE49-F238E27FC236}">
-                <a16:creationId xmlns:a16="http://schemas.microsoft.com/office/drawing/2014/main" id="{1EB5F268-965F-C142-A102-83C02389B555}"/>
-              </a:ext>
-            </a:extLst>
-          </p:cNvPr>
-          <p:cNvSpPr txBox="1"/>
-          <p:nvPr/>
-        </p:nvSpPr>
-        <p:spPr>
-          <a:xfrm>
-            <a:off x="84912" y="85118"/>
-            <a:ext cx="5906814" cy="6771084"/>
-          </a:xfrm>
-          <a:prstGeom prst="rect">
-            <a:avLst/>
-          </a:prstGeom>
-          <a:noFill/>
-        </p:spPr>
-        <p:txBody>
-          <a:bodyPr wrap="square" rtlCol="0">
-            <a:spAutoFit/>
-          </a:bodyPr>
-          <a:lstStyle/>
-          <a:p>
-            <a:r>
-              <a:rPr lang="en-US" sz="1800" b="1" dirty="0"/>
-              <a:t>Random Variable. Probability Distribution</a:t>
-            </a:r>
-          </a:p>
-          <a:p>
-            <a:br>
-              <a:rPr lang="en-US" dirty="0"/>
-            </a:br>
-            <a:r>
-              <a:rPr lang="en-US" b="1" dirty="0">
-                <a:solidFill>
-                  <a:srgbClr val="0070C0"/>
-                </a:solidFill>
-              </a:rPr>
-              <a:t>Random variable </a:t>
-            </a:r>
-            <a:r>
-              <a:rPr lang="en-US" dirty="0"/>
-              <a:t>is a numerical variable taking different values.</a:t>
-            </a:r>
-          </a:p>
-          <a:p>
-            <a:r>
-              <a:rPr lang="en-US" dirty="0"/>
-              <a:t>Values may be </a:t>
-            </a:r>
-            <a:r>
-              <a:rPr lang="en-US" b="1" dirty="0">
-                <a:solidFill>
-                  <a:srgbClr val="0070C0"/>
-                </a:solidFill>
-              </a:rPr>
-              <a:t>discrete or continuous</a:t>
-            </a:r>
-            <a:r>
-              <a:rPr lang="en-US" dirty="0"/>
-              <a:t>.</a:t>
-            </a:r>
-          </a:p>
-          <a:p>
-            <a:endParaRPr lang="en-US" dirty="0"/>
-          </a:p>
-          <a:p>
-            <a:r>
-              <a:rPr lang="en-US" dirty="0"/>
-              <a:t>For example, think of variable “x” which may have any real value between -10 and +10.</a:t>
-            </a:r>
-          </a:p>
-          <a:p>
-            <a:endParaRPr lang="en-US" dirty="0"/>
-          </a:p>
-          <a:p>
-            <a:r>
-              <a:rPr lang="en-US" dirty="0"/>
-              <a:t>Or think of a variable “z” which can have discrete values 0,0.1,0.2, … 0.9, 1.0</a:t>
-            </a:r>
-          </a:p>
-          <a:p>
-            <a:endParaRPr lang="en-US" dirty="0"/>
-          </a:p>
-          <a:p>
-            <a:r>
-              <a:rPr lang="en-US" sz="2400" b="1" dirty="0">
-                <a:solidFill>
-                  <a:srgbClr val="FF0000"/>
-                </a:solidFill>
-              </a:rPr>
-              <a:t>Discrete Case</a:t>
-            </a:r>
-          </a:p>
-          <a:p>
-            <a:r>
-              <a:rPr lang="en-US" b="1" dirty="0">
-                <a:solidFill>
-                  <a:srgbClr val="0070C0"/>
-                </a:solidFill>
-              </a:rPr>
-              <a:t>Probability function </a:t>
-            </a:r>
-            <a:r>
-              <a:rPr lang="en-US" dirty="0"/>
-              <a:t>P(x) of a discrete random variable “x” </a:t>
-            </a:r>
-          </a:p>
-          <a:p>
-            <a:r>
-              <a:rPr lang="en-US" dirty="0"/>
-              <a:t>is simply a function which gives probability of discrete values.</a:t>
-            </a:r>
-          </a:p>
-          <a:p>
-            <a:endParaRPr lang="en-US" dirty="0"/>
-          </a:p>
-          <a:p>
-            <a:r>
-              <a:rPr lang="en-US" dirty="0"/>
-              <a:t>For example, if the random variable “x” may have two values: ( 0 or 1 ),</a:t>
-            </a:r>
-          </a:p>
-          <a:p>
-            <a:r>
-              <a:rPr lang="en-US" dirty="0"/>
-              <a:t>and if probabilities of those values are equal, then</a:t>
-            </a:r>
-          </a:p>
-          <a:p>
-            <a:endParaRPr lang="en-US" dirty="0"/>
-          </a:p>
-          <a:p>
-            <a:r>
-              <a:rPr lang="en-US" dirty="0"/>
-              <a:t>P(0) = 0.5, f(1) = 0.5.</a:t>
-            </a:r>
-          </a:p>
-          <a:p>
-            <a:endParaRPr lang="en-US" dirty="0"/>
-          </a:p>
-          <a:p>
-            <a:r>
-              <a:rPr lang="en-US" dirty="0"/>
-              <a:t>The sum of individual probabilities for all possible values should be 1.</a:t>
-            </a:r>
-          </a:p>
-          <a:p>
-            <a:endParaRPr lang="en-US" dirty="0"/>
-          </a:p>
-          <a:p>
-            <a:r>
-              <a:rPr lang="en-US" b="1" dirty="0">
-                <a:solidFill>
-                  <a:srgbClr val="0070C0"/>
-                </a:solidFill>
-              </a:rPr>
-              <a:t>Expected value </a:t>
-            </a:r>
-            <a:r>
-              <a:rPr lang="en-US" dirty="0"/>
-              <a:t>is an weighted average of all values.</a:t>
-            </a:r>
-          </a:p>
-          <a:p>
-            <a:endParaRPr lang="en-US" dirty="0"/>
-          </a:p>
-          <a:p>
-            <a:r>
-              <a:rPr lang="en-US" dirty="0"/>
-              <a:t>E(x) = sum(Xi*P(Xi)), where Xi goes through all allowed values of X.</a:t>
-            </a:r>
-          </a:p>
-          <a:p>
-            <a:endParaRPr lang="en-US" dirty="0"/>
-          </a:p>
-          <a:p>
-            <a:r>
-              <a:rPr lang="en-US" b="1" dirty="0">
-                <a:solidFill>
-                  <a:srgbClr val="0070C0"/>
-                </a:solidFill>
-              </a:rPr>
-              <a:t>Variance = sigma squared </a:t>
-            </a:r>
-            <a:r>
-              <a:rPr lang="en-US" dirty="0"/>
-              <a:t>= sum( (Xi-E(x))**2 * P(Xi) )</a:t>
-            </a:r>
-          </a:p>
-          <a:p>
-            <a:endParaRPr lang="en-US" dirty="0"/>
-          </a:p>
-          <a:p>
-            <a:r>
-              <a:rPr lang="en-US" b="1" dirty="0">
-                <a:solidFill>
-                  <a:srgbClr val="0070C0"/>
-                </a:solidFill>
-              </a:rPr>
-              <a:t>Standard Deviation </a:t>
-            </a:r>
-            <a:r>
-              <a:rPr lang="en-US" dirty="0"/>
-              <a:t>= sqrt(sigma squared)</a:t>
-            </a:r>
-          </a:p>
-        </p:txBody>
-      </p:sp>
-      <p:sp>
-        <p:nvSpPr>
-          <p:cNvPr id="5" name="TextBox 4">
-            <a:extLst>
-              <a:ext uri="{FF2B5EF4-FFF2-40B4-BE49-F238E27FC236}">
-                <a16:creationId xmlns:a16="http://schemas.microsoft.com/office/drawing/2014/main" id="{E72EEA3B-9D50-A145-B8FE-B6686486D979}"/>
-              </a:ext>
-            </a:extLst>
-          </p:cNvPr>
-          <p:cNvSpPr txBox="1"/>
-          <p:nvPr/>
-        </p:nvSpPr>
-        <p:spPr>
-          <a:xfrm>
-            <a:off x="5991726" y="178676"/>
-            <a:ext cx="6200274" cy="6494085"/>
-          </a:xfrm>
-          <a:prstGeom prst="rect">
-            <a:avLst/>
-          </a:prstGeom>
-          <a:noFill/>
-        </p:spPr>
-        <p:txBody>
-          <a:bodyPr wrap="square" rtlCol="0">
-            <a:spAutoFit/>
-          </a:bodyPr>
-          <a:lstStyle/>
-          <a:p>
-            <a:r>
-              <a:rPr lang="en-US" dirty="0"/>
-              <a:t>Probability Density Function (PDF)  </a:t>
-            </a:r>
-          </a:p>
-          <a:p>
-            <a:r>
-              <a:rPr lang="en-US" dirty="0"/>
-              <a:t>vs.  Cumulative Probability Function ( CPF)</a:t>
-            </a:r>
-          </a:p>
-          <a:p>
-            <a:endParaRPr lang="en-US" dirty="0"/>
-          </a:p>
-          <a:p>
-            <a:r>
-              <a:rPr lang="en-US" sz="2400" b="1" dirty="0">
-                <a:solidFill>
-                  <a:srgbClr val="FF0000"/>
-                </a:solidFill>
-              </a:rPr>
-              <a:t>Continuous Case</a:t>
-            </a:r>
-          </a:p>
-          <a:p>
-            <a:endParaRPr lang="en-US" dirty="0"/>
-          </a:p>
-          <a:p>
-            <a:r>
-              <a:rPr lang="en-US" b="1" dirty="0">
-                <a:solidFill>
-                  <a:srgbClr val="0070C0"/>
-                </a:solidFill>
-              </a:rPr>
-              <a:t>Probability Density Function (PDF)</a:t>
-            </a:r>
-            <a:r>
-              <a:rPr lang="en-US" dirty="0"/>
-              <a:t> f(x) is a continuous function.</a:t>
-            </a:r>
-          </a:p>
-          <a:p>
-            <a:endParaRPr lang="en-US" dirty="0"/>
-          </a:p>
-          <a:p>
-            <a:r>
-              <a:rPr lang="en-US" dirty="0"/>
-              <a:t>f(x)*dx gives probability that value is between x and </a:t>
-            </a:r>
-            <a:r>
-              <a:rPr lang="en-US" dirty="0" err="1"/>
-              <a:t>x+dx</a:t>
-            </a:r>
-            <a:r>
-              <a:rPr lang="en-US" dirty="0"/>
-              <a:t>.</a:t>
-            </a:r>
-          </a:p>
-          <a:p>
-            <a:endParaRPr lang="en-US" dirty="0"/>
-          </a:p>
-          <a:p>
-            <a:r>
-              <a:rPr lang="en-US" dirty="0"/>
-              <a:t>The total integral of f(x)*dx should be equal to 1.</a:t>
-            </a:r>
-          </a:p>
-          <a:p>
-            <a:endParaRPr lang="en-US" dirty="0"/>
-          </a:p>
-          <a:p>
-            <a:r>
-              <a:rPr lang="en-US" b="1" dirty="0">
-                <a:solidFill>
-                  <a:srgbClr val="0070C0"/>
-                </a:solidFill>
-              </a:rPr>
-              <a:t>Cumulative Probability Function (CPF)</a:t>
-            </a:r>
-          </a:p>
-          <a:p>
-            <a:r>
-              <a:rPr lang="en-US" dirty="0"/>
-              <a:t>This is simply a function F(x) which gives probability that value is less than x.</a:t>
-            </a:r>
-          </a:p>
-          <a:p>
-            <a:r>
-              <a:rPr lang="en-US" dirty="0"/>
-              <a:t>It monotonously grows from 0 to 1 as x grows (from small to large values).</a:t>
-            </a:r>
-          </a:p>
-          <a:p>
-            <a:endParaRPr lang="en-US" dirty="0"/>
-          </a:p>
-          <a:p>
-            <a:endParaRPr lang="en-US" dirty="0"/>
-          </a:p>
-          <a:p>
-            <a:r>
-              <a:rPr lang="en-US" b="1" dirty="0">
-                <a:solidFill>
-                  <a:srgbClr val="0070C0"/>
-                </a:solidFill>
-              </a:rPr>
-              <a:t>The PDF is a first derivative of CPF.</a:t>
-            </a:r>
-          </a:p>
-          <a:p>
-            <a:endParaRPr lang="en-US" dirty="0"/>
-          </a:p>
-          <a:p>
-            <a:r>
-              <a:rPr lang="en-US" dirty="0"/>
-              <a:t>CPF(</a:t>
-            </a:r>
-            <a:r>
-              <a:rPr lang="en-US" dirty="0" err="1"/>
-              <a:t>x+dx</a:t>
-            </a:r>
-            <a:r>
-              <a:rPr lang="en-US" dirty="0"/>
-              <a:t>) – CPF(x) = = [Prob. of value &lt; (</a:t>
-            </a:r>
-            <a:r>
-              <a:rPr lang="en-US" dirty="0" err="1"/>
-              <a:t>x+dx</a:t>
-            </a:r>
-            <a:r>
-              <a:rPr lang="en-US" dirty="0"/>
-              <a:t>)] – [Prob. of value &lt; x] = f(x)*dx</a:t>
-            </a:r>
-          </a:p>
-          <a:p>
-            <a:endParaRPr lang="en-US" dirty="0"/>
-          </a:p>
-          <a:p>
-            <a:r>
-              <a:rPr lang="en-US" b="1" dirty="0">
-                <a:solidFill>
-                  <a:srgbClr val="0070C0"/>
-                </a:solidFill>
-              </a:rPr>
-              <a:t>Mean value = Expected value</a:t>
-            </a:r>
-          </a:p>
-          <a:p>
-            <a:endParaRPr lang="en-US" dirty="0"/>
-          </a:p>
-          <a:p>
-            <a:r>
-              <a:rPr lang="en-US" dirty="0"/>
-              <a:t>For discrete case we had:</a:t>
-            </a:r>
-          </a:p>
-          <a:p>
-            <a:r>
-              <a:rPr lang="en-US" dirty="0"/>
-              <a:t>E(x) = sum(Xi*P(Xi))</a:t>
-            </a:r>
-          </a:p>
-          <a:p>
-            <a:endParaRPr lang="en-US" dirty="0"/>
-          </a:p>
-          <a:p>
-            <a:r>
-              <a:rPr lang="en-US" dirty="0"/>
-              <a:t>For continuous case this translates into</a:t>
-            </a:r>
-          </a:p>
-          <a:p>
-            <a:r>
-              <a:rPr lang="en-US" dirty="0"/>
-              <a:t>E(x) = Integral(</a:t>
-            </a:r>
-            <a:r>
-              <a:rPr lang="en-US" dirty="0" err="1"/>
-              <a:t>xF</a:t>
-            </a:r>
-            <a:r>
-              <a:rPr lang="en-US" dirty="0"/>
-              <a:t>(x)dx)</a:t>
-            </a:r>
-          </a:p>
-        </p:txBody>
-      </p:sp>
-    </p:spTree>
-    <p:extLst>
-      <p:ext uri="{BB962C8B-B14F-4D97-AF65-F5344CB8AC3E}">
-        <p14:creationId xmlns:p14="http://schemas.microsoft.com/office/powerpoint/2010/main" val="2249432796"/>
-      </p:ext>
-    </p:extLst>
-  </p:cSld>
-  <p:clrMapOvr>
-    <a:masterClrMapping/>
-  </p:clrMapOvr>
-</p:sld>
-</file>
-
 <file path=ppt/slides/slide2.xml><?xml version="1.0" encoding="utf-8"?>
 <p:sld xmlns:a="http://schemas.openxmlformats.org/drawingml/2006/main" xmlns:r="http://schemas.openxmlformats.org/officeDocument/2006/relationships" xmlns:p="http://schemas.openxmlformats.org/presentationml/2006/main">
   <p:cSld>
@@ -17018,8 +16559,8 @@
             </p:nvSpPr>
             <p:spPr>
               <a:xfrm>
-                <a:off x="45811" y="978513"/>
-                <a:ext cx="6187097" cy="2739291"/>
+                <a:off x="145742" y="1208258"/>
+                <a:ext cx="6187097" cy="2450487"/>
               </a:xfrm>
               <a:prstGeom prst="rect">
                 <a:avLst/>
@@ -17085,7 +16626,7 @@
                   </a:spcAft>
                   <a:buNone/>
                 </a:pPr>
-                <a:endParaRPr lang="en-US" sz="2000" b="0" i="0" u="none" strike="noStrike" cap="none" dirty="0">
+                <a:endParaRPr lang="en-US" sz="1200" b="0" i="0" u="none" strike="noStrike" cap="none" dirty="0">
                   <a:solidFill>
                     <a:schemeClr val="dk1"/>
                   </a:solidFill>
@@ -17412,7 +16953,7 @@
                   </a:spcAft>
                   <a:buNone/>
                 </a:pPr>
-                <a:endParaRPr lang="en-US" sz="2000" dirty="0">
+                <a:endParaRPr lang="en-US" sz="1200" dirty="0">
                   <a:solidFill>
                     <a:schemeClr val="dk1"/>
                   </a:solidFill>
@@ -17467,8 +17008,8 @@
             </p:nvSpPr>
             <p:spPr>
               <a:xfrm>
-                <a:off x="45811" y="978513"/>
-                <a:ext cx="6187097" cy="2739291"/>
+                <a:off x="145742" y="1208258"/>
+                <a:ext cx="6187097" cy="2450487"/>
               </a:xfrm>
               <a:prstGeom prst="rect">
                 <a:avLst/>
@@ -17476,7 +17017,7 @@
               <a:blipFill>
                 <a:blip r:embed="rId3"/>
                 <a:stretch>
-                  <a:fillRect l="-2051" t="-1743"/>
+                  <a:fillRect l="-2028" t="-2010" b="-1005"/>
                 </a:stretch>
               </a:blipFill>
               <a:ln w="63500" cap="flat" cmpd="sng">
@@ -17512,8 +17053,8 @@
         </p:nvSpPr>
         <p:spPr>
           <a:xfrm>
-            <a:off x="6532782" y="3589349"/>
-            <a:ext cx="5637488" cy="3278206"/>
+            <a:off x="4800731" y="4169514"/>
+            <a:ext cx="4378046" cy="2482057"/>
           </a:xfrm>
           <a:prstGeom prst="rect">
             <a:avLst/>
@@ -17539,30 +17080,7 @@
               <a:buNone/>
             </a:pPr>
             <a:r>
-              <a:rPr lang="en-US" sz="1800" b="0" i="0" u="none" strike="noStrike" cap="none" dirty="0">
-                <a:solidFill>
-                  <a:schemeClr val="dk1"/>
-                </a:solidFill>
-                <a:latin typeface="Calibri"/>
-                <a:ea typeface="Calibri"/>
-                <a:cs typeface="Calibri"/>
-                <a:sym typeface="Calibri"/>
-              </a:rPr>
-              <a:t>Intuitive explanation of Bayesian rule (on the left). </a:t>
-            </a:r>
-          </a:p>
-          <a:p>
-            <a:pPr marL="0" marR="0" lvl="0" indent="0" algn="l" rtl="0">
-              <a:spcBef>
-                <a:spcPts val="0"/>
-              </a:spcBef>
-              <a:spcAft>
-                <a:spcPts val="0"/>
-              </a:spcAft>
-              <a:buNone/>
-            </a:pPr>
-            <a:r>
-              <a:rPr lang="en-US" sz="1800" dirty="0">
+              <a:rPr lang="en-US" dirty="0">
                 <a:solidFill>
                   <a:schemeClr val="dk1"/>
                 </a:solidFill>
@@ -17585,7 +17103,7 @@
               <a:buNone/>
             </a:pPr>
             <a:r>
-              <a:rPr lang="en-US" sz="1800" dirty="0">
+              <a:rPr lang="en-US" dirty="0">
                 <a:solidFill>
                   <a:schemeClr val="dk1"/>
                 </a:solidFill>
@@ -17608,7 +17126,7 @@
               <a:buNone/>
             </a:pPr>
             <a:r>
-              <a:rPr lang="en-US" sz="1800" dirty="0">
+              <a:rPr lang="en-US" dirty="0">
                 <a:solidFill>
                   <a:schemeClr val="dk1"/>
                 </a:solidFill>
@@ -17630,76 +17148,7 @@
               </a:spcAft>
               <a:buNone/>
             </a:pPr>
-            <a:r>
-              <a:rPr lang="en-US" sz="1800" dirty="0">
-                <a:solidFill>
-                  <a:schemeClr val="dk1"/>
-                </a:solidFill>
-                <a:latin typeface="Calibri"/>
-                <a:ea typeface="Calibri"/>
-                <a:cs typeface="Calibri"/>
-                <a:sym typeface="Calibri"/>
-              </a:rPr>
-              <a:t>P(A &amp; B) = 4% = probability of rich &amp; happy (Green)</a:t>
-            </a:r>
-          </a:p>
-          <a:p>
-            <a:pPr marL="0" marR="0" lvl="0" indent="0" algn="l" rtl="0">
-              <a:spcBef>
-                <a:spcPts val="0"/>
-              </a:spcBef>
-              <a:spcAft>
-                <a:spcPts val="0"/>
-              </a:spcAft>
-              <a:buNone/>
-            </a:pPr>
-            <a:r>
-              <a:rPr lang="en-US" sz="1800" dirty="0">
-                <a:solidFill>
-                  <a:schemeClr val="dk1"/>
-                </a:solidFill>
-                <a:latin typeface="Calibri"/>
-                <a:ea typeface="Calibri"/>
-                <a:cs typeface="Calibri"/>
-                <a:sym typeface="Calibri"/>
-              </a:rPr>
-              <a:t>P(B|A) = 10% = probability of being rich given that Happy</a:t>
-            </a:r>
-          </a:p>
-          <a:p>
-            <a:pPr marL="0" marR="0" lvl="0" indent="0" algn="l" rtl="0">
-              <a:spcBef>
-                <a:spcPts val="0"/>
-              </a:spcBef>
-              <a:spcAft>
-                <a:spcPts val="0"/>
-              </a:spcAft>
-              <a:buNone/>
-            </a:pPr>
-            <a:r>
-              <a:rPr lang="en-US" sz="1800" dirty="0">
-                <a:solidFill>
-                  <a:schemeClr val="dk1"/>
-                </a:solidFill>
-                <a:latin typeface="Calibri"/>
-                <a:ea typeface="Calibri"/>
-                <a:cs typeface="Calibri"/>
-                <a:sym typeface="Calibri"/>
-              </a:rPr>
-              <a:t>P(A|B) = 80% = probability of being happy given that rich</a:t>
-            </a:r>
-          </a:p>
-          <a:p>
-            <a:pPr marL="0" marR="0" lvl="0" indent="0" algn="l" rtl="0">
-              <a:spcBef>
-                <a:spcPts val="0"/>
-              </a:spcBef>
-              <a:spcAft>
-                <a:spcPts val="0"/>
-              </a:spcAft>
-              <a:buNone/>
-            </a:pPr>
-            <a:endParaRPr lang="en-US" sz="1800" dirty="0">
+            <a:endParaRPr lang="en-US" dirty="0">
               <a:solidFill>
                 <a:schemeClr val="dk1"/>
               </a:solidFill>
@@ -17710,6 +17159,36 @@
             </a:endParaRPr>
           </a:p>
           <a:p>
+            <a:pPr lvl="0"/>
+            <a:r>
+              <a:rPr lang="en-US" dirty="0">
+                <a:solidFill>
+                  <a:schemeClr val="dk1"/>
+                </a:solidFill>
+                <a:latin typeface="Calibri"/>
+                <a:ea typeface="Calibri"/>
+                <a:cs typeface="Calibri"/>
+                <a:sym typeface="Calibri"/>
+              </a:rPr>
+              <a:t>P(B|A) = 10% = probability of being rich given that Happy</a:t>
+            </a:r>
+          </a:p>
+          <a:p>
+            <a:pPr lvl="0"/>
+            <a:r>
+              <a:rPr lang="en-US" dirty="0">
+                <a:solidFill>
+                  <a:schemeClr val="dk1"/>
+                </a:solidFill>
+                <a:latin typeface="Calibri"/>
+                <a:ea typeface="Calibri"/>
+                <a:cs typeface="Calibri"/>
+                <a:sym typeface="Calibri"/>
+              </a:rPr>
+              <a:t>P(A|B) = 80% = probability of being happy given that rich</a:t>
+            </a:r>
+          </a:p>
+          <a:p>
             <a:pPr marL="0" marR="0" lvl="0" indent="0" algn="l" rtl="0">
               <a:spcBef>
                 <a:spcPts val="0"/>
@@ -17719,42 +17198,7 @@
               </a:spcAft>
               <a:buNone/>
             </a:pPr>
-            <a:r>
-              <a:rPr lang="en-US" sz="1800" dirty="0">
-                <a:solidFill>
-                  <a:schemeClr val="dk1"/>
-                </a:solidFill>
-                <a:latin typeface="Calibri"/>
-                <a:ea typeface="Calibri"/>
-                <a:cs typeface="Calibri"/>
-                <a:sym typeface="Calibri"/>
-              </a:rPr>
-              <a:t>You can calculate green intersection using two methods:</a:t>
-            </a:r>
-          </a:p>
-          <a:p>
-            <a:pPr marL="0" marR="0" lvl="0" indent="0" algn="l" rtl="0">
-              <a:spcBef>
-                <a:spcPts val="0"/>
-              </a:spcBef>
-              <a:spcAft>
-                <a:spcPts val="0"/>
-              </a:spcAft>
-              <a:buNone/>
-            </a:pPr>
-            <a:r>
-              <a:rPr lang="en-US" sz="1800" dirty="0">
-                <a:solidFill>
-                  <a:schemeClr val="dk1"/>
-                </a:solidFill>
-                <a:latin typeface="Calibri"/>
-                <a:ea typeface="Calibri"/>
-                <a:cs typeface="Calibri"/>
-                <a:sym typeface="Calibri"/>
-              </a:rPr>
-              <a:t>P(A|B)*P(B) = 80%*5% = 4%</a:t>
-            </a:r>
-            <a:endParaRPr sz="1800" dirty="0">
+            <a:endParaRPr lang="en-US" dirty="0">
               <a:solidFill>
                 <a:schemeClr val="dk1"/>
               </a:solidFill>
@@ -17775,7 +17219,76 @@
               <a:buNone/>
             </a:pPr>
             <a:r>
-              <a:rPr lang="en-US" sz="1800" dirty="0">
+              <a:rPr lang="en-US" dirty="0">
+                <a:solidFill>
+                  <a:schemeClr val="dk1"/>
+                </a:solidFill>
+                <a:latin typeface="Calibri"/>
+                <a:ea typeface="Calibri"/>
+                <a:cs typeface="Calibri"/>
+                <a:sym typeface="Calibri"/>
+              </a:rPr>
+              <a:t>Intersection:</a:t>
+            </a:r>
+          </a:p>
+          <a:p>
+            <a:r>
+              <a:rPr lang="en-US" dirty="0">
+                <a:solidFill>
+                  <a:schemeClr val="dk1"/>
+                </a:solidFill>
+                <a:latin typeface="Calibri"/>
+                <a:ea typeface="Calibri"/>
+                <a:cs typeface="Calibri"/>
+                <a:sym typeface="Calibri"/>
+              </a:rPr>
+              <a:t>P(A &amp; B) = 4% = probability of rich &amp; happy (Green)</a:t>
+            </a:r>
+          </a:p>
+          <a:p>
+            <a:pPr marL="0" marR="0" lvl="0" indent="0" algn="l" rtl="0">
+              <a:spcBef>
+                <a:spcPts val="0"/>
+              </a:spcBef>
+              <a:spcAft>
+                <a:spcPts val="0"/>
+              </a:spcAft>
+              <a:buNone/>
+            </a:pPr>
+            <a:r>
+              <a:rPr lang="en-US" dirty="0">
+                <a:solidFill>
+                  <a:schemeClr val="dk1"/>
+                </a:solidFill>
+                <a:latin typeface="Calibri"/>
+                <a:ea typeface="Calibri"/>
+                <a:cs typeface="Calibri"/>
+                <a:sym typeface="Calibri"/>
+              </a:rPr>
+              <a:t>P(A|B)*P(B) = 80%*5% = 4%</a:t>
+            </a:r>
+            <a:endParaRPr dirty="0">
+              <a:solidFill>
+                <a:schemeClr val="dk1"/>
+              </a:solidFill>
+              <a:latin typeface="Calibri"/>
+              <a:ea typeface="Calibri"/>
+              <a:cs typeface="Calibri"/>
+              <a:sym typeface="Calibri"/>
+            </a:endParaRPr>
+          </a:p>
+          <a:p>
+            <a:pPr marL="0" marR="0" lvl="0" indent="0" algn="l" rtl="0">
+              <a:spcBef>
+                <a:spcPts val="0"/>
+              </a:spcBef>
+              <a:spcAft>
+                <a:spcPts val="0"/>
+              </a:spcAft>
+              <a:buNone/>
+            </a:pPr>
+            <a:r>
+              <a:rPr lang="en-US" dirty="0">
                 <a:solidFill>
                   <a:schemeClr val="dk1"/>
                 </a:solidFill>
@@ -17883,7 +17396,7 @@
         </p:nvSpPr>
         <p:spPr>
           <a:xfrm>
-            <a:off x="10587787" y="2213811"/>
+            <a:off x="10130582" y="2213811"/>
             <a:ext cx="1588170" cy="646331"/>
           </a:xfrm>
           <a:prstGeom prst="rect">
@@ -17910,7 +17423,7 @@
               <a:buNone/>
             </a:pPr>
             <a:r>
-              <a:rPr lang="en-US" sz="1800">
+              <a:rPr lang="en-US" sz="1800" dirty="0">
                 <a:solidFill>
                   <a:schemeClr val="dk1"/>
                 </a:solidFill>
@@ -17922,7 +17435,7 @@
               <a:t>Thomas Bayes </a:t>
             </a:r>
             <a:br>
-              <a:rPr lang="en-US" sz="1800">
+              <a:rPr lang="en-US" sz="1800" dirty="0">
                 <a:solidFill>
                   <a:schemeClr val="dk1"/>
                 </a:solidFill>
@@ -17933,7 +17446,7 @@
               </a:rPr>
             </a:br>
             <a:r>
-              <a:rPr lang="en-US" sz="1800">
+              <a:rPr lang="en-US" sz="1800" dirty="0">
                 <a:solidFill>
                   <a:schemeClr val="dk1"/>
                 </a:solidFill>
@@ -17944,7 +17457,7 @@
               </a:rPr>
               <a:t>(1701–1761)</a:t>
             </a:r>
-            <a:endParaRPr sz="1800">
+            <a:endParaRPr sz="1800" dirty="0">
               <a:solidFill>
                 <a:schemeClr val="dk1"/>
               </a:solidFill>
@@ -17976,7 +17489,7 @@
         </p:blipFill>
         <p:spPr>
           <a:xfrm>
-            <a:off x="10351783" y="0"/>
+            <a:off x="10005418" y="0"/>
             <a:ext cx="1818487" cy="2213811"/>
           </a:xfrm>
           <a:prstGeom prst="rect">
@@ -17996,7 +17509,7 @@
         </p:nvSpPr>
         <p:spPr>
           <a:xfrm>
-            <a:off x="523454" y="4272171"/>
+            <a:off x="124872" y="4295617"/>
             <a:ext cx="4588042" cy="2229852"/>
           </a:xfrm>
           <a:prstGeom prst="rect">
@@ -18050,7 +17563,7 @@
         </p:nvSpPr>
         <p:spPr>
           <a:xfrm>
-            <a:off x="1166937" y="4576971"/>
+            <a:off x="768355" y="4600417"/>
             <a:ext cx="3224463" cy="1764631"/>
           </a:xfrm>
           <a:prstGeom prst="ellipse">
@@ -18104,7 +17617,7 @@
         </p:nvSpPr>
         <p:spPr>
           <a:xfrm>
-            <a:off x="3342855" y="5008818"/>
+            <a:off x="2944273" y="5032264"/>
             <a:ext cx="1397874" cy="900935"/>
           </a:xfrm>
           <a:prstGeom prst="ellipse">
@@ -18160,7 +17673,7 @@
         </p:nvSpPr>
         <p:spPr>
           <a:xfrm>
-            <a:off x="2068401" y="5008818"/>
+            <a:off x="1669819" y="5032264"/>
             <a:ext cx="1274454" cy="900935"/>
           </a:xfrm>
           <a:prstGeom prst="rect">
@@ -18187,7 +17700,7 @@
               <a:buNone/>
             </a:pPr>
             <a:r>
-              <a:rPr lang="en-US" sz="2400" b="1" dirty="0">
+              <a:rPr lang="en-US" sz="2000" b="1" dirty="0">
                 <a:solidFill>
                   <a:srgbClr val="FF0000"/>
                 </a:solidFill>
@@ -18210,7 +17723,7 @@
               <a:buNone/>
             </a:pPr>
             <a:r>
-              <a:rPr lang="en-US" sz="2400" b="1" dirty="0">
+              <a:rPr lang="en-US" sz="2000" b="1" dirty="0">
                 <a:solidFill>
                   <a:srgbClr val="FF0000"/>
                 </a:solidFill>
@@ -18221,7 +17734,7 @@
               </a:rPr>
               <a:t>Happy</a:t>
             </a:r>
-            <a:endParaRPr sz="2400" b="1" dirty="0">
+            <a:endParaRPr sz="2000" b="1" dirty="0">
               <a:solidFill>
                 <a:srgbClr val="FF0000"/>
               </a:solidFill>
@@ -18241,8 +17754,8 @@
         </p:nvSpPr>
         <p:spPr>
           <a:xfrm>
-            <a:off x="3903802" y="5014208"/>
-            <a:ext cx="1083013" cy="745778"/>
+            <a:off x="3989078" y="5200812"/>
+            <a:ext cx="727576" cy="753546"/>
           </a:xfrm>
           <a:prstGeom prst="rect">
             <a:avLst/>
@@ -18268,7 +17781,7 @@
               <a:buNone/>
             </a:pPr>
             <a:r>
-              <a:rPr lang="en-US" sz="2400" b="1" dirty="0">
+              <a:rPr lang="en-US" sz="2000" b="1" dirty="0">
                 <a:solidFill>
                   <a:srgbClr val="FF0000"/>
                 </a:solidFill>
@@ -18291,7 +17804,7 @@
               <a:buNone/>
             </a:pPr>
             <a:r>
-              <a:rPr lang="en-US" sz="2400" b="1" dirty="0">
+              <a:rPr lang="en-US" sz="2000" b="1" dirty="0">
                 <a:solidFill>
                   <a:srgbClr val="FF0000"/>
                 </a:solidFill>
@@ -18302,7 +17815,7 @@
               </a:rPr>
               <a:t>Rich</a:t>
             </a:r>
-            <a:endParaRPr sz="2400" b="1" dirty="0">
+            <a:endParaRPr sz="2000" b="1" dirty="0">
               <a:solidFill>
                 <a:srgbClr val="FF0000"/>
               </a:solidFill>
@@ -18322,7 +17835,7 @@
         </p:nvSpPr>
         <p:spPr>
           <a:xfrm>
-            <a:off x="3693291" y="4254614"/>
+            <a:off x="3294709" y="4278060"/>
             <a:ext cx="1530878" cy="461665"/>
           </a:xfrm>
           <a:prstGeom prst="rect">
@@ -18349,7 +17862,7 @@
               <a:buNone/>
             </a:pPr>
             <a:r>
-              <a:rPr lang="en-US" sz="2400" b="1" dirty="0">
+              <a:rPr lang="en-US" sz="2000" b="1" dirty="0">
                 <a:solidFill>
                   <a:srgbClr val="FF0000"/>
                 </a:solidFill>
@@ -18360,7 +17873,7 @@
               </a:rPr>
               <a:t>All People</a:t>
             </a:r>
-            <a:endParaRPr sz="2400" b="1" dirty="0">
+            <a:endParaRPr sz="2000" b="1" dirty="0">
               <a:solidFill>
                 <a:srgbClr val="FF0000"/>
               </a:solidFill>
@@ -18393,7 +17906,7 @@
         </p:blipFill>
         <p:spPr>
           <a:xfrm>
-            <a:off x="6903091" y="1553411"/>
+            <a:off x="6649954" y="1838425"/>
             <a:ext cx="2946400" cy="660400"/>
           </a:xfrm>
           <a:prstGeom prst="rect">
@@ -18411,10 +17924,293 @@
           </a:ln>
         </p:spPr>
       </p:pic>
+      <p:sp>
+        <p:nvSpPr>
+          <p:cNvPr id="4" name="TextBox 3">
+            <a:extLst>
+              <a:ext uri="{FF2B5EF4-FFF2-40B4-BE49-F238E27FC236}">
+                <a16:creationId xmlns:a16="http://schemas.microsoft.com/office/drawing/2014/main" id="{23D95E1F-CDDC-4A4B-82A6-9F51C79D9ADF}"/>
+              </a:ext>
+            </a:extLst>
+          </p:cNvPr>
+          <p:cNvSpPr txBox="1"/>
+          <p:nvPr/>
+        </p:nvSpPr>
+        <p:spPr>
+          <a:xfrm>
+            <a:off x="9397063" y="4569363"/>
+            <a:ext cx="2670065" cy="1384995"/>
+          </a:xfrm>
+          <a:prstGeom prst="rect">
+            <a:avLst/>
+          </a:prstGeom>
+          <a:noFill/>
+        </p:spPr>
+        <p:txBody>
+          <a:bodyPr wrap="square" rtlCol="0">
+            <a:spAutoFit/>
+          </a:bodyPr>
+          <a:lstStyle/>
+          <a:p>
+            <a:r>
+              <a:rPr lang="en-US" b="1" dirty="0">
+                <a:solidFill>
+                  <a:srgbClr val="00B050"/>
+                </a:solidFill>
+                <a:latin typeface="Menlo" panose="020B0609030804020204" pitchFamily="49" charset="0"/>
+                <a:ea typeface="Menlo" panose="020B0609030804020204" pitchFamily="49" charset="0"/>
+                <a:cs typeface="Menlo" panose="020B0609030804020204" pitchFamily="49" charset="0"/>
+              </a:rPr>
+              <a:t>+-----+--------+------+</a:t>
+            </a:r>
+          </a:p>
+          <a:p>
+            <a:r>
+              <a:rPr lang="en-US" b="1" dirty="0">
+                <a:solidFill>
+                  <a:srgbClr val="00B050"/>
+                </a:solidFill>
+                <a:latin typeface="Menlo" panose="020B0609030804020204" pitchFamily="49" charset="0"/>
+                <a:ea typeface="Menlo" panose="020B0609030804020204" pitchFamily="49" charset="0"/>
+                <a:cs typeface="Menlo" panose="020B0609030804020204" pitchFamily="49" charset="0"/>
+              </a:rPr>
+              <a:t>|     | Happy  |      |</a:t>
+            </a:r>
+          </a:p>
+          <a:p>
+            <a:r>
+              <a:rPr lang="en-US" b="1" dirty="0">
+                <a:solidFill>
+                  <a:srgbClr val="00B050"/>
+                </a:solidFill>
+                <a:latin typeface="Menlo" panose="020B0609030804020204" pitchFamily="49" charset="0"/>
+                <a:ea typeface="Menlo" panose="020B0609030804020204" pitchFamily="49" charset="0"/>
+                <a:cs typeface="Menlo" panose="020B0609030804020204" pitchFamily="49" charset="0"/>
+              </a:rPr>
+              <a:t>+-----+--------+------+</a:t>
+            </a:r>
+          </a:p>
+          <a:p>
+            <a:r>
+              <a:rPr lang="en-US" b="1" dirty="0">
+                <a:solidFill>
+                  <a:srgbClr val="00B050"/>
+                </a:solidFill>
+                <a:latin typeface="Menlo" panose="020B0609030804020204" pitchFamily="49" charset="0"/>
+                <a:ea typeface="Menlo" panose="020B0609030804020204" pitchFamily="49" charset="0"/>
+                <a:cs typeface="Menlo" panose="020B0609030804020204" pitchFamily="49" charset="0"/>
+              </a:rPr>
+              <a:t>|Rich |   4    |   1  |</a:t>
+            </a:r>
+          </a:p>
+          <a:p>
+            <a:r>
+              <a:rPr lang="en-US" b="1" dirty="0">
+                <a:solidFill>
+                  <a:srgbClr val="00B050"/>
+                </a:solidFill>
+                <a:latin typeface="Menlo" panose="020B0609030804020204" pitchFamily="49" charset="0"/>
+                <a:ea typeface="Menlo" panose="020B0609030804020204" pitchFamily="49" charset="0"/>
+                <a:cs typeface="Menlo" panose="020B0609030804020204" pitchFamily="49" charset="0"/>
+              </a:rPr>
+              <a:t>|     |  36    |  59  |</a:t>
+            </a:r>
+          </a:p>
+          <a:p>
+            <a:r>
+              <a:rPr lang="en-US" b="1" dirty="0">
+                <a:solidFill>
+                  <a:srgbClr val="00B050"/>
+                </a:solidFill>
+                <a:latin typeface="Menlo" panose="020B0609030804020204" pitchFamily="49" charset="0"/>
+                <a:ea typeface="Menlo" panose="020B0609030804020204" pitchFamily="49" charset="0"/>
+                <a:cs typeface="Menlo" panose="020B0609030804020204" pitchFamily="49" charset="0"/>
+              </a:rPr>
+              <a:t>+-----+--------+------+</a:t>
+            </a:r>
+          </a:p>
+        </p:txBody>
+      </p:sp>
+      <p:sp>
+        <p:nvSpPr>
+          <p:cNvPr id="2" name="TextBox 1">
+            <a:extLst>
+              <a:ext uri="{FF2B5EF4-FFF2-40B4-BE49-F238E27FC236}">
+                <a16:creationId xmlns:a16="http://schemas.microsoft.com/office/drawing/2014/main" id="{08D25109-BDA7-D542-BBD3-673AD585F84A}"/>
+              </a:ext>
+            </a:extLst>
+          </p:cNvPr>
+          <p:cNvSpPr txBox="1"/>
+          <p:nvPr/>
+        </p:nvSpPr>
+        <p:spPr>
+          <a:xfrm>
+            <a:off x="9849491" y="2860142"/>
+            <a:ext cx="2217637" cy="1384995"/>
+          </a:xfrm>
+          <a:prstGeom prst="rect">
+            <a:avLst/>
+          </a:prstGeom>
+          <a:noFill/>
+        </p:spPr>
+        <p:txBody>
+          <a:bodyPr wrap="square" rtlCol="0">
+            <a:spAutoFit/>
+          </a:bodyPr>
+          <a:lstStyle/>
+          <a:p>
+            <a:pPr algn="ctr"/>
+            <a:r>
+              <a:rPr lang="en-US" dirty="0"/>
+              <a:t>Bayes "solution" to a problem of inverse probability, was presented by Richard Price in 1763, two years after Bayes' death.</a:t>
+            </a:r>
+          </a:p>
+        </p:txBody>
+      </p:sp>
+      <p:sp>
+        <p:nvSpPr>
+          <p:cNvPr id="3" name="TextBox 2">
+            <a:extLst>
+              <a:ext uri="{FF2B5EF4-FFF2-40B4-BE49-F238E27FC236}">
+                <a16:creationId xmlns:a16="http://schemas.microsoft.com/office/drawing/2014/main" id="{680BD279-5025-984E-9F93-DDE8AEBFA92D}"/>
+              </a:ext>
+            </a:extLst>
+          </p:cNvPr>
+          <p:cNvSpPr txBox="1"/>
+          <p:nvPr/>
+        </p:nvSpPr>
+        <p:spPr>
+          <a:xfrm>
+            <a:off x="8719972" y="1445339"/>
+            <a:ext cx="890203" cy="307777"/>
+          </a:xfrm>
+          <a:prstGeom prst="rect">
+            <a:avLst/>
+          </a:prstGeom>
+          <a:noFill/>
+        </p:spPr>
+        <p:txBody>
+          <a:bodyPr wrap="square" rtlCol="0">
+            <a:spAutoFit/>
+          </a:bodyPr>
+          <a:lstStyle/>
+          <a:p>
+            <a:r>
+              <a:rPr lang="en-US" dirty="0"/>
+              <a:t>P(B|A)</a:t>
+            </a:r>
+          </a:p>
+        </p:txBody>
+      </p:sp>
+      <p:sp>
+        <p:nvSpPr>
+          <p:cNvPr id="18" name="TextBox 17">
+            <a:extLst>
+              <a:ext uri="{FF2B5EF4-FFF2-40B4-BE49-F238E27FC236}">
+                <a16:creationId xmlns:a16="http://schemas.microsoft.com/office/drawing/2014/main" id="{14E09531-C697-B042-B4BC-38DCCD68B758}"/>
+              </a:ext>
+            </a:extLst>
+          </p:cNvPr>
+          <p:cNvSpPr txBox="1"/>
+          <p:nvPr/>
+        </p:nvSpPr>
+        <p:spPr>
+          <a:xfrm>
+            <a:off x="7824512" y="1445339"/>
+            <a:ext cx="619677" cy="307777"/>
+          </a:xfrm>
+          <a:prstGeom prst="rect">
+            <a:avLst/>
+          </a:prstGeom>
+          <a:noFill/>
+        </p:spPr>
+        <p:txBody>
+          <a:bodyPr wrap="square" rtlCol="0">
+            <a:spAutoFit/>
+          </a:bodyPr>
+          <a:lstStyle/>
+          <a:p>
+            <a:r>
+              <a:rPr lang="en-US" dirty="0"/>
+              <a:t>P(A)</a:t>
+            </a:r>
+          </a:p>
+        </p:txBody>
+      </p:sp>
+      <p:sp>
+        <p:nvSpPr>
+          <p:cNvPr id="19" name="TextBox 18">
+            <a:extLst>
+              <a:ext uri="{FF2B5EF4-FFF2-40B4-BE49-F238E27FC236}">
+                <a16:creationId xmlns:a16="http://schemas.microsoft.com/office/drawing/2014/main" id="{F099BFE0-214E-2B4F-A1E1-A8D2AC7F6355}"/>
+              </a:ext>
+            </a:extLst>
+          </p:cNvPr>
+          <p:cNvSpPr txBox="1"/>
+          <p:nvPr/>
+        </p:nvSpPr>
+        <p:spPr>
+          <a:xfrm>
+            <a:off x="8413828" y="2542789"/>
+            <a:ext cx="677606" cy="307777"/>
+          </a:xfrm>
+          <a:prstGeom prst="rect">
+            <a:avLst/>
+          </a:prstGeom>
+          <a:noFill/>
+        </p:spPr>
+        <p:txBody>
+          <a:bodyPr wrap="square" rtlCol="0">
+            <a:spAutoFit/>
+          </a:bodyPr>
+          <a:lstStyle/>
+          <a:p>
+            <a:r>
+              <a:rPr lang="en-US" dirty="0"/>
+              <a:t>P(B)</a:t>
+            </a:r>
+          </a:p>
+        </p:txBody>
+      </p:sp>
+      <p:sp>
+        <p:nvSpPr>
+          <p:cNvPr id="20" name="TextBox 19">
+            <a:extLst>
+              <a:ext uri="{FF2B5EF4-FFF2-40B4-BE49-F238E27FC236}">
+                <a16:creationId xmlns:a16="http://schemas.microsoft.com/office/drawing/2014/main" id="{4D658A17-55A2-5249-ABB2-34BE8376768C}"/>
+              </a:ext>
+            </a:extLst>
+          </p:cNvPr>
+          <p:cNvSpPr txBox="1"/>
+          <p:nvPr/>
+        </p:nvSpPr>
+        <p:spPr>
+          <a:xfrm>
+            <a:off x="6673273" y="1445339"/>
+            <a:ext cx="890204" cy="307777"/>
+          </a:xfrm>
+          <a:prstGeom prst="rect">
+            <a:avLst/>
+          </a:prstGeom>
+          <a:noFill/>
+        </p:spPr>
+        <p:txBody>
+          <a:bodyPr wrap="square" rtlCol="0">
+            <a:spAutoFit/>
+          </a:bodyPr>
+          <a:lstStyle/>
+          <a:p>
+            <a:r>
+              <a:rPr lang="en-US" dirty="0"/>
+              <a:t>P(A|B)</a:t>
+            </a:r>
+          </a:p>
+        </p:txBody>
+      </p:sp>
     </p:spTree>
     <p:extLst>
       <p:ext uri="{BB962C8B-B14F-4D97-AF65-F5344CB8AC3E}">
-        <p14:creationId xmlns:p14="http://schemas.microsoft.com/office/powerpoint/2010/main" val="4149736850"/>
+        <p14:creationId xmlns:p14="http://schemas.microsoft.com/office/powerpoint/2010/main" val="53163649"/>
       </p:ext>
     </p:extLst>
   </p:cSld>
@@ -18446,7 +18242,7 @@
           <p:cNvPr id="4" name="TextBox 3">
             <a:extLst>
               <a:ext uri="{FF2B5EF4-FFF2-40B4-BE49-F238E27FC236}">
-                <a16:creationId xmlns:a16="http://schemas.microsoft.com/office/drawing/2014/main" id="{BA133424-AF22-CA4F-9D1C-1219C4769656}"/>
+                <a16:creationId xmlns:a16="http://schemas.microsoft.com/office/drawing/2014/main" id="{93FB964B-A29C-1649-A2C4-81BC78C24A50}"/>
               </a:ext>
             </a:extLst>
           </p:cNvPr>
@@ -18455,8 +18251,8 @@
         </p:nvSpPr>
         <p:spPr>
           <a:xfrm>
-            <a:off x="6486525" y="4241445"/>
-            <a:ext cx="5705475" cy="2462213"/>
+            <a:off x="0" y="58846"/>
+            <a:ext cx="5579165" cy="6740307"/>
           </a:xfrm>
           <a:prstGeom prst="rect">
             <a:avLst/>
@@ -18470,1084 +18266,14 @@
           <a:lstStyle/>
           <a:p>
             <a:r>
-              <a:rPr lang="en-US" dirty="0"/>
-              <a:t>For proposition A and evidence B,</a:t>
-            </a:r>
-          </a:p>
-          <a:p>
-            <a:r>
-              <a:rPr lang="en-US" dirty="0"/>
-              <a:t>    P(A), the prior, is the initial degree of belief in A.</a:t>
-            </a:r>
-          </a:p>
-          <a:p>
-            <a:r>
-              <a:rPr lang="en-US" dirty="0"/>
-              <a:t>    P(A|B), the posterior, is the degree of belief having accounted for B.</a:t>
-            </a:r>
-          </a:p>
-          <a:p>
-            <a:r>
-              <a:rPr lang="en-US" dirty="0"/>
-              <a:t>    P(B|A)/P(B) – represents the support B provides for A.</a:t>
-            </a:r>
-          </a:p>
-          <a:p>
-            <a:endParaRPr lang="en-US" dirty="0"/>
-          </a:p>
-          <a:p>
-            <a:r>
-              <a:rPr lang="en-US" dirty="0"/>
-              <a:t>See also Bayesian inference.</a:t>
-            </a:r>
-          </a:p>
-          <a:p>
-            <a:r>
-              <a:rPr lang="en-US" dirty="0"/>
-              <a:t>    – https://</a:t>
-            </a:r>
-            <a:r>
-              <a:rPr lang="en-US" dirty="0" err="1"/>
-              <a:t>en.wikipedia.org</a:t>
-            </a:r>
-            <a:r>
-              <a:rPr lang="en-US" dirty="0"/>
-              <a:t>/wiki/</a:t>
-            </a:r>
-            <a:r>
-              <a:rPr lang="en-US" dirty="0" err="1"/>
-              <a:t>Bayesian_inference</a:t>
-            </a:r>
-            <a:endParaRPr lang="en-US" dirty="0"/>
-          </a:p>
-          <a:p>
-            <a:endParaRPr lang="en-US" dirty="0"/>
-          </a:p>
-          <a:p>
-            <a:r>
-              <a:rPr lang="en-US" b="1" dirty="0">
-                <a:solidFill>
-                  <a:srgbClr val="FF0000"/>
-                </a:solidFill>
-              </a:rPr>
-              <a:t>Bayesian inference</a:t>
-            </a:r>
-            <a:r>
-              <a:rPr lang="en-US" dirty="0"/>
-              <a:t> is a method of statistical inference in which</a:t>
-            </a:r>
-          </a:p>
-          <a:p>
-            <a:r>
-              <a:rPr lang="en-US" dirty="0"/>
-              <a:t>Bayes’ theorem is used to update the probability for a hypothesis</a:t>
-            </a:r>
-          </a:p>
-          <a:p>
-            <a:r>
-              <a:rPr lang="en-US" dirty="0"/>
-              <a:t>as more evidence or information becomes available.</a:t>
-            </a:r>
-          </a:p>
-        </p:txBody>
-      </p:sp>
-      <p:sp>
-        <p:nvSpPr>
-          <p:cNvPr id="5" name="TextBox 4">
-            <a:extLst>
-              <a:ext uri="{FF2B5EF4-FFF2-40B4-BE49-F238E27FC236}">
-                <a16:creationId xmlns:a16="http://schemas.microsoft.com/office/drawing/2014/main" id="{DB6CFF65-663B-CB43-B815-53184C5B9CE5}"/>
-              </a:ext>
-            </a:extLst>
-          </p:cNvPr>
-          <p:cNvSpPr txBox="1"/>
-          <p:nvPr/>
-        </p:nvSpPr>
-        <p:spPr>
-          <a:xfrm>
-            <a:off x="84083" y="86343"/>
-            <a:ext cx="6011917" cy="6771084"/>
-          </a:xfrm>
-          <a:prstGeom prst="rect">
-            <a:avLst/>
-          </a:prstGeom>
-          <a:noFill/>
-        </p:spPr>
-        <p:txBody>
-          <a:bodyPr wrap="square" rtlCol="0">
-            <a:spAutoFit/>
-          </a:bodyPr>
-          <a:lstStyle/>
-          <a:p>
-            <a:r>
-              <a:rPr lang="en-US" dirty="0"/>
-              <a:t>Bayes’ Theorem (Law, Rule)</a:t>
-            </a:r>
-          </a:p>
-          <a:p>
-            <a:r>
-              <a:rPr lang="en-US" dirty="0"/>
-              <a:t>– </a:t>
-            </a:r>
-            <a:r>
-              <a:rPr lang="en-US" dirty="0">
-                <a:hlinkClick r:id="rId2"/>
-              </a:rPr>
-              <a:t>https://en.wikipedia.org/wiki/Thomas_Bayes</a:t>
-            </a:r>
-            <a:r>
-              <a:rPr lang="en-US" dirty="0"/>
-              <a:t> - </a:t>
-            </a:r>
-            <a:br>
-              <a:rPr lang="en-US" dirty="0"/>
-            </a:br>
-            <a:r>
-              <a:rPr lang="en-US" dirty="0"/>
-              <a:t>– </a:t>
-            </a:r>
-            <a:r>
-              <a:rPr lang="en-US" dirty="0">
-                <a:hlinkClick r:id="rId3"/>
-              </a:rPr>
-              <a:t>https://</a:t>
-            </a:r>
-            <a:r>
-              <a:rPr lang="en-US" dirty="0" err="1">
-                <a:hlinkClick r:id="rId3"/>
-              </a:rPr>
-              <a:t>en.wikipedia.org</a:t>
-            </a:r>
-            <a:r>
-              <a:rPr lang="en-US" dirty="0">
-                <a:hlinkClick r:id="rId3"/>
-              </a:rPr>
-              <a:t>/wiki/Bayes%27_theorem</a:t>
-            </a:r>
-            <a:r>
-              <a:rPr lang="en-US" dirty="0"/>
-              <a:t> –</a:t>
-            </a:r>
-          </a:p>
-          <a:p>
-            <a:r>
-              <a:rPr lang="en-US" dirty="0"/>
-              <a:t>– </a:t>
-            </a:r>
-            <a:r>
-              <a:rPr lang="en-US" dirty="0">
-                <a:hlinkClick r:id="rId4"/>
-              </a:rPr>
-              <a:t>https://</a:t>
-            </a:r>
-            <a:r>
-              <a:rPr lang="en-US" dirty="0" err="1">
-                <a:hlinkClick r:id="rId4"/>
-              </a:rPr>
-              <a:t>en.wikipedia.org</a:t>
-            </a:r>
-            <a:r>
-              <a:rPr lang="en-US" dirty="0">
-                <a:hlinkClick r:id="rId4"/>
-              </a:rPr>
-              <a:t>/wiki/</a:t>
-            </a:r>
-            <a:r>
-              <a:rPr lang="en-US" dirty="0" err="1">
-                <a:hlinkClick r:id="rId4"/>
-              </a:rPr>
-              <a:t>Bayesian_inference</a:t>
-            </a:r>
-            <a:r>
-              <a:rPr lang="en-US" dirty="0"/>
-              <a:t> –</a:t>
-            </a:r>
-          </a:p>
-          <a:p>
-            <a:endParaRPr lang="en-US" dirty="0"/>
-          </a:p>
-          <a:p>
-            <a:r>
-              <a:rPr lang="en-US" dirty="0"/>
-              <a:t>P(A|B) = P(B|A)*P(A)/P(B)</a:t>
-            </a:r>
-          </a:p>
-          <a:p>
-            <a:endParaRPr lang="en-US" dirty="0"/>
-          </a:p>
-          <a:p>
-            <a:r>
-              <a:rPr lang="en-US" dirty="0"/>
-              <a:t>where A and B are events and P(B) not equal 0.</a:t>
-            </a:r>
-          </a:p>
-          <a:p>
-            <a:endParaRPr lang="en-US" dirty="0"/>
-          </a:p>
-          <a:p>
-            <a:r>
-              <a:rPr lang="en-US" b="1" dirty="0">
-                <a:solidFill>
-                  <a:srgbClr val="FF0000"/>
-                </a:solidFill>
-              </a:rPr>
-              <a:t>Frequentist interpretation of Bayes’ theorem.</a:t>
-            </a:r>
-          </a:p>
-          <a:p>
-            <a:r>
-              <a:rPr lang="en-US" dirty="0"/>
-              <a:t>Probability measures a proportion of outcomes.</a:t>
-            </a:r>
-          </a:p>
-          <a:p>
-            <a:r>
-              <a:rPr lang="en-US" dirty="0"/>
-              <a:t>Suppose an experiment is performed many times.</a:t>
-            </a:r>
-          </a:p>
-          <a:p>
-            <a:endParaRPr lang="en-US" dirty="0"/>
-          </a:p>
-          <a:p>
-            <a:r>
-              <a:rPr lang="en-US" dirty="0"/>
-              <a:t>P(A) is the proportion of outcomes with property A,</a:t>
-            </a:r>
-          </a:p>
-          <a:p>
-            <a:r>
-              <a:rPr lang="en-US" dirty="0"/>
-              <a:t>and P(B) that with property B.</a:t>
-            </a:r>
-          </a:p>
-          <a:p>
-            <a:endParaRPr lang="en-US" dirty="0"/>
-          </a:p>
-          <a:p>
-            <a:r>
-              <a:rPr lang="en-US" dirty="0"/>
-              <a:t>P(B|A) is the proportion of outcomes with property B </a:t>
-            </a:r>
-          </a:p>
-          <a:p>
-            <a:r>
-              <a:rPr lang="en-US" dirty="0"/>
-              <a:t>out of outcomes with property A,</a:t>
-            </a:r>
-          </a:p>
-          <a:p>
-            <a:endParaRPr lang="en-US" dirty="0"/>
-          </a:p>
-          <a:p>
-            <a:r>
-              <a:rPr lang="en-US" dirty="0"/>
-              <a:t>and P(A|B) the proportion of those with A out of those with B.</a:t>
-            </a:r>
-          </a:p>
-          <a:p>
-            <a:endParaRPr lang="en-US" dirty="0"/>
-          </a:p>
-          <a:p>
-            <a:r>
-              <a:rPr lang="en-US" b="1" dirty="0">
-                <a:solidFill>
-                  <a:srgbClr val="FF0000"/>
-                </a:solidFill>
-              </a:rPr>
-              <a:t>Bayesian interpretation of Bayes’ theorem.</a:t>
-            </a:r>
-          </a:p>
-          <a:p>
-            <a:r>
-              <a:rPr lang="en-US" dirty="0"/>
-              <a:t>Probability measures a degree of belief.</a:t>
-            </a:r>
-          </a:p>
-          <a:p>
-            <a:r>
-              <a:rPr lang="en-US" dirty="0"/>
-              <a:t>Bayes’ theorem then links the degree of belief in a proposition before (A)</a:t>
-            </a:r>
-          </a:p>
-          <a:p>
-            <a:r>
-              <a:rPr lang="en-US" dirty="0"/>
-              <a:t>and after (B) accounting for evidence.</a:t>
-            </a:r>
-          </a:p>
-          <a:p>
-            <a:endParaRPr lang="en-US" dirty="0"/>
-          </a:p>
-          <a:p>
-            <a:r>
-              <a:rPr lang="en-US" dirty="0"/>
-              <a:t>For example, suppose it is believed with 50% certainty </a:t>
-            </a:r>
-          </a:p>
-          <a:p>
-            <a:r>
-              <a:rPr lang="en-US" dirty="0"/>
-              <a:t>that a coin is twice as likely to land heads than tails.</a:t>
-            </a:r>
-          </a:p>
-          <a:p>
-            <a:r>
-              <a:rPr lang="en-US" dirty="0"/>
-              <a:t>If the coin is flipped a number of times and the outcomes observed,</a:t>
-            </a:r>
-          </a:p>
-          <a:p>
-            <a:r>
-              <a:rPr lang="en-US" dirty="0"/>
-              <a:t>then that degree of belief may rise, fall or </a:t>
-            </a:r>
-          </a:p>
-          <a:p>
-            <a:r>
-              <a:rPr lang="en-US" dirty="0"/>
-              <a:t>remain the same depending on the results.</a:t>
-            </a:r>
-          </a:p>
-        </p:txBody>
-      </p:sp>
-      <p:pic>
-        <p:nvPicPr>
-          <p:cNvPr id="3" name="Picture 2">
-            <a:extLst>
-              <a:ext uri="{FF2B5EF4-FFF2-40B4-BE49-F238E27FC236}">
-                <a16:creationId xmlns:a16="http://schemas.microsoft.com/office/drawing/2014/main" id="{5C70D884-EC0B-1A48-94E2-CD2923F3622A}"/>
-              </a:ext>
-            </a:extLst>
-          </p:cNvPr>
-          <p:cNvPicPr>
-            <a:picLocks noChangeAspect="1"/>
-          </p:cNvPicPr>
-          <p:nvPr/>
-        </p:nvPicPr>
-        <p:blipFill>
-          <a:blip r:embed="rId5" cstate="email">
-            <a:extLst>
-              <a:ext uri="{28A0092B-C50C-407E-A947-70E740481C1C}">
-                <a14:useLocalDpi xmlns:a14="http://schemas.microsoft.com/office/drawing/2010/main"/>
-              </a:ext>
-            </a:extLst>
-          </a:blip>
-          <a:stretch>
-            <a:fillRect/>
-          </a:stretch>
-        </p:blipFill>
-        <p:spPr>
-          <a:xfrm>
-            <a:off x="8070850" y="177588"/>
-            <a:ext cx="3822700" cy="2044700"/>
-          </a:xfrm>
-          <a:prstGeom prst="rect">
-            <a:avLst/>
-          </a:prstGeom>
-        </p:spPr>
-      </p:pic>
-      <p:sp>
-        <p:nvSpPr>
-          <p:cNvPr id="6" name="TextBox 5">
-            <a:extLst>
-              <a:ext uri="{FF2B5EF4-FFF2-40B4-BE49-F238E27FC236}">
-                <a16:creationId xmlns:a16="http://schemas.microsoft.com/office/drawing/2014/main" id="{6CB6F775-63F0-274F-A53D-9922B5035949}"/>
-              </a:ext>
-            </a:extLst>
-          </p:cNvPr>
-          <p:cNvSpPr txBox="1"/>
-          <p:nvPr/>
-        </p:nvSpPr>
-        <p:spPr>
-          <a:xfrm>
-            <a:off x="8404392" y="2322095"/>
-            <a:ext cx="3489158" cy="307777"/>
-          </a:xfrm>
-          <a:prstGeom prst="rect">
-            <a:avLst/>
-          </a:prstGeom>
-          <a:noFill/>
-        </p:spPr>
-        <p:txBody>
-          <a:bodyPr wrap="square" rtlCol="0">
-            <a:spAutoFit/>
-          </a:bodyPr>
-          <a:lstStyle/>
-          <a:p>
-            <a:r>
-              <a:rPr lang="en-US" dirty="0" err="1"/>
-              <a:t>Thomas_Bayes</a:t>
-            </a:r>
-            <a:r>
-              <a:rPr lang="en-US" dirty="0"/>
-              <a:t> – (/’</a:t>
-            </a:r>
-            <a:r>
-              <a:rPr lang="en-US" dirty="0" err="1"/>
-              <a:t>be?z</a:t>
-            </a:r>
-            <a:r>
-              <a:rPr lang="en-US" dirty="0"/>
-              <a:t>/; 1701–1761)</a:t>
-            </a:r>
-          </a:p>
-        </p:txBody>
-      </p:sp>
-    </p:spTree>
-    <p:extLst>
-      <p:ext uri="{BB962C8B-B14F-4D97-AF65-F5344CB8AC3E}">
-        <p14:creationId xmlns:p14="http://schemas.microsoft.com/office/powerpoint/2010/main" val="822577207"/>
-      </p:ext>
-    </p:extLst>
-  </p:cSld>
-  <p:clrMapOvr>
-    <a:masterClrMapping/>
-  </p:clrMapOvr>
-</p:sld>
-</file>
-
-<file path=ppt/slides/slide7.xml><?xml version="1.0" encoding="utf-8"?>
-<p:sld xmlns:a="http://schemas.openxmlformats.org/drawingml/2006/main" xmlns:r="http://schemas.openxmlformats.org/officeDocument/2006/relationships" xmlns:p="http://schemas.openxmlformats.org/presentationml/2006/main">
-  <p:cSld>
-    <p:spTree>
-      <p:nvGrpSpPr>
-        <p:cNvPr id="1" name=""/>
-        <p:cNvGrpSpPr/>
-        <p:nvPr/>
-      </p:nvGrpSpPr>
-      <p:grpSpPr>
-        <a:xfrm>
-          <a:off x="0" y="0"/>
-          <a:ext cx="0" cy="0"/>
-          <a:chOff x="0" y="0"/>
-          <a:chExt cx="0" cy="0"/>
-        </a:xfrm>
-      </p:grpSpPr>
-      <p:sp>
-        <p:nvSpPr>
-          <p:cNvPr id="4" name="TextBox 3">
-            <a:extLst>
-              <a:ext uri="{FF2B5EF4-FFF2-40B4-BE49-F238E27FC236}">
-                <a16:creationId xmlns:a16="http://schemas.microsoft.com/office/drawing/2014/main" id="{8A0212EB-D5F5-7C42-9867-3F4106A76AC3}"/>
-              </a:ext>
-            </a:extLst>
-          </p:cNvPr>
-          <p:cNvSpPr txBox="1"/>
-          <p:nvPr/>
-        </p:nvSpPr>
-        <p:spPr>
-          <a:xfrm>
-            <a:off x="-1" y="37572"/>
-            <a:ext cx="6694715" cy="523220"/>
-          </a:xfrm>
-          <a:prstGeom prst="rect">
-            <a:avLst/>
-          </a:prstGeom>
-          <a:noFill/>
-        </p:spPr>
-        <p:txBody>
-          <a:bodyPr wrap="square" rtlCol="0">
-            <a:spAutoFit/>
-          </a:bodyPr>
-          <a:lstStyle/>
-          <a:p>
-            <a:r>
-              <a:rPr lang="en-US" sz="2800" b="1" dirty="0"/>
-              <a:t>Probability - Bayesian vs Frequentist</a:t>
-            </a:r>
-          </a:p>
-        </p:txBody>
-      </p:sp>
-      <p:sp>
-        <p:nvSpPr>
-          <p:cNvPr id="5" name="TextBox 4">
-            <a:extLst>
-              <a:ext uri="{FF2B5EF4-FFF2-40B4-BE49-F238E27FC236}">
-                <a16:creationId xmlns:a16="http://schemas.microsoft.com/office/drawing/2014/main" id="{AADE8889-8C42-E543-BA59-6986D4778221}"/>
-              </a:ext>
-            </a:extLst>
-          </p:cNvPr>
-          <p:cNvSpPr txBox="1"/>
-          <p:nvPr/>
-        </p:nvSpPr>
-        <p:spPr>
-          <a:xfrm>
-            <a:off x="185221" y="4350908"/>
-            <a:ext cx="5929952" cy="2462213"/>
-          </a:xfrm>
-          <a:prstGeom prst="rect">
-            <a:avLst/>
-          </a:prstGeom>
-          <a:noFill/>
-        </p:spPr>
-        <p:txBody>
-          <a:bodyPr wrap="square" rtlCol="0">
-            <a:spAutoFit/>
-          </a:bodyPr>
-          <a:lstStyle/>
-          <a:p>
-            <a:r>
-              <a:rPr lang="en-US" b="1" dirty="0">
-                <a:solidFill>
-                  <a:srgbClr val="FF0000"/>
-                </a:solidFill>
-              </a:rPr>
-              <a:t>Frequentist (classical):</a:t>
-            </a:r>
-          </a:p>
-          <a:p>
-            <a:r>
-              <a:rPr lang="en-US" dirty="0"/>
-              <a:t>    Calculate means (estimates) and confidence intervals</a:t>
-            </a:r>
-          </a:p>
-          <a:p>
-            <a:r>
-              <a:rPr lang="en-US" dirty="0"/>
-              <a:t>    Problems treating missing data (</a:t>
-            </a:r>
-            <a:r>
-              <a:rPr lang="en-US" b="1" dirty="0">
-                <a:solidFill>
-                  <a:srgbClr val="FF0000"/>
-                </a:solidFill>
-              </a:rPr>
-              <a:t>survivorship bias</a:t>
-            </a:r>
-            <a:r>
-              <a:rPr lang="en-US" dirty="0"/>
-              <a:t>)</a:t>
-            </a:r>
-          </a:p>
-          <a:p>
-            <a:r>
-              <a:rPr lang="en-US" dirty="0"/>
-              <a:t>    Problems with hypothesis testing (</a:t>
-            </a:r>
-            <a:r>
-              <a:rPr lang="en-US" b="1" dirty="0">
-                <a:solidFill>
-                  <a:srgbClr val="FF0000"/>
-                </a:solidFill>
-              </a:rPr>
-              <a:t>p-hacking</a:t>
-            </a:r>
-            <a:r>
-              <a:rPr lang="en-US" dirty="0"/>
-              <a:t>)</a:t>
-            </a:r>
-          </a:p>
-          <a:p>
-            <a:endParaRPr lang="en-US" b="1" dirty="0">
-              <a:solidFill>
-                <a:srgbClr val="FF0000"/>
-              </a:solidFill>
-            </a:endParaRPr>
-          </a:p>
-          <a:p>
-            <a:r>
-              <a:rPr lang="en-US" b="1" dirty="0">
-                <a:solidFill>
-                  <a:srgbClr val="FF0000"/>
-                </a:solidFill>
-              </a:rPr>
-              <a:t>Bayesian:</a:t>
-            </a:r>
-          </a:p>
-          <a:p>
-            <a:r>
-              <a:rPr lang="en-US" dirty="0"/>
-              <a:t>    Enumerate all possible hypotheses – and compute their probabilities.</a:t>
-            </a:r>
-          </a:p>
-          <a:p>
-            <a:r>
-              <a:rPr lang="en-US" dirty="0"/>
-              <a:t>    We make a (subjective) choice of “prior” (model, distribution)</a:t>
-            </a:r>
-          </a:p>
-          <a:p>
-            <a:r>
-              <a:rPr lang="en-US" dirty="0"/>
-              <a:t>    and produce posterior distribution.</a:t>
-            </a:r>
-          </a:p>
-          <a:p>
-            <a:r>
-              <a:rPr lang="en-US" dirty="0"/>
-              <a:t>    Allows for complex decision analysis under uncertainty.</a:t>
-            </a:r>
-          </a:p>
-          <a:p>
-            <a:endParaRPr lang="en-US" b="1" dirty="0">
-              <a:solidFill>
-                <a:srgbClr val="FF0000"/>
-              </a:solidFill>
-            </a:endParaRPr>
-          </a:p>
-        </p:txBody>
-      </p:sp>
-      <p:sp>
-        <p:nvSpPr>
-          <p:cNvPr id="6" name="TextBox 5">
-            <a:extLst>
-              <a:ext uri="{FF2B5EF4-FFF2-40B4-BE49-F238E27FC236}">
-                <a16:creationId xmlns:a16="http://schemas.microsoft.com/office/drawing/2014/main" id="{D86CA22F-D1DB-184B-8C0D-193FFD538439}"/>
-              </a:ext>
-            </a:extLst>
-          </p:cNvPr>
-          <p:cNvSpPr txBox="1"/>
-          <p:nvPr/>
-        </p:nvSpPr>
-        <p:spPr>
-          <a:xfrm>
-            <a:off x="6985379" y="682726"/>
-            <a:ext cx="5206621" cy="1815882"/>
-          </a:xfrm>
-          <a:prstGeom prst="rect">
-            <a:avLst/>
-          </a:prstGeom>
-          <a:noFill/>
-        </p:spPr>
-        <p:txBody>
-          <a:bodyPr wrap="square" rtlCol="0">
-            <a:spAutoFit/>
-          </a:bodyPr>
-          <a:lstStyle/>
-          <a:p>
-            <a:r>
-              <a:rPr lang="en-US" b="1" dirty="0">
-                <a:solidFill>
-                  <a:srgbClr val="FF0000"/>
-                </a:solidFill>
-              </a:rPr>
-              <a:t>Example1: </a:t>
-            </a:r>
-            <a:r>
-              <a:rPr lang="en-US" dirty="0"/>
-              <a:t>Polling, two candidates: Alice &amp; Bob.</a:t>
-            </a:r>
-          </a:p>
-          <a:p>
-            <a:r>
-              <a:rPr lang="en-US" dirty="0"/>
-              <a:t>52% of polled voters intend to vote for Alice.</a:t>
-            </a:r>
-          </a:p>
-          <a:p>
-            <a:r>
-              <a:rPr lang="en-US" dirty="0"/>
-              <a:t>Confidence interval [42%,62%], p-value = 0.34</a:t>
-            </a:r>
-          </a:p>
-          <a:p>
-            <a:r>
-              <a:rPr lang="en-US" dirty="0"/>
-              <a:t>What is the probability that Alice will win ?</a:t>
-            </a:r>
-          </a:p>
-          <a:p>
-            <a:r>
-              <a:rPr lang="en-US" dirty="0"/>
-              <a:t>Classical frequentist approach can not answer this question.</a:t>
-            </a:r>
-          </a:p>
-          <a:p>
-            <a:r>
-              <a:rPr lang="en-US" dirty="0"/>
-              <a:t>Bayesian method – result is a posterior distribution of possible </a:t>
-            </a:r>
-          </a:p>
-          <a:p>
-            <a:r>
-              <a:rPr lang="en-US" dirty="0"/>
-              <a:t>outcomes based on data.</a:t>
-            </a:r>
-          </a:p>
-          <a:p>
-            <a:r>
-              <a:rPr lang="en-US" dirty="0"/>
-              <a:t>Thus you can get your answer.</a:t>
-            </a:r>
-          </a:p>
-        </p:txBody>
-      </p:sp>
-      <p:sp>
-        <p:nvSpPr>
-          <p:cNvPr id="7" name="TextBox 6">
-            <a:extLst>
-              <a:ext uri="{FF2B5EF4-FFF2-40B4-BE49-F238E27FC236}">
-                <a16:creationId xmlns:a16="http://schemas.microsoft.com/office/drawing/2014/main" id="{E88A1638-21E4-C746-A837-4CF59231442C}"/>
-              </a:ext>
-            </a:extLst>
-          </p:cNvPr>
-          <p:cNvSpPr txBox="1"/>
-          <p:nvPr/>
-        </p:nvSpPr>
-        <p:spPr>
-          <a:xfrm>
-            <a:off x="6985379" y="2596582"/>
-            <a:ext cx="5206621" cy="1600438"/>
-          </a:xfrm>
-          <a:prstGeom prst="rect">
-            <a:avLst/>
-          </a:prstGeom>
-          <a:noFill/>
-        </p:spPr>
-        <p:txBody>
-          <a:bodyPr wrap="square" rtlCol="0">
-            <a:spAutoFit/>
-          </a:bodyPr>
-          <a:lstStyle/>
-          <a:p>
-            <a:r>
-              <a:rPr lang="en-US" b="1" dirty="0">
-                <a:solidFill>
-                  <a:srgbClr val="FF0000"/>
-                </a:solidFill>
-              </a:rPr>
-              <a:t>Example2:</a:t>
-            </a:r>
-            <a:r>
-              <a:rPr lang="en-US" dirty="0"/>
-              <a:t> comparing two drugs A &amp; B.</a:t>
-            </a:r>
-          </a:p>
-          <a:p>
-            <a:r>
-              <a:rPr lang="en-US" dirty="0"/>
-              <a:t>A is better than B with p value &lt; 0.001</a:t>
-            </a:r>
-          </a:p>
-          <a:p>
-            <a:r>
-              <a:rPr lang="en-US" dirty="0"/>
-              <a:t>A is more expensive.</a:t>
-            </a:r>
-          </a:p>
-          <a:p>
-            <a:r>
-              <a:rPr lang="en-US" dirty="0"/>
-              <a:t>Which drug should we prescribe?</a:t>
-            </a:r>
-          </a:p>
-          <a:p>
-            <a:r>
-              <a:rPr lang="en-US" dirty="0"/>
-              <a:t>Cost-benefit. </a:t>
-            </a:r>
-          </a:p>
-          <a:p>
-            <a:r>
-              <a:rPr lang="en-US" dirty="0"/>
-              <a:t>Suppose we get predicted probability of survival with A and B.</a:t>
-            </a:r>
-          </a:p>
-          <a:p>
-            <a:r>
-              <a:rPr lang="en-US" dirty="0"/>
-              <a:t>We could then compute dollars per life saved. </a:t>
-            </a:r>
-          </a:p>
-        </p:txBody>
-      </p:sp>
-      <p:sp>
-        <p:nvSpPr>
-          <p:cNvPr id="8" name="TextBox 7">
-            <a:extLst>
-              <a:ext uri="{FF2B5EF4-FFF2-40B4-BE49-F238E27FC236}">
-                <a16:creationId xmlns:a16="http://schemas.microsoft.com/office/drawing/2014/main" id="{81EB3310-1369-7647-9FF9-5016F01991CC}"/>
-              </a:ext>
-            </a:extLst>
-          </p:cNvPr>
-          <p:cNvSpPr txBox="1"/>
-          <p:nvPr/>
-        </p:nvSpPr>
-        <p:spPr>
-          <a:xfrm>
-            <a:off x="6985379" y="4294994"/>
-            <a:ext cx="5206621" cy="954107"/>
-          </a:xfrm>
-          <a:prstGeom prst="rect">
-            <a:avLst/>
-          </a:prstGeom>
-          <a:noFill/>
-        </p:spPr>
-        <p:txBody>
-          <a:bodyPr wrap="square" rtlCol="0">
-            <a:spAutoFit/>
-          </a:bodyPr>
-          <a:lstStyle/>
-          <a:p>
-            <a:r>
-              <a:rPr lang="en-US" b="1" dirty="0">
-                <a:solidFill>
-                  <a:srgbClr val="FF0000"/>
-                </a:solidFill>
-              </a:rPr>
-              <a:t>Example3:</a:t>
-            </a:r>
-            <a:r>
-              <a:rPr lang="en-US" dirty="0"/>
-              <a:t> Guessing game</a:t>
-            </a:r>
-          </a:p>
-          <a:p>
-            <a:r>
-              <a:rPr lang="en-US" dirty="0"/>
-              <a:t>You see the prize – and guess the price</a:t>
-            </a:r>
-          </a:p>
-          <a:p>
-            <a:r>
-              <a:rPr lang="en-US" dirty="0"/>
-              <a:t>Opponent sees a different prize – and guesses the price.</a:t>
-            </a:r>
-          </a:p>
-          <a:p>
-            <a:r>
-              <a:rPr lang="en-US" dirty="0"/>
-              <a:t>Whoever is closer (without going over) wins.</a:t>
-            </a:r>
-          </a:p>
-        </p:txBody>
-      </p:sp>
-      <p:sp>
-        <p:nvSpPr>
-          <p:cNvPr id="9" name="TextBox 8">
-            <a:extLst>
-              <a:ext uri="{FF2B5EF4-FFF2-40B4-BE49-F238E27FC236}">
-                <a16:creationId xmlns:a16="http://schemas.microsoft.com/office/drawing/2014/main" id="{9D171819-C6E6-4541-8406-01258005E5A5}"/>
-              </a:ext>
-            </a:extLst>
-          </p:cNvPr>
-          <p:cNvSpPr txBox="1"/>
-          <p:nvPr/>
-        </p:nvSpPr>
-        <p:spPr>
-          <a:xfrm>
-            <a:off x="185220" y="4043131"/>
-            <a:ext cx="5595582" cy="307777"/>
-          </a:xfrm>
-          <a:prstGeom prst="rect">
-            <a:avLst/>
-          </a:prstGeom>
-          <a:noFill/>
-        </p:spPr>
-        <p:txBody>
-          <a:bodyPr wrap="square" rtlCol="0">
-            <a:spAutoFit/>
-          </a:bodyPr>
-          <a:lstStyle/>
-          <a:p>
-            <a:r>
-              <a:rPr lang="en-US" dirty="0"/>
-              <a:t>Allen Downey – </a:t>
-            </a:r>
-            <a:r>
-              <a:rPr lang="en-US" dirty="0">
-                <a:hlinkClick r:id="rId2"/>
-              </a:rPr>
-              <a:t>https://www.youtube.com/watch?v=R6d-AbkhBQ8</a:t>
-            </a:r>
-            <a:r>
-              <a:rPr lang="en-US" dirty="0"/>
-              <a:t> </a:t>
-            </a:r>
-          </a:p>
-        </p:txBody>
-      </p:sp>
-      <p:sp>
-        <p:nvSpPr>
-          <p:cNvPr id="10" name="TextBox 9">
-            <a:extLst>
-              <a:ext uri="{FF2B5EF4-FFF2-40B4-BE49-F238E27FC236}">
-                <a16:creationId xmlns:a16="http://schemas.microsoft.com/office/drawing/2014/main" id="{E9BADB20-D64C-6847-BE85-8D8A5503503B}"/>
-              </a:ext>
-            </a:extLst>
-          </p:cNvPr>
-          <p:cNvSpPr txBox="1"/>
-          <p:nvPr/>
-        </p:nvSpPr>
-        <p:spPr>
-          <a:xfrm>
-            <a:off x="6985379" y="5526100"/>
-            <a:ext cx="5206621" cy="307777"/>
-          </a:xfrm>
-          <a:prstGeom prst="rect">
-            <a:avLst/>
-          </a:prstGeom>
-          <a:noFill/>
-        </p:spPr>
-        <p:txBody>
-          <a:bodyPr wrap="square" rtlCol="0">
-            <a:spAutoFit/>
-          </a:bodyPr>
-          <a:lstStyle/>
-          <a:p>
-            <a:r>
-              <a:rPr lang="en-US" b="1" dirty="0">
-                <a:solidFill>
-                  <a:srgbClr val="FF0000"/>
-                </a:solidFill>
-              </a:rPr>
-              <a:t>Example4: </a:t>
-            </a:r>
-            <a:r>
-              <a:rPr lang="en-US" dirty="0"/>
-              <a:t>MCMC (Markov-Chain Monte-Carlo)</a:t>
-            </a:r>
-          </a:p>
-        </p:txBody>
-      </p:sp>
-      <p:sp>
-        <p:nvSpPr>
-          <p:cNvPr id="2" name="TextBox 1">
-            <a:extLst>
-              <a:ext uri="{FF2B5EF4-FFF2-40B4-BE49-F238E27FC236}">
-                <a16:creationId xmlns:a16="http://schemas.microsoft.com/office/drawing/2014/main" id="{809CB213-96B1-CD42-937A-368036DCD1E0}"/>
-              </a:ext>
-            </a:extLst>
-          </p:cNvPr>
-          <p:cNvSpPr txBox="1"/>
-          <p:nvPr/>
-        </p:nvSpPr>
-        <p:spPr>
-          <a:xfrm>
-            <a:off x="353867" y="868569"/>
-            <a:ext cx="5560001" cy="2677656"/>
-          </a:xfrm>
-          <a:prstGeom prst="rect">
-            <a:avLst/>
-          </a:prstGeom>
-          <a:noFill/>
-        </p:spPr>
-        <p:txBody>
-          <a:bodyPr wrap="square" rtlCol="0">
-            <a:spAutoFit/>
-          </a:bodyPr>
-          <a:lstStyle/>
-          <a:p>
-            <a:r>
-              <a:rPr lang="en-US" dirty="0"/>
-              <a:t>The </a:t>
-            </a:r>
-            <a:r>
-              <a:rPr lang="en-US" b="1" dirty="0">
-                <a:solidFill>
-                  <a:srgbClr val="FF0000"/>
-                </a:solidFill>
-              </a:rPr>
-              <a:t>Frequentist</a:t>
-            </a:r>
-            <a:r>
-              <a:rPr lang="en-US" dirty="0"/>
-              <a:t> see probability as something that has to do with a limiting frequency based on an observed proportion.</a:t>
-            </a:r>
-          </a:p>
-          <a:p>
-            <a:endParaRPr lang="en-US" dirty="0"/>
-          </a:p>
-          <a:p>
-            <a:r>
-              <a:rPr lang="en-US" dirty="0"/>
-              <a:t>The </a:t>
-            </a:r>
-            <a:r>
-              <a:rPr lang="en-US" b="1" dirty="0">
-                <a:solidFill>
-                  <a:srgbClr val="FF0000"/>
-                </a:solidFill>
-              </a:rPr>
-              <a:t>Bayesian</a:t>
-            </a:r>
-            <a:r>
-              <a:rPr lang="en-US" dirty="0"/>
-              <a:t> is subjective and uses a priori beliefs to define a prior probability distribution on the possible values of the unknown parameters.</a:t>
-            </a:r>
-          </a:p>
-          <a:p>
-            <a:endParaRPr lang="en-US" dirty="0"/>
-          </a:p>
-          <a:p>
-            <a:r>
-              <a:rPr lang="en-US" dirty="0"/>
-              <a:t>Frequentists accuse Bayesians for being subjective in selecting a prior model / distribution. </a:t>
-            </a:r>
-          </a:p>
-          <a:p>
-            <a:endParaRPr lang="en-US" dirty="0"/>
-          </a:p>
-          <a:p>
-            <a:r>
-              <a:rPr lang="en-US" dirty="0"/>
-              <a:t>Bayesians snap back that at least they have a model, whereas Frequentists just calculate averages of observed data</a:t>
-            </a:r>
-          </a:p>
-        </p:txBody>
-      </p:sp>
-    </p:spTree>
-    <p:extLst>
-      <p:ext uri="{BB962C8B-B14F-4D97-AF65-F5344CB8AC3E}">
-        <p14:creationId xmlns:p14="http://schemas.microsoft.com/office/powerpoint/2010/main" val="1839179008"/>
-      </p:ext>
-    </p:extLst>
-  </p:cSld>
-  <p:clrMapOvr>
-    <a:masterClrMapping/>
-  </p:clrMapOvr>
-</p:sld>
-</file>
-
-<file path=ppt/slides/slide8.xml><?xml version="1.0" encoding="utf-8"?>
-<p:sld xmlns:a="http://schemas.openxmlformats.org/drawingml/2006/main" xmlns:r="http://schemas.openxmlformats.org/officeDocument/2006/relationships" xmlns:p="http://schemas.openxmlformats.org/presentationml/2006/main">
-  <p:cSld>
-    <p:spTree>
-      <p:nvGrpSpPr>
-        <p:cNvPr id="1" name=""/>
-        <p:cNvGrpSpPr/>
-        <p:nvPr/>
-      </p:nvGrpSpPr>
-      <p:grpSpPr>
-        <a:xfrm>
-          <a:off x="0" y="0"/>
-          <a:ext cx="0" cy="0"/>
-          <a:chOff x="0" y="0"/>
-          <a:chExt cx="0" cy="0"/>
-        </a:xfrm>
-      </p:grpSpPr>
-      <p:sp>
-        <p:nvSpPr>
-          <p:cNvPr id="4" name="TextBox 3">
-            <a:extLst>
-              <a:ext uri="{FF2B5EF4-FFF2-40B4-BE49-F238E27FC236}">
-                <a16:creationId xmlns:a16="http://schemas.microsoft.com/office/drawing/2014/main" id="{93FB964B-A29C-1649-A2C4-81BC78C24A50}"/>
-              </a:ext>
-            </a:extLst>
-          </p:cNvPr>
-          <p:cNvSpPr txBox="1"/>
-          <p:nvPr/>
-        </p:nvSpPr>
-        <p:spPr>
-          <a:xfrm>
-            <a:off x="238539" y="225286"/>
-            <a:ext cx="5579165" cy="6555641"/>
-          </a:xfrm>
-          <a:prstGeom prst="rect">
-            <a:avLst/>
-          </a:prstGeom>
-          <a:noFill/>
-        </p:spPr>
-        <p:txBody>
-          <a:bodyPr wrap="square" rtlCol="0">
-            <a:spAutoFit/>
-          </a:bodyPr>
-          <a:lstStyle/>
-          <a:p>
-            <a:r>
-              <a:rPr lang="en-US" b="1" dirty="0"/>
-              <a:t>Bayesian vs Frequentist – Survivorship Bias in World War 2</a:t>
+              <a:rPr lang="en-US" sz="2000" b="1" dirty="0"/>
+              <a:t>Bayesian vs Frequentist</a:t>
+            </a:r>
+          </a:p>
+          <a:p>
+            <a:r>
+              <a:rPr lang="en-US" sz="2000" b="1" dirty="0"/>
+              <a:t>Survivorship Bias in World War 2</a:t>
             </a:r>
           </a:p>
           <a:p>
@@ -19768,7 +18494,2223 @@
     </p:spTree>
     <p:extLst>
       <p:ext uri="{BB962C8B-B14F-4D97-AF65-F5344CB8AC3E}">
-        <p14:creationId xmlns:p14="http://schemas.microsoft.com/office/powerpoint/2010/main" val="3227577264"/>
+        <p14:creationId xmlns:p14="http://schemas.microsoft.com/office/powerpoint/2010/main" val="3774625219"/>
+      </p:ext>
+    </p:extLst>
+  </p:cSld>
+  <p:clrMapOvr>
+    <a:masterClrMapping/>
+  </p:clrMapOvr>
+</p:sld>
+</file>
+
+<file path=ppt/slides/slide7.xml><?xml version="1.0" encoding="utf-8"?>
+<p:sld xmlns:a="http://schemas.openxmlformats.org/drawingml/2006/main" xmlns:r="http://schemas.openxmlformats.org/officeDocument/2006/relationships" xmlns:p="http://schemas.openxmlformats.org/presentationml/2006/main">
+  <p:cSld>
+    <p:spTree>
+      <p:nvGrpSpPr>
+        <p:cNvPr id="1" name=""/>
+        <p:cNvGrpSpPr/>
+        <p:nvPr/>
+      </p:nvGrpSpPr>
+      <p:grpSpPr>
+        <a:xfrm>
+          <a:off x="0" y="0"/>
+          <a:ext cx="0" cy="0"/>
+          <a:chOff x="0" y="0"/>
+          <a:chExt cx="0" cy="0"/>
+        </a:xfrm>
+      </p:grpSpPr>
+      <p:sp>
+        <p:nvSpPr>
+          <p:cNvPr id="2" name="TextBox 1">
+            <a:extLst>
+              <a:ext uri="{FF2B5EF4-FFF2-40B4-BE49-F238E27FC236}">
+                <a16:creationId xmlns:a16="http://schemas.microsoft.com/office/drawing/2014/main" id="{45A3E503-F444-8740-9959-BAADA127EBBD}"/>
+              </a:ext>
+            </a:extLst>
+          </p:cNvPr>
+          <p:cNvSpPr txBox="1"/>
+          <p:nvPr/>
+        </p:nvSpPr>
+        <p:spPr>
+          <a:xfrm>
+            <a:off x="-65351" y="0"/>
+            <a:ext cx="4585855" cy="523220"/>
+          </a:xfrm>
+          <a:prstGeom prst="rect">
+            <a:avLst/>
+          </a:prstGeom>
+          <a:noFill/>
+        </p:spPr>
+        <p:txBody>
+          <a:bodyPr wrap="square" rtlCol="0">
+            <a:spAutoFit/>
+          </a:bodyPr>
+          <a:lstStyle/>
+          <a:p>
+            <a:r>
+              <a:rPr lang="en-US" sz="2800" b="1" dirty="0"/>
+              <a:t>Confidence vs Credibility</a:t>
+            </a:r>
+          </a:p>
+        </p:txBody>
+      </p:sp>
+      <p:sp>
+        <p:nvSpPr>
+          <p:cNvPr id="3" name="TextBox 2">
+            <a:extLst>
+              <a:ext uri="{FF2B5EF4-FFF2-40B4-BE49-F238E27FC236}">
+                <a16:creationId xmlns:a16="http://schemas.microsoft.com/office/drawing/2014/main" id="{34C986C8-6494-5542-A5B4-2B5DE3F7F949}"/>
+              </a:ext>
+            </a:extLst>
+          </p:cNvPr>
+          <p:cNvSpPr txBox="1"/>
+          <p:nvPr/>
+        </p:nvSpPr>
+        <p:spPr>
+          <a:xfrm>
+            <a:off x="193963" y="904886"/>
+            <a:ext cx="3824583" cy="1477328"/>
+          </a:xfrm>
+          <a:prstGeom prst="rect">
+            <a:avLst/>
+          </a:prstGeom>
+          <a:noFill/>
+        </p:spPr>
+        <p:txBody>
+          <a:bodyPr wrap="square" rtlCol="0">
+            <a:spAutoFit/>
+          </a:bodyPr>
+          <a:lstStyle/>
+          <a:p>
+            <a:r>
+              <a:rPr lang="en-US" sz="2000" b="1" dirty="0" err="1">
+                <a:solidFill>
+                  <a:srgbClr val="FF0000"/>
+                </a:solidFill>
+              </a:rPr>
+              <a:t>Bayesianism</a:t>
+            </a:r>
+            <a:r>
+              <a:rPr lang="en-US" dirty="0"/>
+              <a:t>: </a:t>
+            </a:r>
+          </a:p>
+          <a:p>
+            <a:r>
+              <a:rPr lang="en-US" dirty="0"/>
+              <a:t>probabilistic statement about </a:t>
+            </a:r>
+          </a:p>
+          <a:p>
+            <a:endParaRPr lang="en-US" dirty="0"/>
+          </a:p>
+          <a:p>
+            <a:r>
+              <a:rPr lang="en-US" dirty="0"/>
+              <a:t>model parameters </a:t>
+            </a:r>
+          </a:p>
+          <a:p>
+            <a:endParaRPr lang="en-US" dirty="0"/>
+          </a:p>
+          <a:p>
+            <a:r>
+              <a:rPr lang="en-US" dirty="0"/>
+              <a:t>given a fixed credible region</a:t>
+            </a:r>
+          </a:p>
+        </p:txBody>
+      </p:sp>
+      <p:sp>
+        <p:nvSpPr>
+          <p:cNvPr id="4" name="TextBox 3">
+            <a:extLst>
+              <a:ext uri="{FF2B5EF4-FFF2-40B4-BE49-F238E27FC236}">
+                <a16:creationId xmlns:a16="http://schemas.microsoft.com/office/drawing/2014/main" id="{EED3848A-8A25-2249-A3FC-A28BF38BEC4C}"/>
+              </a:ext>
+            </a:extLst>
+          </p:cNvPr>
+          <p:cNvSpPr txBox="1"/>
+          <p:nvPr/>
+        </p:nvSpPr>
+        <p:spPr>
+          <a:xfrm>
+            <a:off x="193962" y="3777454"/>
+            <a:ext cx="3824583" cy="1692771"/>
+          </a:xfrm>
+          <a:prstGeom prst="rect">
+            <a:avLst/>
+          </a:prstGeom>
+          <a:noFill/>
+        </p:spPr>
+        <p:txBody>
+          <a:bodyPr wrap="square" rtlCol="0">
+            <a:spAutoFit/>
+          </a:bodyPr>
+          <a:lstStyle/>
+          <a:p>
+            <a:r>
+              <a:rPr lang="en-US" sz="2000" b="1" dirty="0">
+                <a:solidFill>
+                  <a:srgbClr val="FF0000"/>
+                </a:solidFill>
+              </a:rPr>
+              <a:t>Frequentism:</a:t>
+            </a:r>
+            <a:r>
+              <a:rPr lang="en-US" dirty="0"/>
+              <a:t> </a:t>
+            </a:r>
+          </a:p>
+          <a:p>
+            <a:r>
+              <a:rPr lang="en-US" dirty="0"/>
+              <a:t>probabilistic statement about </a:t>
+            </a:r>
+          </a:p>
+          <a:p>
+            <a:endParaRPr lang="en-US" dirty="0"/>
+          </a:p>
+          <a:p>
+            <a:r>
+              <a:rPr lang="en-US" dirty="0"/>
+              <a:t>a recipe for generating </a:t>
+            </a:r>
+          </a:p>
+          <a:p>
+            <a:r>
+              <a:rPr lang="en-US" dirty="0"/>
+              <a:t>confidence intervals</a:t>
+            </a:r>
+          </a:p>
+          <a:p>
+            <a:endParaRPr lang="en-US" dirty="0"/>
+          </a:p>
+          <a:p>
+            <a:r>
+              <a:rPr lang="en-US" dirty="0"/>
+              <a:t>given a fixed model parameter</a:t>
+            </a:r>
+          </a:p>
+        </p:txBody>
+      </p:sp>
+      <p:sp>
+        <p:nvSpPr>
+          <p:cNvPr id="5" name="Oval 4">
+            <a:extLst>
+              <a:ext uri="{FF2B5EF4-FFF2-40B4-BE49-F238E27FC236}">
+                <a16:creationId xmlns:a16="http://schemas.microsoft.com/office/drawing/2014/main" id="{97595D3F-C164-0840-A6D6-EBC1EDB6388E}"/>
+              </a:ext>
+            </a:extLst>
+          </p:cNvPr>
+          <p:cNvSpPr/>
+          <p:nvPr/>
+        </p:nvSpPr>
+        <p:spPr>
+          <a:xfrm>
+            <a:off x="4311296" y="902468"/>
+            <a:ext cx="3017520" cy="1232379"/>
+          </a:xfrm>
+          <a:prstGeom prst="ellipse">
+            <a:avLst/>
+          </a:prstGeom>
+          <a:solidFill>
+            <a:schemeClr val="accent5">
+              <a:lumMod val="20000"/>
+              <a:lumOff val="80000"/>
+              <a:alpha val="70672"/>
+            </a:schemeClr>
+          </a:solidFill>
+          <a:ln>
+            <a:solidFill>
+              <a:srgbClr val="0070C0"/>
+            </a:solidFill>
+          </a:ln>
+        </p:spPr>
+        <p:style>
+          <a:lnRef idx="2">
+            <a:schemeClr val="accent1">
+              <a:shade val="50000"/>
+            </a:schemeClr>
+          </a:lnRef>
+          <a:fillRef idx="1">
+            <a:schemeClr val="accent1"/>
+          </a:fillRef>
+          <a:effectRef idx="0">
+            <a:schemeClr val="accent1"/>
+          </a:effectRef>
+          <a:fontRef idx="minor">
+            <a:schemeClr val="lt1"/>
+          </a:fontRef>
+        </p:style>
+        <p:txBody>
+          <a:bodyPr rtlCol="0" anchor="ctr"/>
+          <a:lstStyle/>
+          <a:p>
+            <a:pPr algn="ctr"/>
+            <a:endParaRPr lang="en-US"/>
+          </a:p>
+        </p:txBody>
+      </p:sp>
+      <p:sp>
+        <p:nvSpPr>
+          <p:cNvPr id="6" name="Oval 5">
+            <a:extLst>
+              <a:ext uri="{FF2B5EF4-FFF2-40B4-BE49-F238E27FC236}">
+                <a16:creationId xmlns:a16="http://schemas.microsoft.com/office/drawing/2014/main" id="{0389F32D-E4AF-F74B-B423-B6CF1ADA4514}"/>
+              </a:ext>
+            </a:extLst>
+          </p:cNvPr>
+          <p:cNvSpPr/>
+          <p:nvPr/>
+        </p:nvSpPr>
+        <p:spPr>
+          <a:xfrm>
+            <a:off x="4268121" y="3608771"/>
+            <a:ext cx="2273857" cy="1232379"/>
+          </a:xfrm>
+          <a:prstGeom prst="ellipse">
+            <a:avLst/>
+          </a:prstGeom>
+          <a:solidFill>
+            <a:schemeClr val="accent5">
+              <a:lumMod val="20000"/>
+              <a:lumOff val="80000"/>
+              <a:alpha val="35911"/>
+            </a:schemeClr>
+          </a:solidFill>
+          <a:ln>
+            <a:solidFill>
+              <a:srgbClr val="0070C0"/>
+            </a:solidFill>
+          </a:ln>
+        </p:spPr>
+        <p:style>
+          <a:lnRef idx="2">
+            <a:schemeClr val="accent1">
+              <a:shade val="50000"/>
+            </a:schemeClr>
+          </a:lnRef>
+          <a:fillRef idx="1">
+            <a:schemeClr val="accent1"/>
+          </a:fillRef>
+          <a:effectRef idx="0">
+            <a:schemeClr val="accent1"/>
+          </a:effectRef>
+          <a:fontRef idx="minor">
+            <a:schemeClr val="lt1"/>
+          </a:fontRef>
+        </p:style>
+        <p:txBody>
+          <a:bodyPr rtlCol="0" anchor="ctr"/>
+          <a:lstStyle/>
+          <a:p>
+            <a:pPr algn="ctr"/>
+            <a:endParaRPr lang="en-US"/>
+          </a:p>
+        </p:txBody>
+      </p:sp>
+      <p:sp>
+        <p:nvSpPr>
+          <p:cNvPr id="7" name="Oval 6">
+            <a:extLst>
+              <a:ext uri="{FF2B5EF4-FFF2-40B4-BE49-F238E27FC236}">
+                <a16:creationId xmlns:a16="http://schemas.microsoft.com/office/drawing/2014/main" id="{9971E320-B45D-DC49-9CD1-B08E949D34C1}"/>
+              </a:ext>
+            </a:extLst>
+          </p:cNvPr>
+          <p:cNvSpPr/>
+          <p:nvPr/>
+        </p:nvSpPr>
+        <p:spPr>
+          <a:xfrm rot="965329">
+            <a:off x="5276487" y="4365250"/>
+            <a:ext cx="2057528" cy="1232379"/>
+          </a:xfrm>
+          <a:prstGeom prst="ellipse">
+            <a:avLst/>
+          </a:prstGeom>
+          <a:solidFill>
+            <a:schemeClr val="accent5">
+              <a:lumMod val="20000"/>
+              <a:lumOff val="80000"/>
+              <a:alpha val="35911"/>
+            </a:schemeClr>
+          </a:solidFill>
+          <a:ln>
+            <a:solidFill>
+              <a:srgbClr val="0070C0"/>
+            </a:solidFill>
+          </a:ln>
+        </p:spPr>
+        <p:style>
+          <a:lnRef idx="2">
+            <a:schemeClr val="accent1">
+              <a:shade val="50000"/>
+            </a:schemeClr>
+          </a:lnRef>
+          <a:fillRef idx="1">
+            <a:schemeClr val="accent1"/>
+          </a:fillRef>
+          <a:effectRef idx="0">
+            <a:schemeClr val="accent1"/>
+          </a:effectRef>
+          <a:fontRef idx="minor">
+            <a:schemeClr val="lt1"/>
+          </a:fontRef>
+        </p:style>
+        <p:txBody>
+          <a:bodyPr rtlCol="0" anchor="ctr"/>
+          <a:lstStyle/>
+          <a:p>
+            <a:pPr algn="ctr"/>
+            <a:endParaRPr lang="en-US"/>
+          </a:p>
+        </p:txBody>
+      </p:sp>
+      <p:sp>
+        <p:nvSpPr>
+          <p:cNvPr id="8" name="Oval 7">
+            <a:extLst>
+              <a:ext uri="{FF2B5EF4-FFF2-40B4-BE49-F238E27FC236}">
+                <a16:creationId xmlns:a16="http://schemas.microsoft.com/office/drawing/2014/main" id="{4D137703-CE6E-FB49-ACEE-A14BFBBC126E}"/>
+              </a:ext>
+            </a:extLst>
+          </p:cNvPr>
+          <p:cNvSpPr/>
+          <p:nvPr/>
+        </p:nvSpPr>
+        <p:spPr>
+          <a:xfrm rot="20412797">
+            <a:off x="5657103" y="3660341"/>
+            <a:ext cx="1999873" cy="1232379"/>
+          </a:xfrm>
+          <a:prstGeom prst="ellipse">
+            <a:avLst/>
+          </a:prstGeom>
+          <a:solidFill>
+            <a:schemeClr val="accent5">
+              <a:lumMod val="20000"/>
+              <a:lumOff val="80000"/>
+              <a:alpha val="35911"/>
+            </a:schemeClr>
+          </a:solidFill>
+          <a:ln>
+            <a:solidFill>
+              <a:srgbClr val="0070C0"/>
+            </a:solidFill>
+          </a:ln>
+        </p:spPr>
+        <p:style>
+          <a:lnRef idx="2">
+            <a:schemeClr val="accent1">
+              <a:shade val="50000"/>
+            </a:schemeClr>
+          </a:lnRef>
+          <a:fillRef idx="1">
+            <a:schemeClr val="accent1"/>
+          </a:fillRef>
+          <a:effectRef idx="0">
+            <a:schemeClr val="accent1"/>
+          </a:effectRef>
+          <a:fontRef idx="minor">
+            <a:schemeClr val="lt1"/>
+          </a:fontRef>
+        </p:style>
+        <p:txBody>
+          <a:bodyPr rtlCol="0" anchor="ctr"/>
+          <a:lstStyle/>
+          <a:p>
+            <a:pPr algn="ctr"/>
+            <a:endParaRPr lang="en-US"/>
+          </a:p>
+        </p:txBody>
+      </p:sp>
+      <p:sp>
+        <p:nvSpPr>
+          <p:cNvPr id="9" name="Oval 8">
+            <a:extLst>
+              <a:ext uri="{FF2B5EF4-FFF2-40B4-BE49-F238E27FC236}">
+                <a16:creationId xmlns:a16="http://schemas.microsoft.com/office/drawing/2014/main" id="{CB82C0F5-E1B3-2F41-9437-1892493D73C6}"/>
+              </a:ext>
+            </a:extLst>
+          </p:cNvPr>
+          <p:cNvSpPr/>
+          <p:nvPr/>
+        </p:nvSpPr>
+        <p:spPr>
+          <a:xfrm>
+            <a:off x="4777192" y="1224189"/>
+            <a:ext cx="294468" cy="294468"/>
+          </a:xfrm>
+          <a:prstGeom prst="ellipse">
+            <a:avLst/>
+          </a:prstGeom>
+          <a:solidFill>
+            <a:schemeClr val="accent4"/>
+          </a:solidFill>
+        </p:spPr>
+        <p:style>
+          <a:lnRef idx="2">
+            <a:schemeClr val="accent1">
+              <a:shade val="50000"/>
+            </a:schemeClr>
+          </a:lnRef>
+          <a:fillRef idx="1">
+            <a:schemeClr val="accent1"/>
+          </a:fillRef>
+          <a:effectRef idx="0">
+            <a:schemeClr val="accent1"/>
+          </a:effectRef>
+          <a:fontRef idx="minor">
+            <a:schemeClr val="lt1"/>
+          </a:fontRef>
+        </p:style>
+        <p:txBody>
+          <a:bodyPr rtlCol="0" anchor="ctr"/>
+          <a:lstStyle/>
+          <a:p>
+            <a:pPr algn="ctr"/>
+            <a:endParaRPr lang="en-US"/>
+          </a:p>
+        </p:txBody>
+      </p:sp>
+      <p:sp>
+        <p:nvSpPr>
+          <p:cNvPr id="10" name="Oval 9">
+            <a:extLst>
+              <a:ext uri="{FF2B5EF4-FFF2-40B4-BE49-F238E27FC236}">
+                <a16:creationId xmlns:a16="http://schemas.microsoft.com/office/drawing/2014/main" id="{FA9DEC98-9184-0042-8FCD-BE315EE1B302}"/>
+              </a:ext>
+            </a:extLst>
+          </p:cNvPr>
+          <p:cNvSpPr/>
+          <p:nvPr/>
+        </p:nvSpPr>
+        <p:spPr>
+          <a:xfrm>
+            <a:off x="4664182" y="1588259"/>
+            <a:ext cx="294468" cy="294468"/>
+          </a:xfrm>
+          <a:prstGeom prst="ellipse">
+            <a:avLst/>
+          </a:prstGeom>
+          <a:solidFill>
+            <a:schemeClr val="accent4"/>
+          </a:solidFill>
+        </p:spPr>
+        <p:style>
+          <a:lnRef idx="2">
+            <a:schemeClr val="accent1">
+              <a:shade val="50000"/>
+            </a:schemeClr>
+          </a:lnRef>
+          <a:fillRef idx="1">
+            <a:schemeClr val="accent1"/>
+          </a:fillRef>
+          <a:effectRef idx="0">
+            <a:schemeClr val="accent1"/>
+          </a:effectRef>
+          <a:fontRef idx="minor">
+            <a:schemeClr val="lt1"/>
+          </a:fontRef>
+        </p:style>
+        <p:txBody>
+          <a:bodyPr rtlCol="0" anchor="ctr"/>
+          <a:lstStyle/>
+          <a:p>
+            <a:pPr algn="ctr"/>
+            <a:endParaRPr lang="en-US"/>
+          </a:p>
+        </p:txBody>
+      </p:sp>
+      <p:sp>
+        <p:nvSpPr>
+          <p:cNvPr id="11" name="Oval 10">
+            <a:extLst>
+              <a:ext uri="{FF2B5EF4-FFF2-40B4-BE49-F238E27FC236}">
+                <a16:creationId xmlns:a16="http://schemas.microsoft.com/office/drawing/2014/main" id="{FC0CCFB6-ABDF-0F48-B91D-96BD9D06FF92}"/>
+              </a:ext>
+            </a:extLst>
+          </p:cNvPr>
+          <p:cNvSpPr/>
+          <p:nvPr/>
+        </p:nvSpPr>
+        <p:spPr>
+          <a:xfrm>
+            <a:off x="5918303" y="1390565"/>
+            <a:ext cx="294468" cy="294468"/>
+          </a:xfrm>
+          <a:prstGeom prst="ellipse">
+            <a:avLst/>
+          </a:prstGeom>
+          <a:solidFill>
+            <a:schemeClr val="accent4"/>
+          </a:solidFill>
+        </p:spPr>
+        <p:style>
+          <a:lnRef idx="2">
+            <a:schemeClr val="accent1">
+              <a:shade val="50000"/>
+            </a:schemeClr>
+          </a:lnRef>
+          <a:fillRef idx="1">
+            <a:schemeClr val="accent1"/>
+          </a:fillRef>
+          <a:effectRef idx="0">
+            <a:schemeClr val="accent1"/>
+          </a:effectRef>
+          <a:fontRef idx="minor">
+            <a:schemeClr val="lt1"/>
+          </a:fontRef>
+        </p:style>
+        <p:txBody>
+          <a:bodyPr rtlCol="0" anchor="ctr"/>
+          <a:lstStyle/>
+          <a:p>
+            <a:pPr algn="ctr"/>
+            <a:endParaRPr lang="en-US"/>
+          </a:p>
+        </p:txBody>
+      </p:sp>
+      <p:sp>
+        <p:nvSpPr>
+          <p:cNvPr id="12" name="Oval 11">
+            <a:extLst>
+              <a:ext uri="{FF2B5EF4-FFF2-40B4-BE49-F238E27FC236}">
+                <a16:creationId xmlns:a16="http://schemas.microsoft.com/office/drawing/2014/main" id="{19D6AF0D-4587-7A42-8D51-E0DC365C8D14}"/>
+              </a:ext>
+            </a:extLst>
+          </p:cNvPr>
+          <p:cNvSpPr/>
+          <p:nvPr/>
+        </p:nvSpPr>
+        <p:spPr>
+          <a:xfrm>
+            <a:off x="5234392" y="1681389"/>
+            <a:ext cx="294468" cy="294468"/>
+          </a:xfrm>
+          <a:prstGeom prst="ellipse">
+            <a:avLst/>
+          </a:prstGeom>
+          <a:solidFill>
+            <a:schemeClr val="accent4"/>
+          </a:solidFill>
+        </p:spPr>
+        <p:style>
+          <a:lnRef idx="2">
+            <a:schemeClr val="accent1">
+              <a:shade val="50000"/>
+            </a:schemeClr>
+          </a:lnRef>
+          <a:fillRef idx="1">
+            <a:schemeClr val="accent1"/>
+          </a:fillRef>
+          <a:effectRef idx="0">
+            <a:schemeClr val="accent1"/>
+          </a:effectRef>
+          <a:fontRef idx="minor">
+            <a:schemeClr val="lt1"/>
+          </a:fontRef>
+        </p:style>
+        <p:txBody>
+          <a:bodyPr rtlCol="0" anchor="ctr"/>
+          <a:lstStyle/>
+          <a:p>
+            <a:pPr algn="ctr"/>
+            <a:endParaRPr lang="en-US"/>
+          </a:p>
+        </p:txBody>
+      </p:sp>
+      <p:sp>
+        <p:nvSpPr>
+          <p:cNvPr id="13" name="Oval 12">
+            <a:extLst>
+              <a:ext uri="{FF2B5EF4-FFF2-40B4-BE49-F238E27FC236}">
+                <a16:creationId xmlns:a16="http://schemas.microsoft.com/office/drawing/2014/main" id="{907320EE-28A9-284A-B12A-770FA0ABE4AD}"/>
+              </a:ext>
+            </a:extLst>
+          </p:cNvPr>
+          <p:cNvSpPr/>
+          <p:nvPr/>
+        </p:nvSpPr>
+        <p:spPr>
+          <a:xfrm>
+            <a:off x="5264167" y="1105980"/>
+            <a:ext cx="294468" cy="294468"/>
+          </a:xfrm>
+          <a:prstGeom prst="ellipse">
+            <a:avLst/>
+          </a:prstGeom>
+          <a:solidFill>
+            <a:schemeClr val="accent4"/>
+          </a:solidFill>
+        </p:spPr>
+        <p:style>
+          <a:lnRef idx="2">
+            <a:schemeClr val="accent1">
+              <a:shade val="50000"/>
+            </a:schemeClr>
+          </a:lnRef>
+          <a:fillRef idx="1">
+            <a:schemeClr val="accent1"/>
+          </a:fillRef>
+          <a:effectRef idx="0">
+            <a:schemeClr val="accent1"/>
+          </a:effectRef>
+          <a:fontRef idx="minor">
+            <a:schemeClr val="lt1"/>
+          </a:fontRef>
+        </p:style>
+        <p:txBody>
+          <a:bodyPr rtlCol="0" anchor="ctr"/>
+          <a:lstStyle/>
+          <a:p>
+            <a:pPr algn="ctr"/>
+            <a:endParaRPr lang="en-US"/>
+          </a:p>
+        </p:txBody>
+      </p:sp>
+      <p:sp>
+        <p:nvSpPr>
+          <p:cNvPr id="14" name="Oval 13">
+            <a:extLst>
+              <a:ext uri="{FF2B5EF4-FFF2-40B4-BE49-F238E27FC236}">
+                <a16:creationId xmlns:a16="http://schemas.microsoft.com/office/drawing/2014/main" id="{E8579B37-E01E-664F-8F4C-083685EB2437}"/>
+              </a:ext>
+            </a:extLst>
+          </p:cNvPr>
+          <p:cNvSpPr/>
+          <p:nvPr/>
+        </p:nvSpPr>
+        <p:spPr>
+          <a:xfrm>
+            <a:off x="5491408" y="1412468"/>
+            <a:ext cx="294468" cy="294468"/>
+          </a:xfrm>
+          <a:prstGeom prst="ellipse">
+            <a:avLst/>
+          </a:prstGeom>
+          <a:solidFill>
+            <a:schemeClr val="accent4"/>
+          </a:solidFill>
+        </p:spPr>
+        <p:style>
+          <a:lnRef idx="2">
+            <a:schemeClr val="accent1">
+              <a:shade val="50000"/>
+            </a:schemeClr>
+          </a:lnRef>
+          <a:fillRef idx="1">
+            <a:schemeClr val="accent1"/>
+          </a:fillRef>
+          <a:effectRef idx="0">
+            <a:schemeClr val="accent1"/>
+          </a:effectRef>
+          <a:fontRef idx="minor">
+            <a:schemeClr val="lt1"/>
+          </a:fontRef>
+        </p:style>
+        <p:txBody>
+          <a:bodyPr rtlCol="0" anchor="ctr"/>
+          <a:lstStyle/>
+          <a:p>
+            <a:pPr algn="ctr"/>
+            <a:endParaRPr lang="en-US"/>
+          </a:p>
+        </p:txBody>
+      </p:sp>
+      <p:sp>
+        <p:nvSpPr>
+          <p:cNvPr id="15" name="Oval 14">
+            <a:extLst>
+              <a:ext uri="{FF2B5EF4-FFF2-40B4-BE49-F238E27FC236}">
+                <a16:creationId xmlns:a16="http://schemas.microsoft.com/office/drawing/2014/main" id="{B9B0E2BC-5D03-3341-9854-DFF10299782B}"/>
+              </a:ext>
+            </a:extLst>
+          </p:cNvPr>
+          <p:cNvSpPr/>
+          <p:nvPr/>
+        </p:nvSpPr>
+        <p:spPr>
+          <a:xfrm>
+            <a:off x="5728519" y="974410"/>
+            <a:ext cx="294468" cy="294468"/>
+          </a:xfrm>
+          <a:prstGeom prst="ellipse">
+            <a:avLst/>
+          </a:prstGeom>
+          <a:solidFill>
+            <a:schemeClr val="accent4"/>
+          </a:solidFill>
+        </p:spPr>
+        <p:style>
+          <a:lnRef idx="2">
+            <a:schemeClr val="accent1">
+              <a:shade val="50000"/>
+            </a:schemeClr>
+          </a:lnRef>
+          <a:fillRef idx="1">
+            <a:schemeClr val="accent1"/>
+          </a:fillRef>
+          <a:effectRef idx="0">
+            <a:schemeClr val="accent1"/>
+          </a:effectRef>
+          <a:fontRef idx="minor">
+            <a:schemeClr val="lt1"/>
+          </a:fontRef>
+        </p:style>
+        <p:txBody>
+          <a:bodyPr rtlCol="0" anchor="ctr"/>
+          <a:lstStyle/>
+          <a:p>
+            <a:pPr algn="ctr"/>
+            <a:endParaRPr lang="en-US"/>
+          </a:p>
+        </p:txBody>
+      </p:sp>
+      <p:sp>
+        <p:nvSpPr>
+          <p:cNvPr id="16" name="Oval 15">
+            <a:extLst>
+              <a:ext uri="{FF2B5EF4-FFF2-40B4-BE49-F238E27FC236}">
+                <a16:creationId xmlns:a16="http://schemas.microsoft.com/office/drawing/2014/main" id="{4361876C-0846-EA45-A05C-86C2E7B861C9}"/>
+              </a:ext>
+            </a:extLst>
+          </p:cNvPr>
+          <p:cNvSpPr/>
+          <p:nvPr/>
+        </p:nvSpPr>
+        <p:spPr>
+          <a:xfrm>
+            <a:off x="6281604" y="1758333"/>
+            <a:ext cx="294468" cy="294468"/>
+          </a:xfrm>
+          <a:prstGeom prst="ellipse">
+            <a:avLst/>
+          </a:prstGeom>
+          <a:solidFill>
+            <a:schemeClr val="accent4"/>
+          </a:solidFill>
+        </p:spPr>
+        <p:style>
+          <a:lnRef idx="2">
+            <a:schemeClr val="accent1">
+              <a:shade val="50000"/>
+            </a:schemeClr>
+          </a:lnRef>
+          <a:fillRef idx="1">
+            <a:schemeClr val="accent1"/>
+          </a:fillRef>
+          <a:effectRef idx="0">
+            <a:schemeClr val="accent1"/>
+          </a:effectRef>
+          <a:fontRef idx="minor">
+            <a:schemeClr val="lt1"/>
+          </a:fontRef>
+        </p:style>
+        <p:txBody>
+          <a:bodyPr rtlCol="0" anchor="ctr"/>
+          <a:lstStyle/>
+          <a:p>
+            <a:pPr algn="ctr"/>
+            <a:endParaRPr lang="en-US"/>
+          </a:p>
+        </p:txBody>
+      </p:sp>
+      <p:sp>
+        <p:nvSpPr>
+          <p:cNvPr id="17" name="Oval 16">
+            <a:extLst>
+              <a:ext uri="{FF2B5EF4-FFF2-40B4-BE49-F238E27FC236}">
+                <a16:creationId xmlns:a16="http://schemas.microsoft.com/office/drawing/2014/main" id="{FFBB75ED-CC7C-144E-964C-7C14A754F150}"/>
+              </a:ext>
+            </a:extLst>
+          </p:cNvPr>
+          <p:cNvSpPr/>
+          <p:nvPr/>
+        </p:nvSpPr>
+        <p:spPr>
+          <a:xfrm>
+            <a:off x="6535044" y="1293791"/>
+            <a:ext cx="294468" cy="294468"/>
+          </a:xfrm>
+          <a:prstGeom prst="ellipse">
+            <a:avLst/>
+          </a:prstGeom>
+          <a:solidFill>
+            <a:schemeClr val="accent4"/>
+          </a:solidFill>
+        </p:spPr>
+        <p:style>
+          <a:lnRef idx="2">
+            <a:schemeClr val="accent1">
+              <a:shade val="50000"/>
+            </a:schemeClr>
+          </a:lnRef>
+          <a:fillRef idx="1">
+            <a:schemeClr val="accent1"/>
+          </a:fillRef>
+          <a:effectRef idx="0">
+            <a:schemeClr val="accent1"/>
+          </a:effectRef>
+          <a:fontRef idx="minor">
+            <a:schemeClr val="lt1"/>
+          </a:fontRef>
+        </p:style>
+        <p:txBody>
+          <a:bodyPr rtlCol="0" anchor="ctr"/>
+          <a:lstStyle/>
+          <a:p>
+            <a:pPr algn="ctr"/>
+            <a:endParaRPr lang="en-US"/>
+          </a:p>
+        </p:txBody>
+      </p:sp>
+      <p:sp>
+        <p:nvSpPr>
+          <p:cNvPr id="18" name="Oval 17">
+            <a:extLst>
+              <a:ext uri="{FF2B5EF4-FFF2-40B4-BE49-F238E27FC236}">
+                <a16:creationId xmlns:a16="http://schemas.microsoft.com/office/drawing/2014/main" id="{739F93DF-8AB8-BA4E-BD98-C1C92669B7B7}"/>
+              </a:ext>
+            </a:extLst>
+          </p:cNvPr>
+          <p:cNvSpPr/>
+          <p:nvPr/>
+        </p:nvSpPr>
+        <p:spPr>
+          <a:xfrm>
+            <a:off x="6318744" y="973282"/>
+            <a:ext cx="294468" cy="294468"/>
+          </a:xfrm>
+          <a:prstGeom prst="ellipse">
+            <a:avLst/>
+          </a:prstGeom>
+          <a:solidFill>
+            <a:schemeClr val="accent4"/>
+          </a:solidFill>
+        </p:spPr>
+        <p:style>
+          <a:lnRef idx="2">
+            <a:schemeClr val="accent1">
+              <a:shade val="50000"/>
+            </a:schemeClr>
+          </a:lnRef>
+          <a:fillRef idx="1">
+            <a:schemeClr val="accent1"/>
+          </a:fillRef>
+          <a:effectRef idx="0">
+            <a:schemeClr val="accent1"/>
+          </a:effectRef>
+          <a:fontRef idx="minor">
+            <a:schemeClr val="lt1"/>
+          </a:fontRef>
+        </p:style>
+        <p:txBody>
+          <a:bodyPr rtlCol="0" anchor="ctr"/>
+          <a:lstStyle/>
+          <a:p>
+            <a:pPr algn="ctr"/>
+            <a:endParaRPr lang="en-US"/>
+          </a:p>
+        </p:txBody>
+      </p:sp>
+      <p:sp>
+        <p:nvSpPr>
+          <p:cNvPr id="19" name="Oval 18">
+            <a:extLst>
+              <a:ext uri="{FF2B5EF4-FFF2-40B4-BE49-F238E27FC236}">
+                <a16:creationId xmlns:a16="http://schemas.microsoft.com/office/drawing/2014/main" id="{71680A35-4E34-1D4E-A54E-FEEE28D00C07}"/>
+              </a:ext>
+            </a:extLst>
+          </p:cNvPr>
+          <p:cNvSpPr/>
+          <p:nvPr/>
+        </p:nvSpPr>
+        <p:spPr>
+          <a:xfrm>
+            <a:off x="6864464" y="1250398"/>
+            <a:ext cx="294468" cy="294468"/>
+          </a:xfrm>
+          <a:prstGeom prst="ellipse">
+            <a:avLst/>
+          </a:prstGeom>
+          <a:solidFill>
+            <a:schemeClr val="accent4"/>
+          </a:solidFill>
+        </p:spPr>
+        <p:style>
+          <a:lnRef idx="2">
+            <a:schemeClr val="accent1">
+              <a:shade val="50000"/>
+            </a:schemeClr>
+          </a:lnRef>
+          <a:fillRef idx="1">
+            <a:schemeClr val="accent1"/>
+          </a:fillRef>
+          <a:effectRef idx="0">
+            <a:schemeClr val="accent1"/>
+          </a:effectRef>
+          <a:fontRef idx="minor">
+            <a:schemeClr val="lt1"/>
+          </a:fontRef>
+        </p:style>
+        <p:txBody>
+          <a:bodyPr rtlCol="0" anchor="ctr"/>
+          <a:lstStyle/>
+          <a:p>
+            <a:pPr algn="ctr"/>
+            <a:endParaRPr lang="en-US"/>
+          </a:p>
+        </p:txBody>
+      </p:sp>
+      <p:sp>
+        <p:nvSpPr>
+          <p:cNvPr id="20" name="Oval 19">
+            <a:extLst>
+              <a:ext uri="{FF2B5EF4-FFF2-40B4-BE49-F238E27FC236}">
+                <a16:creationId xmlns:a16="http://schemas.microsoft.com/office/drawing/2014/main" id="{E298DDC5-F068-6140-8F06-B936894D64BE}"/>
+              </a:ext>
+            </a:extLst>
+          </p:cNvPr>
+          <p:cNvSpPr/>
+          <p:nvPr/>
+        </p:nvSpPr>
+        <p:spPr>
+          <a:xfrm>
+            <a:off x="5125137" y="1293062"/>
+            <a:ext cx="294468" cy="294468"/>
+          </a:xfrm>
+          <a:prstGeom prst="ellipse">
+            <a:avLst/>
+          </a:prstGeom>
+          <a:solidFill>
+            <a:schemeClr val="accent4"/>
+          </a:solidFill>
+        </p:spPr>
+        <p:style>
+          <a:lnRef idx="2">
+            <a:schemeClr val="accent1">
+              <a:shade val="50000"/>
+            </a:schemeClr>
+          </a:lnRef>
+          <a:fillRef idx="1">
+            <a:schemeClr val="accent1"/>
+          </a:fillRef>
+          <a:effectRef idx="0">
+            <a:schemeClr val="accent1"/>
+          </a:effectRef>
+          <a:fontRef idx="minor">
+            <a:schemeClr val="lt1"/>
+          </a:fontRef>
+        </p:style>
+        <p:txBody>
+          <a:bodyPr rtlCol="0" anchor="ctr"/>
+          <a:lstStyle/>
+          <a:p>
+            <a:pPr algn="ctr"/>
+            <a:endParaRPr lang="en-US"/>
+          </a:p>
+        </p:txBody>
+      </p:sp>
+      <p:sp>
+        <p:nvSpPr>
+          <p:cNvPr id="21" name="Oval 20">
+            <a:extLst>
+              <a:ext uri="{FF2B5EF4-FFF2-40B4-BE49-F238E27FC236}">
+                <a16:creationId xmlns:a16="http://schemas.microsoft.com/office/drawing/2014/main" id="{53355E27-83EF-0B41-97EE-326671135067}"/>
+              </a:ext>
+            </a:extLst>
+          </p:cNvPr>
+          <p:cNvSpPr/>
+          <p:nvPr/>
+        </p:nvSpPr>
+        <p:spPr>
+          <a:xfrm>
+            <a:off x="5713138" y="1659486"/>
+            <a:ext cx="294468" cy="294468"/>
+          </a:xfrm>
+          <a:prstGeom prst="ellipse">
+            <a:avLst/>
+          </a:prstGeom>
+          <a:solidFill>
+            <a:schemeClr val="accent4"/>
+          </a:solidFill>
+        </p:spPr>
+        <p:style>
+          <a:lnRef idx="2">
+            <a:schemeClr val="accent1">
+              <a:shade val="50000"/>
+            </a:schemeClr>
+          </a:lnRef>
+          <a:fillRef idx="1">
+            <a:schemeClr val="accent1"/>
+          </a:fillRef>
+          <a:effectRef idx="0">
+            <a:schemeClr val="accent1"/>
+          </a:effectRef>
+          <a:fontRef idx="minor">
+            <a:schemeClr val="lt1"/>
+          </a:fontRef>
+        </p:style>
+        <p:txBody>
+          <a:bodyPr rtlCol="0" anchor="ctr"/>
+          <a:lstStyle/>
+          <a:p>
+            <a:pPr algn="ctr"/>
+            <a:endParaRPr lang="en-US"/>
+          </a:p>
+        </p:txBody>
+      </p:sp>
+      <p:sp>
+        <p:nvSpPr>
+          <p:cNvPr id="22" name="Oval 21">
+            <a:extLst>
+              <a:ext uri="{FF2B5EF4-FFF2-40B4-BE49-F238E27FC236}">
+                <a16:creationId xmlns:a16="http://schemas.microsoft.com/office/drawing/2014/main" id="{2BD73340-6D1D-AE44-B09C-815640DC9FC8}"/>
+              </a:ext>
+            </a:extLst>
+          </p:cNvPr>
+          <p:cNvSpPr/>
+          <p:nvPr/>
+        </p:nvSpPr>
+        <p:spPr>
+          <a:xfrm>
+            <a:off x="6609850" y="1483231"/>
+            <a:ext cx="294468" cy="294468"/>
+          </a:xfrm>
+          <a:prstGeom prst="ellipse">
+            <a:avLst/>
+          </a:prstGeom>
+          <a:solidFill>
+            <a:schemeClr val="accent4"/>
+          </a:solidFill>
+        </p:spPr>
+        <p:style>
+          <a:lnRef idx="2">
+            <a:schemeClr val="accent1">
+              <a:shade val="50000"/>
+            </a:schemeClr>
+          </a:lnRef>
+          <a:fillRef idx="1">
+            <a:schemeClr val="accent1"/>
+          </a:fillRef>
+          <a:effectRef idx="0">
+            <a:schemeClr val="accent1"/>
+          </a:effectRef>
+          <a:fontRef idx="minor">
+            <a:schemeClr val="lt1"/>
+          </a:fontRef>
+        </p:style>
+        <p:txBody>
+          <a:bodyPr rtlCol="0" anchor="ctr"/>
+          <a:lstStyle/>
+          <a:p>
+            <a:pPr algn="ctr"/>
+            <a:endParaRPr lang="en-US"/>
+          </a:p>
+        </p:txBody>
+      </p:sp>
+      <p:sp>
+        <p:nvSpPr>
+          <p:cNvPr id="23" name="Oval 22">
+            <a:extLst>
+              <a:ext uri="{FF2B5EF4-FFF2-40B4-BE49-F238E27FC236}">
+                <a16:creationId xmlns:a16="http://schemas.microsoft.com/office/drawing/2014/main" id="{DC9430E1-6A51-E74C-AD08-B6208CCDFDE5}"/>
+              </a:ext>
+            </a:extLst>
+          </p:cNvPr>
+          <p:cNvSpPr/>
+          <p:nvPr/>
+        </p:nvSpPr>
+        <p:spPr>
+          <a:xfrm>
+            <a:off x="5060420" y="1677319"/>
+            <a:ext cx="294468" cy="294468"/>
+          </a:xfrm>
+          <a:prstGeom prst="ellipse">
+            <a:avLst/>
+          </a:prstGeom>
+          <a:solidFill>
+            <a:schemeClr val="accent4"/>
+          </a:solidFill>
+        </p:spPr>
+        <p:style>
+          <a:lnRef idx="2">
+            <a:schemeClr val="accent1">
+              <a:shade val="50000"/>
+            </a:schemeClr>
+          </a:lnRef>
+          <a:fillRef idx="1">
+            <a:schemeClr val="accent1"/>
+          </a:fillRef>
+          <a:effectRef idx="0">
+            <a:schemeClr val="accent1"/>
+          </a:effectRef>
+          <a:fontRef idx="minor">
+            <a:schemeClr val="lt1"/>
+          </a:fontRef>
+        </p:style>
+        <p:txBody>
+          <a:bodyPr rtlCol="0" anchor="ctr"/>
+          <a:lstStyle/>
+          <a:p>
+            <a:pPr algn="ctr"/>
+            <a:endParaRPr lang="en-US"/>
+          </a:p>
+        </p:txBody>
+      </p:sp>
+      <p:sp>
+        <p:nvSpPr>
+          <p:cNvPr id="24" name="Oval 23">
+            <a:extLst>
+              <a:ext uri="{FF2B5EF4-FFF2-40B4-BE49-F238E27FC236}">
+                <a16:creationId xmlns:a16="http://schemas.microsoft.com/office/drawing/2014/main" id="{86D1FB04-5468-8F4E-9755-25EC0332A18A}"/>
+              </a:ext>
+            </a:extLst>
+          </p:cNvPr>
+          <p:cNvSpPr/>
+          <p:nvPr/>
+        </p:nvSpPr>
+        <p:spPr>
+          <a:xfrm>
+            <a:off x="6036092" y="1179505"/>
+            <a:ext cx="294468" cy="294468"/>
+          </a:xfrm>
+          <a:prstGeom prst="ellipse">
+            <a:avLst/>
+          </a:prstGeom>
+          <a:solidFill>
+            <a:schemeClr val="accent4"/>
+          </a:solidFill>
+        </p:spPr>
+        <p:style>
+          <a:lnRef idx="2">
+            <a:schemeClr val="accent1">
+              <a:shade val="50000"/>
+            </a:schemeClr>
+          </a:lnRef>
+          <a:fillRef idx="1">
+            <a:schemeClr val="accent1"/>
+          </a:fillRef>
+          <a:effectRef idx="0">
+            <a:schemeClr val="accent1"/>
+          </a:effectRef>
+          <a:fontRef idx="minor">
+            <a:schemeClr val="lt1"/>
+          </a:fontRef>
+        </p:style>
+        <p:txBody>
+          <a:bodyPr rtlCol="0" anchor="ctr"/>
+          <a:lstStyle/>
+          <a:p>
+            <a:pPr algn="ctr"/>
+            <a:endParaRPr lang="en-US"/>
+          </a:p>
+        </p:txBody>
+      </p:sp>
+      <p:sp>
+        <p:nvSpPr>
+          <p:cNvPr id="25" name="Oval 24">
+            <a:extLst>
+              <a:ext uri="{FF2B5EF4-FFF2-40B4-BE49-F238E27FC236}">
+                <a16:creationId xmlns:a16="http://schemas.microsoft.com/office/drawing/2014/main" id="{146A4F47-2635-FE4D-BA59-CE43369FFE09}"/>
+              </a:ext>
+            </a:extLst>
+          </p:cNvPr>
+          <p:cNvSpPr/>
+          <p:nvPr/>
+        </p:nvSpPr>
+        <p:spPr>
+          <a:xfrm>
+            <a:off x="5582337" y="1750262"/>
+            <a:ext cx="294468" cy="294468"/>
+          </a:xfrm>
+          <a:prstGeom prst="ellipse">
+            <a:avLst/>
+          </a:prstGeom>
+          <a:solidFill>
+            <a:schemeClr val="accent4"/>
+          </a:solidFill>
+        </p:spPr>
+        <p:style>
+          <a:lnRef idx="2">
+            <a:schemeClr val="accent1">
+              <a:shade val="50000"/>
+            </a:schemeClr>
+          </a:lnRef>
+          <a:fillRef idx="1">
+            <a:schemeClr val="accent1"/>
+          </a:fillRef>
+          <a:effectRef idx="0">
+            <a:schemeClr val="accent1"/>
+          </a:effectRef>
+          <a:fontRef idx="minor">
+            <a:schemeClr val="lt1"/>
+          </a:fontRef>
+        </p:style>
+        <p:txBody>
+          <a:bodyPr rtlCol="0" anchor="ctr"/>
+          <a:lstStyle/>
+          <a:p>
+            <a:pPr algn="ctr"/>
+            <a:endParaRPr lang="en-US"/>
+          </a:p>
+        </p:txBody>
+      </p:sp>
+      <p:sp>
+        <p:nvSpPr>
+          <p:cNvPr id="26" name="Oval 25">
+            <a:extLst>
+              <a:ext uri="{FF2B5EF4-FFF2-40B4-BE49-F238E27FC236}">
+                <a16:creationId xmlns:a16="http://schemas.microsoft.com/office/drawing/2014/main" id="{E7633667-E8B9-1243-9559-B3506FE8D536}"/>
+              </a:ext>
+            </a:extLst>
+          </p:cNvPr>
+          <p:cNvSpPr/>
+          <p:nvPr/>
+        </p:nvSpPr>
+        <p:spPr>
+          <a:xfrm>
+            <a:off x="5780061" y="4401368"/>
+            <a:ext cx="294468" cy="294468"/>
+          </a:xfrm>
+          <a:prstGeom prst="ellipse">
+            <a:avLst/>
+          </a:prstGeom>
+          <a:solidFill>
+            <a:schemeClr val="accent4"/>
+          </a:solidFill>
+        </p:spPr>
+        <p:style>
+          <a:lnRef idx="2">
+            <a:schemeClr val="accent1">
+              <a:shade val="50000"/>
+            </a:schemeClr>
+          </a:lnRef>
+          <a:fillRef idx="1">
+            <a:schemeClr val="accent1"/>
+          </a:fillRef>
+          <a:effectRef idx="0">
+            <a:schemeClr val="accent1"/>
+          </a:effectRef>
+          <a:fontRef idx="minor">
+            <a:schemeClr val="lt1"/>
+          </a:fontRef>
+        </p:style>
+        <p:txBody>
+          <a:bodyPr rtlCol="0" anchor="ctr"/>
+          <a:lstStyle/>
+          <a:p>
+            <a:pPr algn="ctr"/>
+            <a:endParaRPr lang="en-US"/>
+          </a:p>
+        </p:txBody>
+      </p:sp>
+      <p:sp>
+        <p:nvSpPr>
+          <p:cNvPr id="27" name="Oval 26">
+            <a:extLst>
+              <a:ext uri="{FF2B5EF4-FFF2-40B4-BE49-F238E27FC236}">
+                <a16:creationId xmlns:a16="http://schemas.microsoft.com/office/drawing/2014/main" id="{CAC20ABF-F0A3-9045-B238-D3C46F483BE4}"/>
+              </a:ext>
+            </a:extLst>
+          </p:cNvPr>
+          <p:cNvSpPr/>
+          <p:nvPr/>
+        </p:nvSpPr>
+        <p:spPr>
+          <a:xfrm rot="17922373">
+            <a:off x="4550099" y="4599030"/>
+            <a:ext cx="2119979" cy="1232379"/>
+          </a:xfrm>
+          <a:prstGeom prst="ellipse">
+            <a:avLst/>
+          </a:prstGeom>
+          <a:solidFill>
+            <a:schemeClr val="accent5">
+              <a:lumMod val="20000"/>
+              <a:lumOff val="80000"/>
+              <a:alpha val="35911"/>
+            </a:schemeClr>
+          </a:solidFill>
+          <a:ln>
+            <a:solidFill>
+              <a:srgbClr val="0070C0"/>
+            </a:solidFill>
+          </a:ln>
+        </p:spPr>
+        <p:style>
+          <a:lnRef idx="2">
+            <a:schemeClr val="accent1">
+              <a:shade val="50000"/>
+            </a:schemeClr>
+          </a:lnRef>
+          <a:fillRef idx="1">
+            <a:schemeClr val="accent1"/>
+          </a:fillRef>
+          <a:effectRef idx="0">
+            <a:schemeClr val="accent1"/>
+          </a:effectRef>
+          <a:fontRef idx="minor">
+            <a:schemeClr val="lt1"/>
+          </a:fontRef>
+        </p:style>
+        <p:txBody>
+          <a:bodyPr rtlCol="0" anchor="ctr"/>
+          <a:lstStyle/>
+          <a:p>
+            <a:pPr algn="ctr"/>
+            <a:endParaRPr lang="en-US"/>
+          </a:p>
+        </p:txBody>
+      </p:sp>
+      <p:sp>
+        <p:nvSpPr>
+          <p:cNvPr id="32" name="Oval 31">
+            <a:extLst>
+              <a:ext uri="{FF2B5EF4-FFF2-40B4-BE49-F238E27FC236}">
+                <a16:creationId xmlns:a16="http://schemas.microsoft.com/office/drawing/2014/main" id="{8440E9EA-43C4-C54E-98F3-E733DFA077D9}"/>
+              </a:ext>
+            </a:extLst>
+          </p:cNvPr>
+          <p:cNvSpPr/>
+          <p:nvPr/>
+        </p:nvSpPr>
+        <p:spPr>
+          <a:xfrm>
+            <a:off x="2921676" y="1674506"/>
+            <a:ext cx="294468" cy="294468"/>
+          </a:xfrm>
+          <a:prstGeom prst="ellipse">
+            <a:avLst/>
+          </a:prstGeom>
+          <a:solidFill>
+            <a:schemeClr val="accent4"/>
+          </a:solidFill>
+        </p:spPr>
+        <p:style>
+          <a:lnRef idx="2">
+            <a:schemeClr val="accent1">
+              <a:shade val="50000"/>
+            </a:schemeClr>
+          </a:lnRef>
+          <a:fillRef idx="1">
+            <a:schemeClr val="accent1"/>
+          </a:fillRef>
+          <a:effectRef idx="0">
+            <a:schemeClr val="accent1"/>
+          </a:effectRef>
+          <a:fontRef idx="minor">
+            <a:schemeClr val="lt1"/>
+          </a:fontRef>
+        </p:style>
+        <p:txBody>
+          <a:bodyPr rtlCol="0" anchor="ctr"/>
+          <a:lstStyle/>
+          <a:p>
+            <a:pPr algn="ctr"/>
+            <a:endParaRPr lang="en-US"/>
+          </a:p>
+        </p:txBody>
+      </p:sp>
+      <p:sp>
+        <p:nvSpPr>
+          <p:cNvPr id="33" name="Oval 32">
+            <a:extLst>
+              <a:ext uri="{FF2B5EF4-FFF2-40B4-BE49-F238E27FC236}">
+                <a16:creationId xmlns:a16="http://schemas.microsoft.com/office/drawing/2014/main" id="{E895DA2D-D3D0-6547-A366-55CC61A6F780}"/>
+              </a:ext>
+            </a:extLst>
+          </p:cNvPr>
+          <p:cNvSpPr/>
+          <p:nvPr/>
+        </p:nvSpPr>
+        <p:spPr>
+          <a:xfrm>
+            <a:off x="2700289" y="2119084"/>
+            <a:ext cx="737242" cy="231018"/>
+          </a:xfrm>
+          <a:prstGeom prst="ellipse">
+            <a:avLst/>
+          </a:prstGeom>
+          <a:solidFill>
+            <a:schemeClr val="accent5">
+              <a:lumMod val="20000"/>
+              <a:lumOff val="80000"/>
+              <a:alpha val="70672"/>
+            </a:schemeClr>
+          </a:solidFill>
+          <a:ln>
+            <a:solidFill>
+              <a:srgbClr val="0070C0"/>
+            </a:solidFill>
+          </a:ln>
+        </p:spPr>
+        <p:style>
+          <a:lnRef idx="2">
+            <a:schemeClr val="accent1">
+              <a:shade val="50000"/>
+            </a:schemeClr>
+          </a:lnRef>
+          <a:fillRef idx="1">
+            <a:schemeClr val="accent1"/>
+          </a:fillRef>
+          <a:effectRef idx="0">
+            <a:schemeClr val="accent1"/>
+          </a:effectRef>
+          <a:fontRef idx="minor">
+            <a:schemeClr val="lt1"/>
+          </a:fontRef>
+        </p:style>
+        <p:txBody>
+          <a:bodyPr rtlCol="0" anchor="ctr"/>
+          <a:lstStyle/>
+          <a:p>
+            <a:pPr algn="ctr"/>
+            <a:endParaRPr lang="en-US"/>
+          </a:p>
+        </p:txBody>
+      </p:sp>
+      <p:sp>
+        <p:nvSpPr>
+          <p:cNvPr id="34" name="Oval 33">
+            <a:extLst>
+              <a:ext uri="{FF2B5EF4-FFF2-40B4-BE49-F238E27FC236}">
+                <a16:creationId xmlns:a16="http://schemas.microsoft.com/office/drawing/2014/main" id="{14E7C7C7-5362-AB42-9D0B-48F844AE0C7F}"/>
+              </a:ext>
+            </a:extLst>
+          </p:cNvPr>
+          <p:cNvSpPr/>
+          <p:nvPr/>
+        </p:nvSpPr>
+        <p:spPr>
+          <a:xfrm>
+            <a:off x="2700289" y="4706644"/>
+            <a:ext cx="737242" cy="231018"/>
+          </a:xfrm>
+          <a:prstGeom prst="ellipse">
+            <a:avLst/>
+          </a:prstGeom>
+          <a:solidFill>
+            <a:schemeClr val="accent5">
+              <a:lumMod val="20000"/>
+              <a:lumOff val="80000"/>
+              <a:alpha val="70672"/>
+            </a:schemeClr>
+          </a:solidFill>
+          <a:ln>
+            <a:solidFill>
+              <a:srgbClr val="0070C0"/>
+            </a:solidFill>
+          </a:ln>
+        </p:spPr>
+        <p:style>
+          <a:lnRef idx="2">
+            <a:schemeClr val="accent1">
+              <a:shade val="50000"/>
+            </a:schemeClr>
+          </a:lnRef>
+          <a:fillRef idx="1">
+            <a:schemeClr val="accent1"/>
+          </a:fillRef>
+          <a:effectRef idx="0">
+            <a:schemeClr val="accent1"/>
+          </a:effectRef>
+          <a:fontRef idx="minor">
+            <a:schemeClr val="lt1"/>
+          </a:fontRef>
+        </p:style>
+        <p:txBody>
+          <a:bodyPr rtlCol="0" anchor="ctr"/>
+          <a:lstStyle/>
+          <a:p>
+            <a:pPr algn="ctr"/>
+            <a:endParaRPr lang="en-US"/>
+          </a:p>
+        </p:txBody>
+      </p:sp>
+      <p:sp>
+        <p:nvSpPr>
+          <p:cNvPr id="35" name="Oval 34">
+            <a:extLst>
+              <a:ext uri="{FF2B5EF4-FFF2-40B4-BE49-F238E27FC236}">
+                <a16:creationId xmlns:a16="http://schemas.microsoft.com/office/drawing/2014/main" id="{CE3F0682-C169-2B45-B192-6427C490D3B6}"/>
+              </a:ext>
+            </a:extLst>
+          </p:cNvPr>
+          <p:cNvSpPr/>
+          <p:nvPr/>
+        </p:nvSpPr>
+        <p:spPr>
+          <a:xfrm>
+            <a:off x="2921676" y="5180331"/>
+            <a:ext cx="294468" cy="294468"/>
+          </a:xfrm>
+          <a:prstGeom prst="ellipse">
+            <a:avLst/>
+          </a:prstGeom>
+          <a:solidFill>
+            <a:schemeClr val="accent4"/>
+          </a:solidFill>
+        </p:spPr>
+        <p:style>
+          <a:lnRef idx="2">
+            <a:schemeClr val="accent1">
+              <a:shade val="50000"/>
+            </a:schemeClr>
+          </a:lnRef>
+          <a:fillRef idx="1">
+            <a:schemeClr val="accent1"/>
+          </a:fillRef>
+          <a:effectRef idx="0">
+            <a:schemeClr val="accent1"/>
+          </a:effectRef>
+          <a:fontRef idx="minor">
+            <a:schemeClr val="lt1"/>
+          </a:fontRef>
+        </p:style>
+        <p:txBody>
+          <a:bodyPr rtlCol="0" anchor="ctr"/>
+          <a:lstStyle/>
+          <a:p>
+            <a:pPr algn="ctr"/>
+            <a:endParaRPr lang="en-US"/>
+          </a:p>
+        </p:txBody>
+      </p:sp>
+      <p:sp>
+        <p:nvSpPr>
+          <p:cNvPr id="36" name="TextBox 35">
+            <a:extLst>
+              <a:ext uri="{FF2B5EF4-FFF2-40B4-BE49-F238E27FC236}">
+                <a16:creationId xmlns:a16="http://schemas.microsoft.com/office/drawing/2014/main" id="{17C850E5-2DF4-124E-AB45-622FF4D87943}"/>
+              </a:ext>
+            </a:extLst>
+          </p:cNvPr>
+          <p:cNvSpPr txBox="1"/>
+          <p:nvPr/>
+        </p:nvSpPr>
+        <p:spPr>
+          <a:xfrm>
+            <a:off x="7538024" y="6157292"/>
+            <a:ext cx="4653976" cy="523220"/>
+          </a:xfrm>
+          <a:prstGeom prst="rect">
+            <a:avLst/>
+          </a:prstGeom>
+          <a:noFill/>
+        </p:spPr>
+        <p:txBody>
+          <a:bodyPr wrap="square" rtlCol="0">
+            <a:spAutoFit/>
+          </a:bodyPr>
+          <a:lstStyle/>
+          <a:p>
+            <a:r>
+              <a:rPr lang="en-US" dirty="0"/>
+              <a:t>from Jake </a:t>
+            </a:r>
+            <a:r>
+              <a:rPr lang="en-US" dirty="0" err="1"/>
+              <a:t>VanderPlas</a:t>
+            </a:r>
+            <a:endParaRPr lang="en-US" dirty="0"/>
+          </a:p>
+          <a:p>
+            <a:r>
+              <a:rPr lang="en-US" dirty="0">
+                <a:hlinkClick r:id="rId2"/>
+              </a:rPr>
+              <a:t>https://www.youtube.com/watch?v=KhAUfqhLakw</a:t>
+            </a:r>
+            <a:r>
+              <a:rPr lang="en-US" dirty="0"/>
+              <a:t> </a:t>
+            </a:r>
+          </a:p>
+        </p:txBody>
+      </p:sp>
+      <p:sp>
+        <p:nvSpPr>
+          <p:cNvPr id="37" name="TextBox 36">
+            <a:extLst>
+              <a:ext uri="{FF2B5EF4-FFF2-40B4-BE49-F238E27FC236}">
+                <a16:creationId xmlns:a16="http://schemas.microsoft.com/office/drawing/2014/main" id="{DCA3305E-3FC6-4041-ABE0-3DEA2DC4C76B}"/>
+              </a:ext>
+            </a:extLst>
+          </p:cNvPr>
+          <p:cNvSpPr txBox="1"/>
+          <p:nvPr/>
+        </p:nvSpPr>
+        <p:spPr>
+          <a:xfrm>
+            <a:off x="8461363" y="3695285"/>
+            <a:ext cx="3634531" cy="1815882"/>
+          </a:xfrm>
+          <a:prstGeom prst="rect">
+            <a:avLst/>
+          </a:prstGeom>
+          <a:noFill/>
+        </p:spPr>
+        <p:txBody>
+          <a:bodyPr wrap="square" rtlCol="0">
+            <a:spAutoFit/>
+          </a:bodyPr>
+          <a:lstStyle/>
+          <a:p>
+            <a:r>
+              <a:rPr lang="en-US" dirty="0"/>
+              <a:t>In general, a frequentist's</a:t>
+            </a:r>
+          </a:p>
+          <a:p>
+            <a:r>
+              <a:rPr lang="en-US" dirty="0"/>
+              <a:t> </a:t>
+            </a:r>
+            <a:r>
+              <a:rPr lang="en-US" b="1" dirty="0">
+                <a:solidFill>
+                  <a:srgbClr val="FF0000"/>
+                </a:solidFill>
+              </a:rPr>
+              <a:t>95% Confidence Interval</a:t>
+            </a:r>
+          </a:p>
+          <a:p>
+            <a:r>
+              <a:rPr lang="en-US" b="1" dirty="0">
+                <a:solidFill>
+                  <a:srgbClr val="00B050"/>
+                </a:solidFill>
+              </a:rPr>
+              <a:t>is not 95% likely</a:t>
+            </a:r>
+            <a:r>
+              <a:rPr lang="en-US" dirty="0"/>
+              <a:t> to contain the true value!</a:t>
+            </a:r>
+          </a:p>
+          <a:p>
+            <a:endParaRPr lang="en-US" dirty="0"/>
+          </a:p>
+          <a:p>
+            <a:r>
+              <a:rPr lang="en-US" dirty="0"/>
+              <a:t>A frequentist only states that:</a:t>
+            </a:r>
+          </a:p>
+          <a:p>
+            <a:r>
+              <a:rPr lang="en-US" dirty="0"/>
+              <a:t>   if we repeat experiment multiple times</a:t>
+            </a:r>
+          </a:p>
+          <a:p>
+            <a:r>
+              <a:rPr lang="en-US" dirty="0"/>
+              <a:t>   then 95% of such confidence intervals</a:t>
+            </a:r>
+          </a:p>
+          <a:p>
+            <a:r>
+              <a:rPr lang="en-US" dirty="0"/>
+              <a:t>   will contain the true value.</a:t>
+            </a:r>
+          </a:p>
+        </p:txBody>
+      </p:sp>
+      <p:sp>
+        <p:nvSpPr>
+          <p:cNvPr id="38" name="Oval 37">
+            <a:extLst>
+              <a:ext uri="{FF2B5EF4-FFF2-40B4-BE49-F238E27FC236}">
+                <a16:creationId xmlns:a16="http://schemas.microsoft.com/office/drawing/2014/main" id="{CF6D186E-EF05-3242-87BC-E8DAD450D089}"/>
+              </a:ext>
+            </a:extLst>
+          </p:cNvPr>
+          <p:cNvSpPr/>
+          <p:nvPr/>
+        </p:nvSpPr>
+        <p:spPr>
+          <a:xfrm>
+            <a:off x="6159858" y="4192514"/>
+            <a:ext cx="1538352" cy="821425"/>
+          </a:xfrm>
+          <a:prstGeom prst="ellipse">
+            <a:avLst/>
+          </a:prstGeom>
+          <a:solidFill>
+            <a:schemeClr val="accent5">
+              <a:lumMod val="60000"/>
+              <a:lumOff val="40000"/>
+              <a:alpha val="77000"/>
+            </a:schemeClr>
+          </a:solidFill>
+          <a:ln>
+            <a:solidFill>
+              <a:srgbClr val="0070C0"/>
+            </a:solidFill>
+          </a:ln>
+        </p:spPr>
+        <p:style>
+          <a:lnRef idx="2">
+            <a:schemeClr val="accent1">
+              <a:shade val="50000"/>
+            </a:schemeClr>
+          </a:lnRef>
+          <a:fillRef idx="1">
+            <a:schemeClr val="accent1"/>
+          </a:fillRef>
+          <a:effectRef idx="0">
+            <a:schemeClr val="accent1"/>
+          </a:effectRef>
+          <a:fontRef idx="minor">
+            <a:schemeClr val="lt1"/>
+          </a:fontRef>
+        </p:style>
+        <p:txBody>
+          <a:bodyPr rtlCol="0" anchor="ctr"/>
+          <a:lstStyle/>
+          <a:p>
+            <a:pPr algn="ctr"/>
+            <a:r>
+              <a:rPr lang="en-US" dirty="0">
+                <a:solidFill>
+                  <a:srgbClr val="0070C0"/>
+                </a:solidFill>
+              </a:rPr>
+              <a:t>Our Particular Interval</a:t>
+            </a:r>
+          </a:p>
+        </p:txBody>
+      </p:sp>
+    </p:spTree>
+    <p:extLst>
+      <p:ext uri="{BB962C8B-B14F-4D97-AF65-F5344CB8AC3E}">
+        <p14:creationId xmlns:p14="http://schemas.microsoft.com/office/powerpoint/2010/main" val="333321039"/>
+      </p:ext>
+    </p:extLst>
+  </p:cSld>
+  <p:clrMapOvr>
+    <a:masterClrMapping/>
+  </p:clrMapOvr>
+</p:sld>
+</file>
+
+<file path=ppt/slides/slide8.xml><?xml version="1.0" encoding="utf-8"?>
+<p:sld xmlns:a="http://schemas.openxmlformats.org/drawingml/2006/main" xmlns:r="http://schemas.openxmlformats.org/officeDocument/2006/relationships" xmlns:p="http://schemas.openxmlformats.org/presentationml/2006/main">
+  <p:cSld>
+    <p:spTree>
+      <p:nvGrpSpPr>
+        <p:cNvPr id="1" name=""/>
+        <p:cNvGrpSpPr/>
+        <p:nvPr/>
+      </p:nvGrpSpPr>
+      <p:grpSpPr>
+        <a:xfrm>
+          <a:off x="0" y="0"/>
+          <a:ext cx="0" cy="0"/>
+          <a:chOff x="0" y="0"/>
+          <a:chExt cx="0" cy="0"/>
+        </a:xfrm>
+      </p:grpSpPr>
+      <p:sp>
+        <p:nvSpPr>
+          <p:cNvPr id="5" name="Google Shape;93;p13">
+            <a:extLst>
+              <a:ext uri="{FF2B5EF4-FFF2-40B4-BE49-F238E27FC236}">
+                <a16:creationId xmlns:a16="http://schemas.microsoft.com/office/drawing/2014/main" id="{F5066C6A-F841-BB4E-888A-251B4AF760F4}"/>
+              </a:ext>
+            </a:extLst>
+          </p:cNvPr>
+          <p:cNvSpPr txBox="1"/>
+          <p:nvPr/>
+        </p:nvSpPr>
+        <p:spPr>
+          <a:xfrm>
+            <a:off x="2748641" y="1644652"/>
+            <a:ext cx="6694715" cy="1637391"/>
+          </a:xfrm>
+          <a:prstGeom prst="rect">
+            <a:avLst/>
+          </a:prstGeom>
+          <a:noFill/>
+          <a:ln w="63500">
+            <a:solidFill>
+              <a:schemeClr val="accent6">
+                <a:lumMod val="40000"/>
+                <a:lumOff val="60000"/>
+              </a:schemeClr>
+            </a:solidFill>
+          </a:ln>
+        </p:spPr>
+        <p:txBody>
+          <a:bodyPr spcFirstLastPara="1" wrap="square" lIns="91425" tIns="45700" rIns="91425" bIns="45700" anchor="t" anchorCtr="0">
+            <a:noAutofit/>
+          </a:bodyPr>
+          <a:lstStyle/>
+          <a:p>
+            <a:pPr marL="0" marR="0" lvl="0" indent="0" algn="l" rtl="0">
+              <a:spcBef>
+                <a:spcPts val="0"/>
+              </a:spcBef>
+              <a:spcAft>
+                <a:spcPts val="0"/>
+              </a:spcAft>
+              <a:buNone/>
+            </a:pPr>
+            <a:r>
+              <a:rPr lang="en-US" sz="2400" b="1" dirty="0">
+                <a:solidFill>
+                  <a:schemeClr val="accent1"/>
+                </a:solidFill>
+                <a:latin typeface="Calibri" panose="020F0502020204030204" pitchFamily="34" charset="0"/>
+                <a:cs typeface="Calibri" panose="020F0502020204030204" pitchFamily="34" charset="0"/>
+                <a:sym typeface="Calibri"/>
+              </a:rPr>
+              <a:t>Frequentist interpretation of Bayes’ theorem.</a:t>
+            </a:r>
+            <a:endParaRPr sz="2400" b="1" dirty="0">
+              <a:solidFill>
+                <a:schemeClr val="accent1"/>
+              </a:solidFill>
+              <a:latin typeface="Calibri" panose="020F0502020204030204" pitchFamily="34" charset="0"/>
+              <a:cs typeface="Calibri" panose="020F0502020204030204" pitchFamily="34" charset="0"/>
+            </a:endParaRPr>
+          </a:p>
+          <a:p>
+            <a:pPr marL="0" marR="0" lvl="0" indent="0" algn="l" rtl="0">
+              <a:spcBef>
+                <a:spcPts val="0"/>
+              </a:spcBef>
+              <a:spcAft>
+                <a:spcPts val="0"/>
+              </a:spcAft>
+              <a:buNone/>
+            </a:pPr>
+            <a:r>
+              <a:rPr lang="en-US" sz="1800" b="1" dirty="0">
+                <a:solidFill>
+                  <a:srgbClr val="00B050"/>
+                </a:solidFill>
+                <a:latin typeface="Calibri" panose="020F0502020204030204" pitchFamily="34" charset="0"/>
+                <a:cs typeface="Calibri" panose="020F0502020204030204" pitchFamily="34" charset="0"/>
+                <a:sym typeface="Calibri"/>
+              </a:rPr>
+              <a:t>Probability measures a proportion of outcomes.</a:t>
+            </a:r>
+            <a:endParaRPr sz="1800" b="1" dirty="0">
+              <a:solidFill>
+                <a:srgbClr val="00B050"/>
+              </a:solidFill>
+              <a:latin typeface="Calibri" panose="020F0502020204030204" pitchFamily="34" charset="0"/>
+              <a:cs typeface="Calibri" panose="020F0502020204030204" pitchFamily="34" charset="0"/>
+              <a:sym typeface="Calibri"/>
+            </a:endParaRPr>
+          </a:p>
+          <a:p>
+            <a:pPr marL="0" marR="0" lvl="0" indent="0" algn="l" rtl="0">
+              <a:spcBef>
+                <a:spcPts val="0"/>
+              </a:spcBef>
+              <a:spcAft>
+                <a:spcPts val="0"/>
+              </a:spcAft>
+              <a:buNone/>
+            </a:pPr>
+            <a:r>
+              <a:rPr lang="en-US" sz="1800" dirty="0">
+                <a:solidFill>
+                  <a:schemeClr val="dk1"/>
+                </a:solidFill>
+                <a:latin typeface="Calibri" panose="020F0502020204030204" pitchFamily="34" charset="0"/>
+                <a:cs typeface="Calibri" panose="020F0502020204030204" pitchFamily="34" charset="0"/>
+                <a:sym typeface="Calibri"/>
+              </a:rPr>
+              <a:t>P(A) - proportions of outcomes A</a:t>
+            </a:r>
+          </a:p>
+          <a:p>
+            <a:r>
+              <a:rPr lang="en-US" sz="1800" dirty="0">
+                <a:solidFill>
+                  <a:schemeClr val="dk1"/>
+                </a:solidFill>
+                <a:latin typeface="Calibri" panose="020F0502020204030204" pitchFamily="34" charset="0"/>
+                <a:cs typeface="Calibri" panose="020F0502020204030204" pitchFamily="34" charset="0"/>
+                <a:sym typeface="Calibri"/>
+              </a:rPr>
+              <a:t>P(B) - proportions of outcomes B</a:t>
+            </a:r>
+          </a:p>
+          <a:p>
+            <a:pPr marL="0" marR="0" lvl="0" indent="0" algn="l" rtl="0">
+              <a:spcBef>
+                <a:spcPts val="0"/>
+              </a:spcBef>
+              <a:spcAft>
+                <a:spcPts val="0"/>
+              </a:spcAft>
+              <a:buNone/>
+            </a:pPr>
+            <a:r>
+              <a:rPr lang="en-US" sz="1800" dirty="0">
+                <a:solidFill>
+                  <a:schemeClr val="dk1"/>
+                </a:solidFill>
+                <a:latin typeface="Calibri" panose="020F0502020204030204" pitchFamily="34" charset="0"/>
+                <a:cs typeface="Calibri" panose="020F0502020204030204" pitchFamily="34" charset="0"/>
+                <a:sym typeface="Calibri"/>
+              </a:rPr>
+              <a:t>P(B|A) is the proportion of outcomes B out of outcomes A</a:t>
+            </a:r>
+          </a:p>
+        </p:txBody>
+      </p:sp>
+      <p:sp>
+        <p:nvSpPr>
+          <p:cNvPr id="7" name="TextBox 6">
+            <a:extLst>
+              <a:ext uri="{FF2B5EF4-FFF2-40B4-BE49-F238E27FC236}">
+                <a16:creationId xmlns:a16="http://schemas.microsoft.com/office/drawing/2014/main" id="{925C92EE-03D8-DB44-AE43-BDAD05469BE7}"/>
+              </a:ext>
+            </a:extLst>
+          </p:cNvPr>
+          <p:cNvSpPr txBox="1"/>
+          <p:nvPr/>
+        </p:nvSpPr>
+        <p:spPr>
+          <a:xfrm>
+            <a:off x="-1" y="37572"/>
+            <a:ext cx="6694715" cy="523220"/>
+          </a:xfrm>
+          <a:prstGeom prst="rect">
+            <a:avLst/>
+          </a:prstGeom>
+          <a:noFill/>
+        </p:spPr>
+        <p:txBody>
+          <a:bodyPr wrap="square" rtlCol="0">
+            <a:spAutoFit/>
+          </a:bodyPr>
+          <a:lstStyle/>
+          <a:p>
+            <a:r>
+              <a:rPr lang="en-US" sz="2800" b="1" dirty="0"/>
+              <a:t>Frequentist vs Bayesian </a:t>
+            </a:r>
+          </a:p>
+        </p:txBody>
+      </p:sp>
+      <p:sp>
+        <p:nvSpPr>
+          <p:cNvPr id="8" name="Google Shape;93;p13">
+            <a:extLst>
+              <a:ext uri="{FF2B5EF4-FFF2-40B4-BE49-F238E27FC236}">
+                <a16:creationId xmlns:a16="http://schemas.microsoft.com/office/drawing/2014/main" id="{63B1458D-308E-4C42-81E2-BCB6757E15B7}"/>
+              </a:ext>
+            </a:extLst>
+          </p:cNvPr>
+          <p:cNvSpPr txBox="1"/>
+          <p:nvPr/>
+        </p:nvSpPr>
+        <p:spPr>
+          <a:xfrm>
+            <a:off x="2748642" y="4114801"/>
+            <a:ext cx="6694715" cy="1637390"/>
+          </a:xfrm>
+          <a:prstGeom prst="rect">
+            <a:avLst/>
+          </a:prstGeom>
+          <a:noFill/>
+          <a:ln w="63500">
+            <a:solidFill>
+              <a:schemeClr val="accent6">
+                <a:lumMod val="40000"/>
+                <a:lumOff val="60000"/>
+              </a:schemeClr>
+            </a:solidFill>
+          </a:ln>
+        </p:spPr>
+        <p:txBody>
+          <a:bodyPr spcFirstLastPara="1" wrap="square" lIns="91425" tIns="45700" rIns="91425" bIns="45700" anchor="t" anchorCtr="0">
+            <a:noAutofit/>
+          </a:bodyPr>
+          <a:lstStyle/>
+          <a:p>
+            <a:r>
+              <a:rPr lang="en-US" sz="2400" b="1" dirty="0">
+                <a:solidFill>
+                  <a:schemeClr val="accent1"/>
+                </a:solidFill>
+                <a:latin typeface="Calibri" panose="020F0502020204030204" pitchFamily="34" charset="0"/>
+                <a:cs typeface="Calibri" panose="020F0502020204030204" pitchFamily="34" charset="0"/>
+                <a:sym typeface="Calibri"/>
+              </a:rPr>
+              <a:t>Bayesian interpretation of Bayes’ theorem.</a:t>
+            </a:r>
+            <a:endParaRPr lang="en-US" sz="2400" b="1" dirty="0">
+              <a:solidFill>
+                <a:schemeClr val="accent1"/>
+              </a:solidFill>
+              <a:latin typeface="Calibri" panose="020F0502020204030204" pitchFamily="34" charset="0"/>
+              <a:cs typeface="Calibri" panose="020F0502020204030204" pitchFamily="34" charset="0"/>
+            </a:endParaRPr>
+          </a:p>
+          <a:p>
+            <a:pPr lvl="0"/>
+            <a:r>
+              <a:rPr lang="en-US" sz="1800" b="1" dirty="0">
+                <a:solidFill>
+                  <a:srgbClr val="00B050"/>
+                </a:solidFill>
+                <a:latin typeface="Calibri" panose="020F0502020204030204" pitchFamily="34" charset="0"/>
+                <a:cs typeface="Calibri" panose="020F0502020204030204" pitchFamily="34" charset="0"/>
+                <a:sym typeface="Calibri"/>
+              </a:rPr>
+              <a:t>Probability measures a degree of belief.</a:t>
+            </a:r>
+            <a:br>
+              <a:rPr lang="en-US" sz="1800" b="1" dirty="0">
+                <a:solidFill>
+                  <a:srgbClr val="00B050"/>
+                </a:solidFill>
+                <a:latin typeface="Calibri" panose="020F0502020204030204" pitchFamily="34" charset="0"/>
+                <a:cs typeface="Calibri" panose="020F0502020204030204" pitchFamily="34" charset="0"/>
+                <a:sym typeface="Calibri"/>
+              </a:rPr>
+            </a:br>
+            <a:r>
+              <a:rPr lang="en-US" sz="1800" dirty="0">
+                <a:solidFill>
+                  <a:schemeClr val="dk1"/>
+                </a:solidFill>
+                <a:latin typeface="Calibri" panose="020F0502020204030204" pitchFamily="34" charset="0"/>
+                <a:cs typeface="Calibri" panose="020F0502020204030204" pitchFamily="34" charset="0"/>
+                <a:sym typeface="Calibri"/>
+              </a:rPr>
+              <a:t>P(A), the </a:t>
+            </a:r>
+            <a:r>
+              <a:rPr lang="en-US" sz="1800" b="1" dirty="0">
+                <a:solidFill>
+                  <a:schemeClr val="accent1"/>
+                </a:solidFill>
+                <a:latin typeface="Calibri" panose="020F0502020204030204" pitchFamily="34" charset="0"/>
+                <a:cs typeface="Calibri" panose="020F0502020204030204" pitchFamily="34" charset="0"/>
+                <a:sym typeface="Calibri"/>
+              </a:rPr>
+              <a:t>prior</a:t>
+            </a:r>
+            <a:r>
+              <a:rPr lang="en-US" sz="1800" dirty="0">
+                <a:solidFill>
+                  <a:schemeClr val="dk1"/>
+                </a:solidFill>
+                <a:latin typeface="Calibri" panose="020F0502020204030204" pitchFamily="34" charset="0"/>
+                <a:cs typeface="Calibri" panose="020F0502020204030204" pitchFamily="34" charset="0"/>
+                <a:sym typeface="Calibri"/>
+              </a:rPr>
+              <a:t>, is the initial degree of belief in A.</a:t>
+            </a:r>
+            <a:endParaRPr lang="en-US" sz="1800" dirty="0">
+              <a:solidFill>
+                <a:schemeClr val="dk1"/>
+              </a:solidFill>
+              <a:latin typeface="Calibri" panose="020F0502020204030204" pitchFamily="34" charset="0"/>
+              <a:cs typeface="Calibri" panose="020F0502020204030204" pitchFamily="34" charset="0"/>
+            </a:endParaRPr>
+          </a:p>
+          <a:p>
+            <a:pPr lvl="0"/>
+            <a:r>
+              <a:rPr lang="en-US" sz="1800" dirty="0">
+                <a:solidFill>
+                  <a:schemeClr val="dk1"/>
+                </a:solidFill>
+                <a:latin typeface="Calibri" panose="020F0502020204030204" pitchFamily="34" charset="0"/>
+                <a:cs typeface="Calibri" panose="020F0502020204030204" pitchFamily="34" charset="0"/>
+                <a:sym typeface="Calibri"/>
+              </a:rPr>
+              <a:t>P(A|B), the </a:t>
+            </a:r>
+            <a:r>
+              <a:rPr lang="en-US" sz="1800" b="1" dirty="0">
+                <a:solidFill>
+                  <a:schemeClr val="accent1"/>
+                </a:solidFill>
+                <a:latin typeface="Calibri" panose="020F0502020204030204" pitchFamily="34" charset="0"/>
+                <a:cs typeface="Calibri" panose="020F0502020204030204" pitchFamily="34" charset="0"/>
+                <a:sym typeface="Calibri"/>
+              </a:rPr>
+              <a:t>posterior</a:t>
+            </a:r>
+            <a:r>
+              <a:rPr lang="en-US" sz="1800" dirty="0">
+                <a:solidFill>
+                  <a:schemeClr val="dk1"/>
+                </a:solidFill>
+                <a:latin typeface="Calibri" panose="020F0502020204030204" pitchFamily="34" charset="0"/>
+                <a:cs typeface="Calibri" panose="020F0502020204030204" pitchFamily="34" charset="0"/>
+                <a:sym typeface="Calibri"/>
+              </a:rPr>
+              <a:t>, is the degree of belief having accounted for B.</a:t>
+            </a:r>
+            <a:br>
+              <a:rPr lang="en-US" sz="1800" dirty="0">
+                <a:solidFill>
+                  <a:schemeClr val="dk1"/>
+                </a:solidFill>
+                <a:latin typeface="Calibri" panose="020F0502020204030204" pitchFamily="34" charset="0"/>
+                <a:cs typeface="Calibri" panose="020F0502020204030204" pitchFamily="34" charset="0"/>
+                <a:sym typeface="Calibri"/>
+              </a:rPr>
+            </a:br>
+            <a:r>
+              <a:rPr lang="en-US" sz="1800" dirty="0">
+                <a:solidFill>
+                  <a:schemeClr val="dk1"/>
+                </a:solidFill>
+                <a:latin typeface="Calibri" panose="020F0502020204030204" pitchFamily="34" charset="0"/>
+                <a:cs typeface="Calibri" panose="020F0502020204030204" pitchFamily="34" charset="0"/>
+                <a:sym typeface="Calibri"/>
+              </a:rPr>
+              <a:t>P(B|A)/P(B) – represents the support B provides for A.</a:t>
+            </a:r>
+            <a:endParaRPr lang="en-US" sz="1800" dirty="0">
+              <a:solidFill>
+                <a:schemeClr val="dk1"/>
+              </a:solidFill>
+              <a:latin typeface="Calibri" panose="020F0502020204030204" pitchFamily="34" charset="0"/>
+              <a:cs typeface="Calibri" panose="020F0502020204030204" pitchFamily="34" charset="0"/>
+            </a:endParaRPr>
+          </a:p>
+          <a:p>
+            <a:pPr marL="0" marR="0" lvl="0" indent="0" algn="l" rtl="0">
+              <a:spcBef>
+                <a:spcPts val="0"/>
+              </a:spcBef>
+              <a:spcAft>
+                <a:spcPts val="0"/>
+              </a:spcAft>
+              <a:buNone/>
+            </a:pPr>
+            <a:endParaRPr sz="1800" dirty="0">
+              <a:latin typeface="Calibri" panose="020F0502020204030204" pitchFamily="34" charset="0"/>
+              <a:cs typeface="Calibri" panose="020F0502020204030204" pitchFamily="34" charset="0"/>
+            </a:endParaRPr>
+          </a:p>
+        </p:txBody>
+      </p:sp>
+    </p:spTree>
+    <p:extLst>
+      <p:ext uri="{BB962C8B-B14F-4D97-AF65-F5344CB8AC3E}">
+        <p14:creationId xmlns:p14="http://schemas.microsoft.com/office/powerpoint/2010/main" val="1824935014"/>
       </p:ext>
     </p:extLst>
   </p:cSld>
@@ -19800,7 +20742,7 @@
           <p:cNvPr id="4" name="TextBox 3">
             <a:extLst>
               <a:ext uri="{FF2B5EF4-FFF2-40B4-BE49-F238E27FC236}">
-                <a16:creationId xmlns:a16="http://schemas.microsoft.com/office/drawing/2014/main" id="{929F7588-E09F-B248-9AF8-0614D59D3E5A}"/>
+                <a16:creationId xmlns:a16="http://schemas.microsoft.com/office/drawing/2014/main" id="{1EB5F268-965F-C142-A102-83C02389B555}"/>
               </a:ext>
             </a:extLst>
           </p:cNvPr>
@@ -19809,8 +20751,8 @@
         </p:nvSpPr>
         <p:spPr>
           <a:xfrm>
-            <a:off x="0" y="0"/>
-            <a:ext cx="7010400" cy="738664"/>
+            <a:off x="84912" y="85118"/>
+            <a:ext cx="5906814" cy="6771084"/>
           </a:xfrm>
           <a:prstGeom prst="rect">
             <a:avLst/>
@@ -19824,14 +20766,187 @@
           <a:lstStyle/>
           <a:p>
             <a:r>
-              <a:rPr lang="en-US" sz="2800" b="1" dirty="0"/>
-              <a:t>Boy or Girl Paradox</a:t>
-            </a:r>
-          </a:p>
-          <a:p>
-            <a:r>
-              <a:rPr lang="en-US" b="1" dirty="0"/>
-              <a:t>(a.k.a. "The Two Child Problem", "Mr. Smith's Children", "Mrs. Smith Problem").</a:t>
+              <a:rPr lang="en-US" sz="1800" b="1" dirty="0"/>
+              <a:t>Random Variable. Probability Distribution</a:t>
+            </a:r>
+          </a:p>
+          <a:p>
+            <a:br>
+              <a:rPr lang="en-US" dirty="0"/>
+            </a:br>
+            <a:r>
+              <a:rPr lang="en-US" b="1" dirty="0">
+                <a:solidFill>
+                  <a:srgbClr val="0070C0"/>
+                </a:solidFill>
+              </a:rPr>
+              <a:t>Random variable </a:t>
+            </a:r>
+            <a:r>
+              <a:rPr lang="en-US" dirty="0"/>
+              <a:t>is a numerical variable taking different values.</a:t>
+            </a:r>
+          </a:p>
+          <a:p>
+            <a:r>
+              <a:rPr lang="en-US" dirty="0"/>
+              <a:t>Values may be </a:t>
+            </a:r>
+            <a:r>
+              <a:rPr lang="en-US" b="1" dirty="0">
+                <a:solidFill>
+                  <a:srgbClr val="0070C0"/>
+                </a:solidFill>
+              </a:rPr>
+              <a:t>discrete or continuous</a:t>
+            </a:r>
+            <a:r>
+              <a:rPr lang="en-US" dirty="0"/>
+              <a:t>.</a:t>
+            </a:r>
+          </a:p>
+          <a:p>
+            <a:endParaRPr lang="en-US" dirty="0"/>
+          </a:p>
+          <a:p>
+            <a:r>
+              <a:rPr lang="en-US" dirty="0"/>
+              <a:t>For example, think of variable “x” which may have any real value between -10 and +10.</a:t>
+            </a:r>
+          </a:p>
+          <a:p>
+            <a:endParaRPr lang="en-US" dirty="0"/>
+          </a:p>
+          <a:p>
+            <a:r>
+              <a:rPr lang="en-US" dirty="0"/>
+              <a:t>Or think of a variable “z” which can have discrete values 0,0.1,0.2, … 0.9, 1.0</a:t>
+            </a:r>
+          </a:p>
+          <a:p>
+            <a:endParaRPr lang="en-US" dirty="0"/>
+          </a:p>
+          <a:p>
+            <a:r>
+              <a:rPr lang="en-US" sz="2400" b="1" dirty="0">
+                <a:solidFill>
+                  <a:srgbClr val="FF0000"/>
+                </a:solidFill>
+              </a:rPr>
+              <a:t>Discrete Case</a:t>
+            </a:r>
+          </a:p>
+          <a:p>
+            <a:r>
+              <a:rPr lang="en-US" b="1" dirty="0">
+                <a:solidFill>
+                  <a:srgbClr val="0070C0"/>
+                </a:solidFill>
+              </a:rPr>
+              <a:t>Probability function </a:t>
+            </a:r>
+            <a:r>
+              <a:rPr lang="en-US" dirty="0"/>
+              <a:t>P(x) of a discrete random variable “x” </a:t>
+            </a:r>
+          </a:p>
+          <a:p>
+            <a:r>
+              <a:rPr lang="en-US" dirty="0"/>
+              <a:t>is simply a function which gives probability of discrete values.</a:t>
+            </a:r>
+          </a:p>
+          <a:p>
+            <a:endParaRPr lang="en-US" dirty="0"/>
+          </a:p>
+          <a:p>
+            <a:r>
+              <a:rPr lang="en-US" dirty="0"/>
+              <a:t>For example, if the random variable “x” may have two values: ( 0 or 1 ),</a:t>
+            </a:r>
+          </a:p>
+          <a:p>
+            <a:r>
+              <a:rPr lang="en-US" dirty="0"/>
+              <a:t>and if probabilities of those values are equal, then</a:t>
+            </a:r>
+          </a:p>
+          <a:p>
+            <a:endParaRPr lang="en-US" dirty="0"/>
+          </a:p>
+          <a:p>
+            <a:r>
+              <a:rPr lang="en-US" dirty="0"/>
+              <a:t>P(0) = 0.5, f(1) = 0.5.</a:t>
+            </a:r>
+          </a:p>
+          <a:p>
+            <a:endParaRPr lang="en-US" dirty="0"/>
+          </a:p>
+          <a:p>
+            <a:r>
+              <a:rPr lang="en-US" dirty="0"/>
+              <a:t>The sum of individual probabilities for all possible values should be 1.</a:t>
+            </a:r>
+          </a:p>
+          <a:p>
+            <a:endParaRPr lang="en-US" dirty="0"/>
+          </a:p>
+          <a:p>
+            <a:r>
+              <a:rPr lang="en-US" b="1" dirty="0">
+                <a:solidFill>
+                  <a:srgbClr val="0070C0"/>
+                </a:solidFill>
+              </a:rPr>
+              <a:t>Expected value </a:t>
+            </a:r>
+            <a:r>
+              <a:rPr lang="en-US" dirty="0"/>
+              <a:t>is an weighted average of all values.</a:t>
+            </a:r>
+          </a:p>
+          <a:p>
+            <a:endParaRPr lang="en-US" dirty="0"/>
+          </a:p>
+          <a:p>
+            <a:r>
+              <a:rPr lang="en-US" dirty="0"/>
+              <a:t>E(x) = sum(Xi*P(Xi)), where Xi goes through all allowed values of X.</a:t>
+            </a:r>
+          </a:p>
+          <a:p>
+            <a:endParaRPr lang="en-US" dirty="0"/>
+          </a:p>
+          <a:p>
+            <a:r>
+              <a:rPr lang="en-US" b="1" dirty="0">
+                <a:solidFill>
+                  <a:srgbClr val="0070C0"/>
+                </a:solidFill>
+              </a:rPr>
+              <a:t>Variance = sigma squared </a:t>
+            </a:r>
+            <a:r>
+              <a:rPr lang="en-US" dirty="0"/>
+              <a:t>= sum( (Xi-E(x))**2 * P(Xi) )</a:t>
+            </a:r>
+          </a:p>
+          <a:p>
+            <a:endParaRPr lang="en-US" dirty="0"/>
+          </a:p>
+          <a:p>
+            <a:r>
+              <a:rPr lang="en-US" b="1" dirty="0">
+                <a:solidFill>
+                  <a:srgbClr val="0070C0"/>
+                </a:solidFill>
+              </a:rPr>
+              <a:t>Standard Deviation </a:t>
+            </a:r>
+            <a:r>
+              <a:rPr lang="en-US" dirty="0"/>
+              <a:t>= sqrt(sigma squared)</a:t>
             </a:r>
           </a:p>
         </p:txBody>
@@ -19841,7 +20956,7 @@
           <p:cNvPr id="5" name="TextBox 4">
             <a:extLst>
               <a:ext uri="{FF2B5EF4-FFF2-40B4-BE49-F238E27FC236}">
-                <a16:creationId xmlns:a16="http://schemas.microsoft.com/office/drawing/2014/main" id="{6C2F706E-77C7-AF44-9FCC-6397C644CBC6}"/>
+                <a16:creationId xmlns:a16="http://schemas.microsoft.com/office/drawing/2014/main" id="{E72EEA3B-9D50-A145-B8FE-B6686486D979}"/>
               </a:ext>
             </a:extLst>
           </p:cNvPr>
@@ -19850,8 +20965,8 @@
         </p:nvSpPr>
         <p:spPr>
           <a:xfrm>
-            <a:off x="0" y="1341119"/>
-            <a:ext cx="5413248" cy="5047536"/>
+            <a:off x="5991726" y="178676"/>
+            <a:ext cx="6200274" cy="6494085"/>
           </a:xfrm>
           <a:prstGeom prst="rect">
             <a:avLst/>
@@ -19866,7 +20981,13 @@
           <a:p>
             <a:r>
               <a:rPr lang="en-US" dirty="0"/>
-              <a:t>Initially formulated at 1959, when Martin Gardner featured it in his October 1959 "Mathematical Games column" in Scientific American. He titled it The Two Children Problem, and phrased the paradox as follows:</a:t>
+              <a:t>Probability Density Function (PDF)  </a:t>
+            </a:r>
+          </a:p>
+          <a:p>
+            <a:r>
+              <a:rPr lang="en-US" dirty="0"/>
+              <a:t>vs.  Cumulative Probability Function ( CPF)</a:t>
             </a:r>
           </a:p>
           <a:p>
@@ -19874,23 +20995,80 @@
           </a:p>
           <a:p>
             <a:r>
+              <a:rPr lang="en-US" sz="2400" b="1" dirty="0">
+                <a:solidFill>
+                  <a:srgbClr val="FF0000"/>
+                </a:solidFill>
+              </a:rPr>
+              <a:t>Continuous Case</a:t>
+            </a:r>
+          </a:p>
+          <a:p>
+            <a:endParaRPr lang="en-US" dirty="0"/>
+          </a:p>
+          <a:p>
+            <a:r>
+              <a:rPr lang="en-US" b="1" dirty="0">
+                <a:solidFill>
+                  <a:srgbClr val="0070C0"/>
+                </a:solidFill>
+              </a:rPr>
+              <a:t>Probability Density Function (PDF)</a:t>
+            </a:r>
+            <a:r>
               <a:rPr lang="en-US" dirty="0"/>
-              <a:t>Question 1: Mr. Jones has two children. The older child is a girl. What is the probability that both children are girls?</a:t>
+              <a:t> f(x) is a continuous function.</a:t>
             </a:r>
           </a:p>
           <a:p>
             <a:endParaRPr lang="en-US" dirty="0"/>
           </a:p>
           <a:p>
+            <a:r>
+              <a:rPr lang="en-US" dirty="0"/>
+              <a:t>f(x)*dx gives probability that value is between x and </a:t>
+            </a:r>
+            <a:r>
+              <a:rPr lang="en-US" dirty="0" err="1"/>
+              <a:t>x+dx</a:t>
+            </a:r>
+            <a:r>
+              <a:rPr lang="en-US" dirty="0"/>
+              <a:t>.</a:t>
+            </a:r>
+          </a:p>
+          <a:p>
             <a:endParaRPr lang="en-US" dirty="0"/>
           </a:p>
           <a:p>
+            <a:r>
+              <a:rPr lang="en-US" dirty="0"/>
+              <a:t>The total integral of f(x)*dx should be equal to 1.</a:t>
+            </a:r>
+          </a:p>
+          <a:p>
             <a:endParaRPr lang="en-US" dirty="0"/>
           </a:p>
           <a:p>
             <a:r>
+              <a:rPr lang="en-US" b="1" dirty="0">
+                <a:solidFill>
+                  <a:srgbClr val="0070C0"/>
+                </a:solidFill>
+              </a:rPr>
+              <a:t>Cumulative Probability Function (CPF)</a:t>
+            </a:r>
+          </a:p>
+          <a:p>
+            <a:r>
               <a:rPr lang="en-US" dirty="0"/>
-              <a:t>Question 2: Mr. Smith has two children. At least one of them is a boy. What is the probability that both children are boys?</a:t>
+              <a:t>This is simply a function F(x) which gives probability that value is less than x.</a:t>
+            </a:r>
+          </a:p>
+          <a:p>
+            <a:r>
+              <a:rPr lang="en-US" dirty="0"/>
+              <a:t>It monotonously grows from 0 to 1 as x grows (from small to large values).</a:t>
             </a:r>
           </a:p>
           <a:p>
@@ -19901,390 +21079,96 @@
           </a:p>
           <a:p>
             <a:r>
+              <a:rPr lang="en-US" b="1" dirty="0">
+                <a:solidFill>
+                  <a:srgbClr val="0070C0"/>
+                </a:solidFill>
+              </a:rPr>
+              <a:t>The PDF is a first derivative of CPF.</a:t>
+            </a:r>
+          </a:p>
+          <a:p>
+            <a:endParaRPr lang="en-US" dirty="0"/>
+          </a:p>
+          <a:p>
+            <a:r>
               <a:rPr lang="en-US" dirty="0"/>
-              <a:t> - </a:t>
-            </a:r>
-            <a:r>
-              <a:rPr lang="en-US" dirty="0">
-                <a:hlinkClick r:id="rId2"/>
+              <a:t>CPF(</a:t>
+            </a:r>
+            <a:r>
+              <a:rPr lang="en-US" dirty="0" err="1"/>
+              <a:t>x+dx</a:t>
+            </a:r>
+            <a:r>
+              <a:rPr lang="en-US" dirty="0"/>
+              <a:t>) – CPF(x) = = [Prob. of value &lt; (</a:t>
+            </a:r>
+            <a:r>
+              <a:rPr lang="en-US" dirty="0" err="1"/>
+              <a:t>x+dx</a:t>
+            </a:r>
+            <a:r>
+              <a:rPr lang="en-US" dirty="0"/>
+              <a:t>)] – [Prob. of value &lt; x] = f(x)*dx</a:t>
+            </a:r>
+          </a:p>
+          <a:p>
+            <a:endParaRPr lang="en-US" dirty="0"/>
+          </a:p>
+          <a:p>
+            <a:r>
+              <a:rPr lang="en-US" b="1" dirty="0">
+                <a:solidFill>
+                  <a:srgbClr val="0070C0"/>
+                </a:solidFill>
               </a:rPr>
-              <a:t>https://en.wikipedia.org/wiki/Boy_or_Girl_paradox</a:t>
-            </a:r>
+              <a:t>Mean value = Expected value</a:t>
+            </a:r>
+          </a:p>
+          <a:p>
+            <a:endParaRPr lang="en-US" dirty="0"/>
+          </a:p>
+          <a:p>
             <a:r>
               <a:rPr lang="en-US" dirty="0"/>
-              <a:t> </a:t>
+              <a:t>For discrete case we had:</a:t>
+            </a:r>
+          </a:p>
+          <a:p>
+            <a:r>
+              <a:rPr lang="en-US" dirty="0"/>
+              <a:t>E(x) = sum(Xi*P(Xi))</a:t>
             </a:r>
           </a:p>
           <a:p>
             <a:endParaRPr lang="en-US" dirty="0"/>
           </a:p>
           <a:p>
-            <a:endParaRPr lang="en-US" dirty="0"/>
-          </a:p>
-          <a:p>
             <a:r>
               <a:rPr lang="en-US" dirty="0"/>
-              <a:t>video - This May Be The Most Counterintuitive Probability Paradox I've Ever Seen | Can you spot the error?</a:t>
+              <a:t>For continuous case this translates into</a:t>
             </a:r>
           </a:p>
           <a:p>
             <a:r>
               <a:rPr lang="en-US" dirty="0"/>
-              <a:t>- </a:t>
-            </a:r>
-            <a:r>
-              <a:rPr lang="en-US" dirty="0">
-                <a:hlinkClick r:id="rId3"/>
-              </a:rPr>
-              <a:t>https://www.youtube.com/watch?v=bDZieLmya_I</a:t>
-            </a:r>
-            <a:endParaRPr lang="en-US" dirty="0"/>
-          </a:p>
-          <a:p>
-            <a:endParaRPr lang="en-US" dirty="0"/>
-          </a:p>
-          <a:p>
+              <a:t>E(x) = Integral(</a:t>
+            </a:r>
+            <a:r>
+              <a:rPr lang="en-US" dirty="0" err="1"/>
+              <a:t>xF</a:t>
+            </a:r>
             <a:r>
               <a:rPr lang="en-US" dirty="0"/>
-              <a:t>video - The Boy or Girl Probability Paradox Resolved</a:t>
-            </a:r>
-          </a:p>
-          <a:p>
-            <a:r>
-              <a:rPr lang="en-US" dirty="0"/>
-              <a:t>- </a:t>
-            </a:r>
-            <a:r>
-              <a:rPr lang="en-US" dirty="0">
-                <a:hlinkClick r:id="rId4"/>
-              </a:rPr>
-              <a:t>https://www.youtube.com/watch?v=ElB350w8iJo</a:t>
-            </a:r>
-            <a:r>
-              <a:rPr lang="en-US" dirty="0"/>
-              <a:t> </a:t>
-            </a:r>
-          </a:p>
-        </p:txBody>
-      </p:sp>
-      <p:pic>
-        <p:nvPicPr>
-          <p:cNvPr id="6" name="Picture 5">
-            <a:extLst>
-              <a:ext uri="{FF2B5EF4-FFF2-40B4-BE49-F238E27FC236}">
-                <a16:creationId xmlns:a16="http://schemas.microsoft.com/office/drawing/2014/main" id="{CE8981C4-01EB-C345-AB38-EA6A36D18AD5}"/>
-              </a:ext>
-            </a:extLst>
-          </p:cNvPr>
-          <p:cNvPicPr>
-            <a:picLocks noChangeAspect="1"/>
-          </p:cNvPicPr>
-          <p:nvPr/>
-        </p:nvPicPr>
-        <p:blipFill>
-          <a:blip r:embed="rId5" cstate="email">
-            <a:extLst>
-              <a:ext uri="{28A0092B-C50C-407E-A947-70E740481C1C}">
-                <a14:useLocalDpi xmlns:a14="http://schemas.microsoft.com/office/drawing/2010/main"/>
-              </a:ext>
-            </a:extLst>
-          </a:blip>
-          <a:stretch>
-            <a:fillRect/>
-          </a:stretch>
-        </p:blipFill>
-        <p:spPr>
-          <a:xfrm>
-            <a:off x="8618118" y="1019080"/>
-            <a:ext cx="1896973" cy="1431512"/>
-          </a:xfrm>
-          <a:prstGeom prst="rect">
-            <a:avLst/>
-          </a:prstGeom>
-        </p:spPr>
-      </p:pic>
-      <p:pic>
-        <p:nvPicPr>
-          <p:cNvPr id="7" name="Picture 6">
-            <a:extLst>
-              <a:ext uri="{FF2B5EF4-FFF2-40B4-BE49-F238E27FC236}">
-                <a16:creationId xmlns:a16="http://schemas.microsoft.com/office/drawing/2014/main" id="{CA566D42-48FC-5349-A28F-E08379F94264}"/>
-              </a:ext>
-            </a:extLst>
-          </p:cNvPr>
-          <p:cNvPicPr>
-            <a:picLocks noChangeAspect="1"/>
-          </p:cNvPicPr>
-          <p:nvPr/>
-        </p:nvPicPr>
-        <p:blipFill>
-          <a:blip r:embed="rId6" cstate="email">
-            <a:extLst>
-              <a:ext uri="{28A0092B-C50C-407E-A947-70E740481C1C}">
-                <a14:useLocalDpi xmlns:a14="http://schemas.microsoft.com/office/drawing/2010/main"/>
-              </a:ext>
-            </a:extLst>
-          </a:blip>
-          <a:stretch>
-            <a:fillRect/>
-          </a:stretch>
-        </p:blipFill>
-        <p:spPr>
-          <a:xfrm>
-            <a:off x="8618118" y="3154862"/>
-            <a:ext cx="1659816" cy="1252547"/>
-          </a:xfrm>
-          <a:prstGeom prst="rect">
-            <a:avLst/>
-          </a:prstGeom>
-        </p:spPr>
-      </p:pic>
-      <p:pic>
-        <p:nvPicPr>
-          <p:cNvPr id="8" name="Picture 7">
-            <a:extLst>
-              <a:ext uri="{FF2B5EF4-FFF2-40B4-BE49-F238E27FC236}">
-                <a16:creationId xmlns:a16="http://schemas.microsoft.com/office/drawing/2014/main" id="{F6EBFE19-F7F6-8D45-95F9-7186733F377F}"/>
-              </a:ext>
-            </a:extLst>
-          </p:cNvPr>
-          <p:cNvPicPr>
-            <a:picLocks noChangeAspect="1"/>
-          </p:cNvPicPr>
-          <p:nvPr/>
-        </p:nvPicPr>
-        <p:blipFill>
-          <a:blip r:embed="rId7" cstate="email">
-            <a:extLst>
-              <a:ext uri="{28A0092B-C50C-407E-A947-70E740481C1C}">
-                <a14:useLocalDpi xmlns:a14="http://schemas.microsoft.com/office/drawing/2010/main"/>
-              </a:ext>
-            </a:extLst>
-          </a:blip>
-          <a:stretch>
-            <a:fillRect/>
-          </a:stretch>
-        </p:blipFill>
-        <p:spPr>
-          <a:xfrm>
-            <a:off x="6888073" y="4407409"/>
-            <a:ext cx="5219700" cy="1662181"/>
-          </a:xfrm>
-          <a:prstGeom prst="rect">
-            <a:avLst/>
-          </a:prstGeom>
-        </p:spPr>
-      </p:pic>
-      <p:pic>
-        <p:nvPicPr>
-          <p:cNvPr id="9" name="Picture 8">
-            <a:extLst>
-              <a:ext uri="{FF2B5EF4-FFF2-40B4-BE49-F238E27FC236}">
-                <a16:creationId xmlns:a16="http://schemas.microsoft.com/office/drawing/2014/main" id="{7F216E6E-201A-AE49-8004-C7E4DB60139B}"/>
-              </a:ext>
-            </a:extLst>
-          </p:cNvPr>
-          <p:cNvPicPr>
-            <a:picLocks noChangeAspect="1"/>
-          </p:cNvPicPr>
-          <p:nvPr/>
-        </p:nvPicPr>
-        <p:blipFill>
-          <a:blip r:embed="rId8" cstate="email">
-            <a:extLst>
-              <a:ext uri="{28A0092B-C50C-407E-A947-70E740481C1C}">
-                <a14:useLocalDpi xmlns:a14="http://schemas.microsoft.com/office/drawing/2010/main"/>
-              </a:ext>
-            </a:extLst>
-          </a:blip>
-          <a:stretch>
-            <a:fillRect/>
-          </a:stretch>
-        </p:blipFill>
-        <p:spPr>
-          <a:xfrm>
-            <a:off x="6982533" y="6233057"/>
-            <a:ext cx="3076149" cy="590550"/>
-          </a:xfrm>
-          <a:prstGeom prst="rect">
-            <a:avLst/>
-          </a:prstGeom>
-        </p:spPr>
-      </p:pic>
-      <p:sp>
-        <p:nvSpPr>
-          <p:cNvPr id="10" name="TextBox 9">
-            <a:extLst>
-              <a:ext uri="{FF2B5EF4-FFF2-40B4-BE49-F238E27FC236}">
-                <a16:creationId xmlns:a16="http://schemas.microsoft.com/office/drawing/2014/main" id="{6515EADD-2F8D-4D47-B4FB-237457FCE401}"/>
-              </a:ext>
-            </a:extLst>
-          </p:cNvPr>
-          <p:cNvSpPr txBox="1"/>
-          <p:nvPr/>
-        </p:nvSpPr>
-        <p:spPr>
-          <a:xfrm>
-            <a:off x="7378700" y="1492681"/>
-            <a:ext cx="838200" cy="307777"/>
-          </a:xfrm>
-          <a:prstGeom prst="rect">
-            <a:avLst/>
-          </a:prstGeom>
-          <a:noFill/>
-        </p:spPr>
-        <p:txBody>
-          <a:bodyPr wrap="square" rtlCol="0">
-            <a:spAutoFit/>
-          </a:bodyPr>
-          <a:lstStyle/>
-          <a:p>
-            <a:r>
-              <a:rPr lang="en-US" b="1" dirty="0">
-                <a:solidFill>
-                  <a:srgbClr val="FF0000"/>
-                </a:solidFill>
-              </a:rPr>
-              <a:t>P = 1/2</a:t>
-            </a:r>
-          </a:p>
-        </p:txBody>
-      </p:sp>
-      <p:sp>
-        <p:nvSpPr>
-          <p:cNvPr id="11" name="TextBox 10">
-            <a:extLst>
-              <a:ext uri="{FF2B5EF4-FFF2-40B4-BE49-F238E27FC236}">
-                <a16:creationId xmlns:a16="http://schemas.microsoft.com/office/drawing/2014/main" id="{7FE20994-BE99-4142-BFCB-6E614279346F}"/>
-              </a:ext>
-            </a:extLst>
-          </p:cNvPr>
-          <p:cNvSpPr txBox="1"/>
-          <p:nvPr/>
-        </p:nvSpPr>
-        <p:spPr>
-          <a:xfrm>
-            <a:off x="7378700" y="3603386"/>
-            <a:ext cx="838200" cy="307777"/>
-          </a:xfrm>
-          <a:prstGeom prst="rect">
-            <a:avLst/>
-          </a:prstGeom>
-          <a:noFill/>
-        </p:spPr>
-        <p:txBody>
-          <a:bodyPr wrap="square" rtlCol="0">
-            <a:spAutoFit/>
-          </a:bodyPr>
-          <a:lstStyle/>
-          <a:p>
-            <a:r>
-              <a:rPr lang="en-US" b="1" dirty="0">
-                <a:solidFill>
-                  <a:srgbClr val="FF0000"/>
-                </a:solidFill>
-              </a:rPr>
-              <a:t>P = 1/3</a:t>
-            </a:r>
-          </a:p>
-        </p:txBody>
-      </p:sp>
-      <p:sp>
-        <p:nvSpPr>
-          <p:cNvPr id="14" name="Right Arrow 13">
-            <a:extLst>
-              <a:ext uri="{FF2B5EF4-FFF2-40B4-BE49-F238E27FC236}">
-                <a16:creationId xmlns:a16="http://schemas.microsoft.com/office/drawing/2014/main" id="{FD13A09C-709B-8A40-A89E-21595B6F32E2}"/>
-              </a:ext>
-            </a:extLst>
-          </p:cNvPr>
-          <p:cNvSpPr/>
-          <p:nvPr/>
-        </p:nvSpPr>
-        <p:spPr>
-          <a:xfrm rot="966397">
-            <a:off x="5705856" y="3835034"/>
-            <a:ext cx="914400" cy="307777"/>
-          </a:xfrm>
-          <a:prstGeom prst="rightArrow">
-            <a:avLst/>
-          </a:prstGeom>
-        </p:spPr>
-        <p:style>
-          <a:lnRef idx="2">
-            <a:schemeClr val="accent1">
-              <a:shade val="50000"/>
-            </a:schemeClr>
-          </a:lnRef>
-          <a:fillRef idx="1">
-            <a:schemeClr val="accent1"/>
-          </a:fillRef>
-          <a:effectRef idx="0">
-            <a:schemeClr val="accent1"/>
-          </a:effectRef>
-          <a:fontRef idx="minor">
-            <a:schemeClr val="lt1"/>
-          </a:fontRef>
-        </p:style>
-        <p:txBody>
-          <a:bodyPr rtlCol="0" anchor="ctr"/>
-          <a:lstStyle/>
-          <a:p>
-            <a:pPr algn="ctr"/>
-            <a:endParaRPr lang="en-US"/>
-          </a:p>
-        </p:txBody>
-      </p:sp>
-      <p:sp>
-        <p:nvSpPr>
-          <p:cNvPr id="15" name="Right Arrow 14">
-            <a:extLst>
-              <a:ext uri="{FF2B5EF4-FFF2-40B4-BE49-F238E27FC236}">
-                <a16:creationId xmlns:a16="http://schemas.microsoft.com/office/drawing/2014/main" id="{A5361324-BBC4-5342-9E8F-153114277AB2}"/>
-              </a:ext>
-            </a:extLst>
-          </p:cNvPr>
-          <p:cNvSpPr/>
-          <p:nvPr/>
-        </p:nvSpPr>
-        <p:spPr>
-          <a:xfrm rot="20081528">
-            <a:off x="5758979" y="2104279"/>
-            <a:ext cx="914400" cy="307777"/>
-          </a:xfrm>
-          <a:prstGeom prst="rightArrow">
-            <a:avLst/>
-          </a:prstGeom>
-        </p:spPr>
-        <p:style>
-          <a:lnRef idx="2">
-            <a:schemeClr val="accent1">
-              <a:shade val="50000"/>
-            </a:schemeClr>
-          </a:lnRef>
-          <a:fillRef idx="1">
-            <a:schemeClr val="accent1"/>
-          </a:fillRef>
-          <a:effectRef idx="0">
-            <a:schemeClr val="accent1"/>
-          </a:effectRef>
-          <a:fontRef idx="minor">
-            <a:schemeClr val="lt1"/>
-          </a:fontRef>
-        </p:style>
-        <p:txBody>
-          <a:bodyPr rtlCol="0" anchor="ctr"/>
-          <a:lstStyle/>
-          <a:p>
-            <a:pPr algn="ctr"/>
-            <a:endParaRPr lang="en-US"/>
+              <a:t>(x)dx)</a:t>
+            </a:r>
           </a:p>
         </p:txBody>
       </p:sp>
     </p:spTree>
     <p:extLst>
       <p:ext uri="{BB962C8B-B14F-4D97-AF65-F5344CB8AC3E}">
-        <p14:creationId xmlns:p14="http://schemas.microsoft.com/office/powerpoint/2010/main" val="3145259505"/>
+        <p14:creationId xmlns:p14="http://schemas.microsoft.com/office/powerpoint/2010/main" val="2249432796"/>
       </p:ext>
     </p:extLst>
   </p:cSld>
